--- a/tests/report_generator/integration/templates/portfolio-metrics.pptx
+++ b/tests/report_generator/integration/templates/portfolio-metrics.pptx
@@ -336,7 +336,7 @@
           <a:p>
             <a:fld id="{C1255C68-584F-174D-BB81-51BF91708794}" type="datetimeFigureOut">
               <a:rPr lang="en-US" smtClean="0"/>
-              <a:t>8/21/26</a:t>
+              <a:t>9/11/26</a:t>
             </a:fld>
             <a:endParaRPr lang="en-US"/>
           </a:p>
@@ -529,7 +529,7 @@
           <a:p>
             <a:fld id="{A1EDAAC4-819D-C544-9EA1-C73624CFD70B}" type="datetimeFigureOut">
               <a:rPr lang="en-US" smtClean="0"/>
-              <a:t>8/21/26</a:t>
+              <a:t>9/11/26</a:t>
             </a:fld>
             <a:endParaRPr lang="en-US"/>
           </a:p>
@@ -2152,351 +2152,6 @@
 </file>
 
 <file path=ppt/slideLayouts/slideLayout4.xml><?xml version="1.0" encoding="utf-8"?>
-<p:sldLayout xmlns:a="http://schemas.openxmlformats.org/drawingml/2006/main" xmlns:r="http://schemas.openxmlformats.org/officeDocument/2006/relationships" xmlns:p="http://schemas.openxmlformats.org/presentationml/2006/main" preserve="1" userDrawn="1">
-  <p:cSld name="Treemap">
-    <p:spTree>
-      <p:nvGrpSpPr>
-        <p:cNvPr id="1" name=""/>
-        <p:cNvGrpSpPr/>
-        <p:nvPr/>
-      </p:nvGrpSpPr>
-      <p:grpSpPr>
-        <a:xfrm>
-          <a:off x="0" y="0"/>
-          <a:ext cx="0" cy="0"/>
-          <a:chOff x="0" y="0"/>
-          <a:chExt cx="0" cy="0"/>
-        </a:xfrm>
-      </p:grpSpPr>
-      <p:sp>
-        <p:nvSpPr>
-          <p:cNvPr id="26" name="Text Placeholder 4">
-            <a:extLst>
-              <a:ext uri="{FF2B5EF4-FFF2-40B4-BE49-F238E27FC236}">
-                <a16:creationId xmlns:a16="http://schemas.microsoft.com/office/drawing/2014/main" id="{CC299468-581B-CC41-8897-C7E1583185E0}"/>
-              </a:ext>
-            </a:extLst>
-          </p:cNvPr>
-          <p:cNvSpPr>
-            <a:spLocks noGrp="1"/>
-          </p:cNvSpPr>
-          <p:nvPr>
-            <p:ph type="body" sz="quarter" idx="12"/>
-          </p:nvPr>
-        </p:nvSpPr>
-        <p:spPr>
-          <a:xfrm>
-            <a:off x="381600" y="129568"/>
-            <a:ext cx="145471" cy="228209"/>
-          </a:xfrm>
-          <a:prstGeom prst="rect">
-            <a:avLst/>
-          </a:prstGeom>
-          <a:gradFill>
-            <a:gsLst>
-              <a:gs pos="0">
-                <a:srgbClr val="F8C716">
-                  <a:alpha val="0"/>
-                </a:srgbClr>
-              </a:gs>
-              <a:gs pos="5000">
-                <a:srgbClr val="F9C716"/>
-              </a:gs>
-            </a:gsLst>
-            <a:lin ang="0" scaled="0"/>
-          </a:gradFill>
-        </p:spPr>
-        <p:txBody>
-          <a:bodyPr wrap="none" lIns="0" tIns="28800" rIns="144000" bIns="28800" anchor="ctr" anchorCtr="0">
-            <a:spAutoFit/>
-          </a:bodyPr>
-          <a:lstStyle>
-            <a:lvl1pPr marL="0" indent="0">
-              <a:buFont typeface="Arial" panose="020B0604020202020204" pitchFamily="34" charset="0"/>
-              <a:buNone/>
-              <a:defRPr lang="en-US" sz="1050" b="0" cap="none" spc="-30" baseline="0" dirty="0">
-                <a:solidFill>
-                  <a:srgbClr val="000000"/>
-                </a:solidFill>
-                <a:latin typeface="Azeret Mono" pitchFamily="2" charset="77"/>
-                <a:ea typeface="TheSans B6 SemiBold" charset="0"/>
-                <a:cs typeface="TheSans B6 SemiBold" charset="0"/>
-              </a:defRPr>
-            </a:lvl1pPr>
-          </a:lstStyle>
-          <a:p>
-            <a:pPr marL="0" lvl="0"/>
-            <a:r>
-              <a:rPr lang="en-US"/>
-              <a:t>Click to edit Master text styles</a:t>
-            </a:r>
-          </a:p>
-        </p:txBody>
-      </p:sp>
-      <p:sp>
-        <p:nvSpPr>
-          <p:cNvPr id="13" name="Content Placeholder 2">
-            <a:extLst>
-              <a:ext uri="{FF2B5EF4-FFF2-40B4-BE49-F238E27FC236}">
-                <a16:creationId xmlns:a16="http://schemas.microsoft.com/office/drawing/2014/main" id="{F750EC08-DA20-234C-8634-75139A014432}"/>
-              </a:ext>
-            </a:extLst>
-          </p:cNvPr>
-          <p:cNvSpPr>
-            <a:spLocks noGrp="1"/>
-          </p:cNvSpPr>
-          <p:nvPr>
-            <p:ph sz="quarter" idx="13" hasCustomPrompt="1"/>
-          </p:nvPr>
-        </p:nvSpPr>
-        <p:spPr>
-          <a:xfrm>
-            <a:off x="154800" y="1411200"/>
-            <a:ext cx="11880000" cy="4842000"/>
-          </a:xfrm>
-        </p:spPr>
-        <p:txBody>
-          <a:bodyPr>
-            <a:noAutofit/>
-          </a:bodyPr>
-          <a:lstStyle>
-            <a:lvl1pPr marL="0" indent="0">
-              <a:buFont typeface="Arial" panose="020B0604020202020204" pitchFamily="34" charset="0"/>
-              <a:buNone/>
-              <a:tabLst/>
-              <a:defRPr/>
-            </a:lvl1pPr>
-          </a:lstStyle>
-          <a:p>
-            <a:pPr lvl="0"/>
-            <a:r>
-              <a:rPr lang="en-US" dirty="0"/>
-              <a:t>Insert content text (headers in bold)</a:t>
-            </a:r>
-          </a:p>
-        </p:txBody>
-      </p:sp>
-      <p:sp>
-        <p:nvSpPr>
-          <p:cNvPr id="3" name="Tijdelijke aanduiding voor dianummer 2">
-            <a:extLst>
-              <a:ext uri="{FF2B5EF4-FFF2-40B4-BE49-F238E27FC236}">
-                <a16:creationId xmlns:a16="http://schemas.microsoft.com/office/drawing/2014/main" id="{EB15F17F-E5AA-EA4C-0903-54596120C54E}"/>
-              </a:ext>
-            </a:extLst>
-          </p:cNvPr>
-          <p:cNvSpPr>
-            <a:spLocks noGrp="1"/>
-          </p:cNvSpPr>
-          <p:nvPr>
-            <p:ph type="sldNum" sz="quarter" idx="15"/>
-          </p:nvPr>
-        </p:nvSpPr>
-        <p:spPr/>
-        <p:txBody>
-          <a:bodyPr/>
-          <a:lstStyle/>
-          <a:p>
-            <a:fld id="{E242BD21-9B61-2246-BCB1-4BE5E1BEBE1C}" type="slidenum">
-              <a:rPr lang="nl-NL" smtClean="0"/>
-              <a:pPr/>
-              <a:t>‹#›</a:t>
-            </a:fld>
-            <a:endParaRPr lang="nl-NL"/>
-          </a:p>
-        </p:txBody>
-      </p:sp>
-      <p:sp>
-        <p:nvSpPr>
-          <p:cNvPr id="4" name="Titel 3">
-            <a:extLst>
-              <a:ext uri="{FF2B5EF4-FFF2-40B4-BE49-F238E27FC236}">
-                <a16:creationId xmlns:a16="http://schemas.microsoft.com/office/drawing/2014/main" id="{2134FAEE-D5F3-DE0B-2810-BA6C3B0DE8A0}"/>
-              </a:ext>
-            </a:extLst>
-          </p:cNvPr>
-          <p:cNvSpPr>
-            <a:spLocks noGrp="1"/>
-          </p:cNvSpPr>
-          <p:nvPr>
-            <p:ph type="title" hasCustomPrompt="1"/>
-          </p:nvPr>
-        </p:nvSpPr>
-        <p:spPr/>
-        <p:txBody>
-          <a:bodyPr/>
-          <a:lstStyle/>
-          <a:p>
-            <a:r>
-              <a:rPr lang="nl-NL" dirty="0" err="1"/>
-              <a:t>Insert</a:t>
-            </a:r>
-            <a:r>
-              <a:rPr lang="nl-NL" dirty="0"/>
-              <a:t> </a:t>
-            </a:r>
-            <a:r>
-              <a:rPr lang="nl-NL" dirty="0" err="1"/>
-              <a:t>key</a:t>
-            </a:r>
-            <a:r>
-              <a:rPr lang="nl-NL" dirty="0"/>
-              <a:t> slide </a:t>
-            </a:r>
-            <a:r>
-              <a:rPr lang="nl-NL" dirty="0" err="1"/>
-              <a:t>message</a:t>
-            </a:r>
-            <a:r>
-              <a:rPr lang="nl-NL" dirty="0"/>
-              <a:t> (</a:t>
-            </a:r>
-            <a:r>
-              <a:rPr lang="nl-NL" dirty="0" err="1"/>
-              <a:t>title</a:t>
-            </a:r>
-            <a:r>
-              <a:rPr lang="nl-NL" dirty="0"/>
-              <a:t>)</a:t>
-            </a:r>
-            <a:endParaRPr lang="en-US" dirty="0"/>
-          </a:p>
-        </p:txBody>
-      </p:sp>
-      <p:sp>
-        <p:nvSpPr>
-          <p:cNvPr id="5" name="Rectangle 4">
-            <a:extLst>
-              <a:ext uri="{FF2B5EF4-FFF2-40B4-BE49-F238E27FC236}">
-                <a16:creationId xmlns:a16="http://schemas.microsoft.com/office/drawing/2014/main" id="{831DF13F-1492-BD13-A6B1-7A914E1FDC59}"/>
-              </a:ext>
-            </a:extLst>
-          </p:cNvPr>
-          <p:cNvSpPr/>
-          <p:nvPr userDrawn="1"/>
-        </p:nvSpPr>
-        <p:spPr>
-          <a:xfrm>
-            <a:off x="0" y="1390132"/>
-            <a:ext cx="12192000" cy="4927867"/>
-          </a:xfrm>
-          <a:prstGeom prst="rect">
-            <a:avLst/>
-          </a:prstGeom>
-          <a:solidFill>
-            <a:schemeClr val="bg1"/>
-          </a:solidFill>
-          <a:ln>
-            <a:noFill/>
-          </a:ln>
-          <a:effectLst>
-            <a:outerShdw blurRad="190500" dist="38100" dir="2700000" algn="tl" rotWithShape="0">
-              <a:prstClr val="black">
-                <a:alpha val="15000"/>
-              </a:prstClr>
-            </a:outerShdw>
-          </a:effectLst>
-        </p:spPr>
-        <p:style>
-          <a:lnRef idx="2">
-            <a:schemeClr val="accent1">
-              <a:shade val="50000"/>
-            </a:schemeClr>
-          </a:lnRef>
-          <a:fillRef idx="1">
-            <a:schemeClr val="accent1"/>
-          </a:fillRef>
-          <a:effectRef idx="0">
-            <a:schemeClr val="accent1"/>
-          </a:effectRef>
-          <a:fontRef idx="minor">
-            <a:schemeClr val="lt1"/>
-          </a:fontRef>
-        </p:style>
-        <p:txBody>
-          <a:bodyPr lIns="731520" tIns="72000" rIns="108000" bIns="72000" rtlCol="0" anchor="ctr"/>
-          <a:lstStyle/>
-          <a:p>
-            <a:endParaRPr lang="nl-NL" sz="1200" b="1" noProof="0" dirty="0">
-              <a:solidFill>
-                <a:schemeClr val="accent1"/>
-              </a:solidFill>
-            </a:endParaRPr>
-          </a:p>
-        </p:txBody>
-      </p:sp>
-      <p:sp>
-        <p:nvSpPr>
-          <p:cNvPr id="6" name="Footer Placeholder 4">
-            <a:extLst>
-              <a:ext uri="{FF2B5EF4-FFF2-40B4-BE49-F238E27FC236}">
-                <a16:creationId xmlns:a16="http://schemas.microsoft.com/office/drawing/2014/main" id="{BF4D9293-49E2-42AF-E099-654DFF3A9984}"/>
-              </a:ext>
-            </a:extLst>
-          </p:cNvPr>
-          <p:cNvSpPr>
-            <a:spLocks noGrp="1"/>
-          </p:cNvSpPr>
-          <p:nvPr>
-            <p:ph type="ftr" sz="quarter" idx="3"/>
-          </p:nvPr>
-        </p:nvSpPr>
-        <p:spPr>
-          <a:xfrm>
-            <a:off x="192158" y="6392274"/>
-            <a:ext cx="1763922" cy="370422"/>
-          </a:xfrm>
-          <a:prstGeom prst="rect">
-            <a:avLst/>
-          </a:prstGeom>
-        </p:spPr>
-        <p:txBody>
-          <a:bodyPr/>
-          <a:lstStyle/>
-          <a:p>
-            <a:r>
-              <a:rPr lang="nl-NL" dirty="0" err="1"/>
-              <a:t>Generated</a:t>
-            </a:r>
-            <a:r>
-              <a:rPr lang="nl-NL" dirty="0"/>
-              <a:t> </a:t>
-            </a:r>
-            <a:r>
-              <a:rPr lang="nl-NL" dirty="0" err="1"/>
-              <a:t>with</a:t>
-            </a:r>
-            <a:r>
-              <a:rPr lang="nl-NL" dirty="0"/>
-              <a:t> Sigrid</a:t>
-            </a:r>
-          </a:p>
-          <a:p>
-            <a:r>
-              <a:rPr lang="nl-NL" dirty="0" err="1"/>
-              <a:t>for</a:t>
-            </a:r>
-            <a:r>
-              <a:rPr lang="nl-NL" dirty="0"/>
-              <a:t> CUSTOMER_NAME</a:t>
-            </a:r>
-          </a:p>
-        </p:txBody>
-      </p:sp>
-    </p:spTree>
-    <p:extLst>
-      <p:ext uri="{BB962C8B-B14F-4D97-AF65-F5344CB8AC3E}">
-        <p14:creationId xmlns:p14="http://schemas.microsoft.com/office/powerpoint/2010/main" val="3381798929"/>
-      </p:ext>
-    </p:extLst>
-  </p:cSld>
-  <p:clrMapOvr>
-    <a:masterClrMapping/>
-  </p:clrMapOvr>
-</p:sldLayout>
-</file>
-
-<file path=ppt/slideLayouts/slideLayout5.xml><?xml version="1.0" encoding="utf-8"?>
 <p:sldLayout xmlns:a="http://schemas.openxmlformats.org/drawingml/2006/main" xmlns:r="http://schemas.openxmlformats.org/officeDocument/2006/relationships" xmlns:p="http://schemas.openxmlformats.org/presentationml/2006/main" userDrawn="1">
   <p:cSld name="OSH system results">
     <p:spTree>
@@ -4737,7 +4392,7 @@
 </p:sldLayout>
 </file>
 
-<file path=ppt/slideLayouts/slideLayout6.xml><?xml version="1.0" encoding="utf-8"?>
+<file path=ppt/slideLayouts/slideLayout5.xml><?xml version="1.0" encoding="utf-8"?>
 <p:sldLayout xmlns:a="http://schemas.openxmlformats.org/drawingml/2006/main" xmlns:r="http://schemas.openxmlformats.org/officeDocument/2006/relationships" xmlns:p="http://schemas.openxmlformats.org/presentationml/2006/main" preserve="1" userDrawn="1">
   <p:cSld name="General">
     <p:spTree>
@@ -6003,7 +5658,7 @@
           <p:nvPr userDrawn="1"/>
         </p:nvPicPr>
         <p:blipFill>
-          <a:blip r:embed="rId7"/>
+          <a:blip r:embed="rId6"/>
           <a:stretch>
             <a:fillRect/>
           </a:stretch>
@@ -6152,8 +5807,7 @@
     <p:sldLayoutId id="2147483669" r:id="rId1"/>
     <p:sldLayoutId id="2147483662" r:id="rId2"/>
     <p:sldLayoutId id="2147483792" r:id="rId3"/>
-    <p:sldLayoutId id="2147483776" r:id="rId4"/>
-    <p:sldLayoutId id="2147483793" r:id="rId5"/>
+    <p:sldLayoutId id="2147483793" r:id="rId4"/>
   </p:sldLayoutIdLst>
   <p:hf hdr="0" dt="0"/>
   <p:txStyles>
@@ -17320,8 +16974,8 @@
         </p:nvSpPr>
         <p:spPr>
           <a:xfrm>
-            <a:off x="381600" y="129568"/>
-            <a:ext cx="1410176" cy="228209"/>
+            <a:off x="381600" y="129599"/>
+            <a:ext cx="1410176" cy="228145"/>
           </a:xfrm>
         </p:spPr>
         <p:txBody>
@@ -17334,25 +16988,6 @@
               <a:rPr lang="en-US" dirty="0"/>
               <a:t>Maintainability</a:t>
             </a:r>
-          </a:p>
-        </p:txBody>
-      </p:sp>
-      <p:sp>
-        <p:nvSpPr>
-          <p:cNvPr id="3" name="Content Placeholder 2"/>
-          <p:cNvSpPr>
-            <a:spLocks noGrp="1"/>
-          </p:cNvSpPr>
-          <p:nvPr>
-            <p:ph sz="quarter" idx="13"/>
-          </p:nvPr>
-        </p:nvSpPr>
-        <p:spPr/>
-        <p:txBody>
-          <a:bodyPr/>
-          <a:lstStyle/>
-          <a:p>
-            <a:endParaRPr/>
           </a:p>
         </p:txBody>
       </p:sp>
@@ -17382,63 +17017,29 @@
       </p:sp>
       <p:sp>
         <p:nvSpPr>
-          <p:cNvPr id="7" name="Rectangle 6">
-            <a:extLst>
-              <a:ext uri="{FF2B5EF4-FFF2-40B4-BE49-F238E27FC236}">
-                <a16:creationId xmlns:a16="http://schemas.microsoft.com/office/drawing/2014/main" id="{4D956AE0-666A-B966-0B15-61A5E6C88F75}"/>
-              </a:ext>
-            </a:extLst>
-          </p:cNvPr>
-          <p:cNvSpPr/>
-          <p:nvPr/>
+          <p:cNvPr id="2004" name="Footer Placeholder 2004"/>
+          <p:cNvSpPr>
+            <a:spLocks noGrp="1"/>
+          </p:cNvSpPr>
+          <p:nvPr>
+            <p:ph type="ftr" sz="quarter" idx="3"/>
+          </p:nvPr>
         </p:nvSpPr>
-        <p:spPr>
-          <a:xfrm>
-            <a:off x="0" y="1390132"/>
-            <a:ext cx="12192000" cy="4927867"/>
-          </a:xfrm>
-          <a:prstGeom prst="rect">
-            <a:avLst/>
-          </a:prstGeom>
-          <a:solidFill>
-            <a:schemeClr val="bg1"/>
-          </a:solidFill>
-          <a:ln>
-            <a:noFill/>
-          </a:ln>
-          <a:effectLst>
-            <a:outerShdw blurRad="190500" dist="38100" dir="2700000" algn="tl" rotWithShape="0">
-              <a:prstClr val="black">
-                <a:alpha val="15000"/>
-              </a:prstClr>
-            </a:outerShdw>
-          </a:effectLst>
-        </p:spPr>
-        <p:style>
-          <a:lnRef idx="2">
-            <a:schemeClr val="accent1">
-              <a:shade val="50000"/>
-            </a:schemeClr>
-          </a:lnRef>
-          <a:fillRef idx="1">
-            <a:schemeClr val="accent1"/>
-          </a:fillRef>
-          <a:effectRef idx="0">
-            <a:schemeClr val="accent1"/>
-          </a:effectRef>
-          <a:fontRef idx="minor">
-            <a:schemeClr val="lt1"/>
-          </a:fontRef>
-        </p:style>
+        <p:spPr/>
         <p:txBody>
-          <a:bodyPr lIns="731520" tIns="72000" rIns="108000" bIns="72000" rtlCol="0" anchor="ctr"/>
+          <a:bodyPr/>
           <a:lstStyle/>
           <a:p>
-            <a:endParaRPr lang="nl-NL" sz="1200" b="1" noProof="0" dirty="0">
-              <a:solidFill>
-                <a:schemeClr val="accent1"/>
-              </a:solidFill>
-            </a:endParaRPr>
+            <a:r>
+              <a:rPr lang="en-US" dirty="0"/>
+              <a:t>Generated with Sigrid</a:t>
+            </a:r>
+          </a:p>
+          <a:p>
+            <a:r>
+              <a:rPr lang="en-US" dirty="0"/>
+              <a:t>for CUSTOMER_NAME</a:t>
+            </a:r>
           </a:p>
         </p:txBody>
       </p:sp>
@@ -17843,39 +17444,6 @@
       </p:sp>
       <p:sp>
         <p:nvSpPr>
-          <p:cNvPr id="2004" name="Footer Placeholder 2004"/>
-          <p:cNvSpPr>
-            <a:spLocks noGrp="1"/>
-          </p:cNvSpPr>
-          <p:nvPr>
-            <p:ph type="ftr" sz="quarter" idx="3"/>
-          </p:nvPr>
-        </p:nvSpPr>
-        <p:spPr>
-          <a:xfrm>
-            <a:off x="192088" y="6392596"/>
-            <a:ext cx="1763922" cy="370422"/>
-          </a:xfrm>
-        </p:spPr>
-        <p:txBody>
-          <a:bodyPr/>
-          <a:lstStyle/>
-          <a:p>
-            <a:r>
-              <a:rPr lang="en-US" dirty="0"/>
-              <a:t>Generated with Sigrid</a:t>
-            </a:r>
-          </a:p>
-          <a:p>
-            <a:r>
-              <a:rPr lang="en-US" dirty="0"/>
-              <a:t>for CUSTOMER_NAME</a:t>
-            </a:r>
-          </a:p>
-        </p:txBody>
-      </p:sp>
-      <p:sp>
-        <p:nvSpPr>
           <p:cNvPr id="2071" name="TextBox 2071"/>
           <p:cNvSpPr txBox="1"/>
           <p:nvPr/>
@@ -17966,11 +17534,60 @@
           <a:p>
             <a:pPr indent="-283845"/>
             <a:r>
+              <a:rPr lang="en-GB" sz="1550" dirty="0" err="1">
+                <a:ea typeface="Calibri"/>
+                <a:cs typeface="Calibri"/>
+              </a:rPr>
+              <a:t>PORTFOLIO_MAINT_CHANGE_SUMMARY_UNIT_INTERFACING</a:t>
+            </a:r>
+            <a:endParaRPr lang="en-GB" sz="1550" dirty="0">
+              <a:ea typeface="Calibri"/>
+              <a:cs typeface="Calibri"/>
+            </a:endParaRPr>
+          </a:p>
+          <a:p>
+            <a:pPr indent="-283845"/>
+            <a:r>
+              <a:rPr lang="en-GB" sz="1550" dirty="0" err="1">
+                <a:ea typeface="Calibri"/>
+                <a:cs typeface="Calibri"/>
+              </a:rPr>
+              <a:t>PORTFOLIO_MAINT_INCREASED_UNIT_INTERFACING</a:t>
+            </a:r>
+            <a:r>
               <a:rPr lang="en-GB" sz="1550" dirty="0">
                 <a:ea typeface="Calibri"/>
                 <a:cs typeface="Calibri"/>
               </a:rPr>
-              <a:t>PORTFOLIO_MAINT_INCREASED_UNIT_INTERFACING% of systems has seen an increase in their Unit Interfacing rating. PORTFOLIO_MAINT_STABLE_UNIT_INTERFACING% of systems has remained stable. PORTFOLIO_MAINT_DECREASED_UNIT_INTERFACING% of systems has seen a decrease in maintainability.</a:t>
+              <a:t>% of systems has seen an increase in their Unit Interfacing rating. </a:t>
+            </a:r>
+            <a:r>
+              <a:rPr lang="en-GB" sz="1550" dirty="0" err="1">
+                <a:ea typeface="Calibri"/>
+                <a:cs typeface="Calibri"/>
+              </a:rPr>
+              <a:t>PORTFOLIO_MAINT_STABLE_UNIT_INTERFACING</a:t>
+            </a:r>
+            <a:r>
+              <a:rPr lang="en-GB" sz="1550" dirty="0">
+                <a:ea typeface="Calibri"/>
+                <a:cs typeface="Calibri"/>
+              </a:rPr>
+              <a:t>% of systems has remained stable. </a:t>
+            </a:r>
+            <a:r>
+              <a:rPr lang="en-GB" sz="1550" dirty="0" err="1">
+                <a:ea typeface="Calibri"/>
+                <a:cs typeface="Calibri"/>
+              </a:rPr>
+              <a:t>PORTFOLIO_MAINT_DECREASED_UNIT_INTERFACING</a:t>
+            </a:r>
+            <a:r>
+              <a:rPr lang="en-GB" sz="1550" dirty="0">
+                <a:ea typeface="Calibri"/>
+                <a:cs typeface="Calibri"/>
+              </a:rPr>
+              <a:t>% of systems has seen a decrease in maintainability.</a:t>
             </a:r>
           </a:p>
           <a:p>
@@ -18027,8 +17644,8 @@
         </p:nvSpPr>
         <p:spPr>
           <a:xfrm>
-            <a:off x="381600" y="129568"/>
-            <a:ext cx="1410176" cy="228209"/>
+            <a:off x="381600" y="129599"/>
+            <a:ext cx="1410176" cy="228145"/>
           </a:xfrm>
         </p:spPr>
         <p:txBody>
@@ -18041,25 +17658,6 @@
               <a:rPr lang="en-US" dirty="0"/>
               <a:t>Maintainability</a:t>
             </a:r>
-          </a:p>
-        </p:txBody>
-      </p:sp>
-      <p:sp>
-        <p:nvSpPr>
-          <p:cNvPr id="3" name="Content Placeholder 2"/>
-          <p:cNvSpPr>
-            <a:spLocks noGrp="1"/>
-          </p:cNvSpPr>
-          <p:nvPr>
-            <p:ph sz="quarter" idx="13"/>
-          </p:nvPr>
-        </p:nvSpPr>
-        <p:spPr/>
-        <p:txBody>
-          <a:bodyPr/>
-          <a:lstStyle/>
-          <a:p>
-            <a:endParaRPr/>
           </a:p>
         </p:txBody>
       </p:sp>
@@ -18089,63 +17687,29 @@
       </p:sp>
       <p:sp>
         <p:nvSpPr>
-          <p:cNvPr id="7" name="Rectangle 6">
-            <a:extLst>
-              <a:ext uri="{FF2B5EF4-FFF2-40B4-BE49-F238E27FC236}">
-                <a16:creationId xmlns:a16="http://schemas.microsoft.com/office/drawing/2014/main" id="{4D956AE0-666A-B966-0B15-61A5E6C88F75}"/>
-              </a:ext>
-            </a:extLst>
-          </p:cNvPr>
-          <p:cNvSpPr/>
-          <p:nvPr/>
+          <p:cNvPr id="1004" name="Footer Placeholder 1004"/>
+          <p:cNvSpPr>
+            <a:spLocks noGrp="1"/>
+          </p:cNvSpPr>
+          <p:nvPr>
+            <p:ph type="ftr" sz="quarter" idx="3"/>
+          </p:nvPr>
         </p:nvSpPr>
-        <p:spPr>
-          <a:xfrm>
-            <a:off x="0" y="1390132"/>
-            <a:ext cx="12192000" cy="4927867"/>
-          </a:xfrm>
-          <a:prstGeom prst="rect">
-            <a:avLst/>
-          </a:prstGeom>
-          <a:solidFill>
-            <a:schemeClr val="bg1"/>
-          </a:solidFill>
-          <a:ln>
-            <a:noFill/>
-          </a:ln>
-          <a:effectLst>
-            <a:outerShdw blurRad="190500" dist="38100" dir="2700000" algn="tl" rotWithShape="0">
-              <a:prstClr val="black">
-                <a:alpha val="15000"/>
-              </a:prstClr>
-            </a:outerShdw>
-          </a:effectLst>
-        </p:spPr>
-        <p:style>
-          <a:lnRef idx="2">
-            <a:schemeClr val="accent1">
-              <a:shade val="50000"/>
-            </a:schemeClr>
-          </a:lnRef>
-          <a:fillRef idx="1">
-            <a:schemeClr val="accent1"/>
-          </a:fillRef>
-          <a:effectRef idx="0">
-            <a:schemeClr val="accent1"/>
-          </a:effectRef>
-          <a:fontRef idx="minor">
-            <a:schemeClr val="lt1"/>
-          </a:fontRef>
-        </p:style>
+        <p:spPr/>
         <p:txBody>
-          <a:bodyPr lIns="731520" tIns="72000" rIns="108000" bIns="72000" rtlCol="0" anchor="ctr"/>
+          <a:bodyPr/>
           <a:lstStyle/>
           <a:p>
-            <a:endParaRPr lang="nl-NL" sz="1200" b="1" noProof="0" dirty="0">
-              <a:solidFill>
-                <a:schemeClr val="accent1"/>
-              </a:solidFill>
-            </a:endParaRPr>
+            <a:r>
+              <a:rPr lang="en-US" dirty="0"/>
+              <a:t>Generated with Sigrid</a:t>
+            </a:r>
+          </a:p>
+          <a:p>
+            <a:r>
+              <a:rPr lang="en-US" dirty="0"/>
+              <a:t>for CUSTOMER_NAME</a:t>
+            </a:r>
           </a:p>
         </p:txBody>
       </p:sp>
@@ -18735,39 +18299,6 @@
       </p:grpSp>
       <p:sp>
         <p:nvSpPr>
-          <p:cNvPr id="1004" name="Footer Placeholder 1004"/>
-          <p:cNvSpPr>
-            <a:spLocks noGrp="1"/>
-          </p:cNvSpPr>
-          <p:nvPr>
-            <p:ph type="ftr" sz="quarter" idx="3"/>
-          </p:nvPr>
-        </p:nvSpPr>
-        <p:spPr>
-          <a:xfrm>
-            <a:off x="192088" y="6392596"/>
-            <a:ext cx="1763922" cy="370422"/>
-          </a:xfrm>
-        </p:spPr>
-        <p:txBody>
-          <a:bodyPr/>
-          <a:lstStyle/>
-          <a:p>
-            <a:r>
-              <a:rPr lang="en-US" dirty="0"/>
-              <a:t>Generated with Sigrid</a:t>
-            </a:r>
-          </a:p>
-          <a:p>
-            <a:r>
-              <a:rPr lang="en-US" dirty="0"/>
-              <a:t>for CUSTOMER_NAME</a:t>
-            </a:r>
-          </a:p>
-        </p:txBody>
-      </p:sp>
-      <p:sp>
-        <p:nvSpPr>
           <p:cNvPr id="1071" name="TextBox 1071"/>
           <p:cNvSpPr txBox="1"/>
           <p:nvPr/>
@@ -18983,8 +18514,8 @@
         </p:nvSpPr>
         <p:spPr>
           <a:xfrm>
-            <a:off x="381600" y="129568"/>
-            <a:ext cx="1410176" cy="228209"/>
+            <a:off x="381600" y="129599"/>
+            <a:ext cx="1410176" cy="228145"/>
           </a:xfrm>
         </p:spPr>
         <p:txBody>
@@ -18997,25 +18528,6 @@
               <a:rPr lang="en-US" dirty="0"/>
               <a:t>Maintainability</a:t>
             </a:r>
-          </a:p>
-        </p:txBody>
-      </p:sp>
-      <p:sp>
-        <p:nvSpPr>
-          <p:cNvPr id="3" name="Content Placeholder 2"/>
-          <p:cNvSpPr>
-            <a:spLocks noGrp="1"/>
-          </p:cNvSpPr>
-          <p:nvPr>
-            <p:ph sz="quarter" idx="13"/>
-          </p:nvPr>
-        </p:nvSpPr>
-        <p:spPr/>
-        <p:txBody>
-          <a:bodyPr/>
-          <a:lstStyle/>
-          <a:p>
-            <a:endParaRPr/>
           </a:p>
         </p:txBody>
       </p:sp>
@@ -19045,63 +18557,29 @@
       </p:sp>
       <p:sp>
         <p:nvSpPr>
-          <p:cNvPr id="7" name="Rectangle 6">
-            <a:extLst>
-              <a:ext uri="{FF2B5EF4-FFF2-40B4-BE49-F238E27FC236}">
-                <a16:creationId xmlns:a16="http://schemas.microsoft.com/office/drawing/2014/main" id="{4D956AE0-666A-B966-0B15-61A5E6C88F75}"/>
-              </a:ext>
-            </a:extLst>
-          </p:cNvPr>
-          <p:cNvSpPr/>
-          <p:nvPr/>
+          <p:cNvPr id="2004" name="Footer Placeholder 2004"/>
+          <p:cNvSpPr>
+            <a:spLocks noGrp="1"/>
+          </p:cNvSpPr>
+          <p:nvPr>
+            <p:ph type="ftr" sz="quarter" idx="3"/>
+          </p:nvPr>
         </p:nvSpPr>
-        <p:spPr>
-          <a:xfrm>
-            <a:off x="0" y="1390132"/>
-            <a:ext cx="12192000" cy="4927867"/>
-          </a:xfrm>
-          <a:prstGeom prst="rect">
-            <a:avLst/>
-          </a:prstGeom>
-          <a:solidFill>
-            <a:schemeClr val="bg1"/>
-          </a:solidFill>
-          <a:ln>
-            <a:noFill/>
-          </a:ln>
-          <a:effectLst>
-            <a:outerShdw blurRad="190500" dist="38100" dir="2700000" algn="tl" rotWithShape="0">
-              <a:prstClr val="black">
-                <a:alpha val="15000"/>
-              </a:prstClr>
-            </a:outerShdw>
-          </a:effectLst>
-        </p:spPr>
-        <p:style>
-          <a:lnRef idx="2">
-            <a:schemeClr val="accent1">
-              <a:shade val="50000"/>
-            </a:schemeClr>
-          </a:lnRef>
-          <a:fillRef idx="1">
-            <a:schemeClr val="accent1"/>
-          </a:fillRef>
-          <a:effectRef idx="0">
-            <a:schemeClr val="accent1"/>
-          </a:effectRef>
-          <a:fontRef idx="minor">
-            <a:schemeClr val="lt1"/>
-          </a:fontRef>
-        </p:style>
+        <p:spPr/>
         <p:txBody>
-          <a:bodyPr lIns="731520" tIns="72000" rIns="108000" bIns="72000" rtlCol="0" anchor="ctr"/>
+          <a:bodyPr/>
           <a:lstStyle/>
           <a:p>
-            <a:endParaRPr lang="nl-NL" sz="1200" b="1" noProof="0" dirty="0">
-              <a:solidFill>
-                <a:schemeClr val="accent1"/>
-              </a:solidFill>
-            </a:endParaRPr>
+            <a:r>
+              <a:rPr lang="en-US" dirty="0"/>
+              <a:t>Generated with Sigrid</a:t>
+            </a:r>
+          </a:p>
+          <a:p>
+            <a:r>
+              <a:rPr lang="en-US" dirty="0"/>
+              <a:t>for CUSTOMER_NAME</a:t>
+            </a:r>
           </a:p>
         </p:txBody>
       </p:sp>
@@ -19506,39 +18984,6 @@
       </p:sp>
       <p:sp>
         <p:nvSpPr>
-          <p:cNvPr id="2004" name="Footer Placeholder 2004"/>
-          <p:cNvSpPr>
-            <a:spLocks noGrp="1"/>
-          </p:cNvSpPr>
-          <p:nvPr>
-            <p:ph type="ftr" sz="quarter" idx="3"/>
-          </p:nvPr>
-        </p:nvSpPr>
-        <p:spPr>
-          <a:xfrm>
-            <a:off x="192088" y="6392596"/>
-            <a:ext cx="1763922" cy="370422"/>
-          </a:xfrm>
-        </p:spPr>
-        <p:txBody>
-          <a:bodyPr/>
-          <a:lstStyle/>
-          <a:p>
-            <a:r>
-              <a:rPr lang="en-US" dirty="0"/>
-              <a:t>Generated with Sigrid</a:t>
-            </a:r>
-          </a:p>
-          <a:p>
-            <a:r>
-              <a:rPr lang="en-US" dirty="0"/>
-              <a:t>for CUSTOMER_NAME</a:t>
-            </a:r>
-          </a:p>
-        </p:txBody>
-      </p:sp>
-      <p:sp>
-        <p:nvSpPr>
           <p:cNvPr id="2071" name="TextBox 2071"/>
           <p:cNvSpPr txBox="1"/>
           <p:nvPr/>
@@ -19629,11 +19074,46 @@
           <a:p>
             <a:pPr indent="-283845"/>
             <a:r>
+              <a:rPr lang="en-GB" sz="1550" dirty="0" err="1">
+                <a:ea typeface="Calibri"/>
+                <a:cs typeface="Calibri"/>
+              </a:rPr>
+              <a:t>PORTFOLIO_MAINT_CHANGE_SUMMARY_MODULE_COUPLING</a:t>
+            </a:r>
+            <a:endParaRPr lang="en-GB" sz="1550" dirty="0">
+              <a:ea typeface="Calibri"/>
+              <a:cs typeface="Calibri"/>
+            </a:endParaRPr>
+          </a:p>
+          <a:p>
+            <a:pPr indent="-283845"/>
+            <a:r>
+              <a:rPr lang="en-GB" sz="1550" dirty="0" err="1">
+                <a:ea typeface="Calibri"/>
+                <a:cs typeface="Calibri"/>
+              </a:rPr>
+              <a:t>PORTFOLIO_MAINT_INCREASED_MODULE_COUPLING</a:t>
+            </a:r>
+            <a:r>
               <a:rPr lang="en-GB" sz="1550" dirty="0">
                 <a:ea typeface="Calibri"/>
                 <a:cs typeface="Calibri"/>
               </a:rPr>
-              <a:t>PORTFOLIO_MAINT_INCREASED_MODULE_COUPLING% of systems has seen an increase in their Module Coupling rating. PORTFOLIO_MAINT_STABLE_MODULE_COUPLING% of systems has remained stable. PORTFOLIO_MAINT_DECREASED_MODULE_COUPLING% of systems has seen a decrease in maintainability.</a:t>
+              <a:t>% of systems has seen an increase in their Module Coupling rating. </a:t>
+            </a:r>
+            <a:r>
+              <a:rPr lang="en-GB" sz="1550" dirty="0" err="1">
+                <a:ea typeface="Calibri"/>
+                <a:cs typeface="Calibri"/>
+              </a:rPr>
+              <a:t>PORTFOLIO_MAINT_STABLE_MODULE_COUPLING</a:t>
+            </a:r>
+            <a:r>
+              <a:rPr lang="en-GB" sz="1550" dirty="0">
+                <a:ea typeface="Calibri"/>
+                <a:cs typeface="Calibri"/>
+              </a:rPr>
+              <a:t>% of systems has remained stable. PORTFOLIO_MAINT_DECREASED_MODULE_COUPLING% of systems has seen a decrease in maintainability.</a:t>
             </a:r>
           </a:p>
           <a:p>
@@ -19690,8 +19170,8 @@
         </p:nvSpPr>
         <p:spPr>
           <a:xfrm>
-            <a:off x="381600" y="129568"/>
-            <a:ext cx="1410176" cy="228209"/>
+            <a:off x="381600" y="129599"/>
+            <a:ext cx="1410176" cy="228145"/>
           </a:xfrm>
         </p:spPr>
         <p:txBody>
@@ -19704,25 +19184,6 @@
               <a:rPr lang="en-US" dirty="0"/>
               <a:t>Maintainability</a:t>
             </a:r>
-          </a:p>
-        </p:txBody>
-      </p:sp>
-      <p:sp>
-        <p:nvSpPr>
-          <p:cNvPr id="3" name="Content Placeholder 2"/>
-          <p:cNvSpPr>
-            <a:spLocks noGrp="1"/>
-          </p:cNvSpPr>
-          <p:nvPr>
-            <p:ph sz="quarter" idx="13"/>
-          </p:nvPr>
-        </p:nvSpPr>
-        <p:spPr/>
-        <p:txBody>
-          <a:bodyPr/>
-          <a:lstStyle/>
-          <a:p>
-            <a:endParaRPr/>
           </a:p>
         </p:txBody>
       </p:sp>
@@ -19752,63 +19213,29 @@
       </p:sp>
       <p:sp>
         <p:nvSpPr>
-          <p:cNvPr id="7" name="Rectangle 6">
-            <a:extLst>
-              <a:ext uri="{FF2B5EF4-FFF2-40B4-BE49-F238E27FC236}">
-                <a16:creationId xmlns:a16="http://schemas.microsoft.com/office/drawing/2014/main" id="{4D956AE0-666A-B966-0B15-61A5E6C88F75}"/>
-              </a:ext>
-            </a:extLst>
-          </p:cNvPr>
-          <p:cNvSpPr/>
-          <p:nvPr/>
+          <p:cNvPr id="1004" name="Footer Placeholder 1004"/>
+          <p:cNvSpPr>
+            <a:spLocks noGrp="1"/>
+          </p:cNvSpPr>
+          <p:nvPr>
+            <p:ph type="ftr" sz="quarter" idx="3"/>
+          </p:nvPr>
         </p:nvSpPr>
-        <p:spPr>
-          <a:xfrm>
-            <a:off x="0" y="1390132"/>
-            <a:ext cx="12192000" cy="4927867"/>
-          </a:xfrm>
-          <a:prstGeom prst="rect">
-            <a:avLst/>
-          </a:prstGeom>
-          <a:solidFill>
-            <a:schemeClr val="bg1"/>
-          </a:solidFill>
-          <a:ln>
-            <a:noFill/>
-          </a:ln>
-          <a:effectLst>
-            <a:outerShdw blurRad="190500" dist="38100" dir="2700000" algn="tl" rotWithShape="0">
-              <a:prstClr val="black">
-                <a:alpha val="15000"/>
-              </a:prstClr>
-            </a:outerShdw>
-          </a:effectLst>
-        </p:spPr>
-        <p:style>
-          <a:lnRef idx="2">
-            <a:schemeClr val="accent1">
-              <a:shade val="50000"/>
-            </a:schemeClr>
-          </a:lnRef>
-          <a:fillRef idx="1">
-            <a:schemeClr val="accent1"/>
-          </a:fillRef>
-          <a:effectRef idx="0">
-            <a:schemeClr val="accent1"/>
-          </a:effectRef>
-          <a:fontRef idx="minor">
-            <a:schemeClr val="lt1"/>
-          </a:fontRef>
-        </p:style>
+        <p:spPr/>
         <p:txBody>
-          <a:bodyPr lIns="731520" tIns="72000" rIns="108000" bIns="72000" rtlCol="0" anchor="ctr"/>
+          <a:bodyPr/>
           <a:lstStyle/>
           <a:p>
-            <a:endParaRPr lang="nl-NL" sz="1200" b="1" noProof="0" dirty="0">
-              <a:solidFill>
-                <a:schemeClr val="accent1"/>
-              </a:solidFill>
-            </a:endParaRPr>
+            <a:r>
+              <a:rPr lang="en-US" dirty="0"/>
+              <a:t>Generated with Sigrid</a:t>
+            </a:r>
+          </a:p>
+          <a:p>
+            <a:r>
+              <a:rPr lang="en-US" dirty="0"/>
+              <a:t>for CUSTOMER_NAME</a:t>
+            </a:r>
           </a:p>
         </p:txBody>
       </p:sp>
@@ -20398,39 +19825,6 @@
       </p:grpSp>
       <p:sp>
         <p:nvSpPr>
-          <p:cNvPr id="1004" name="Footer Placeholder 1004"/>
-          <p:cNvSpPr>
-            <a:spLocks noGrp="1"/>
-          </p:cNvSpPr>
-          <p:nvPr>
-            <p:ph type="ftr" sz="quarter" idx="3"/>
-          </p:nvPr>
-        </p:nvSpPr>
-        <p:spPr>
-          <a:xfrm>
-            <a:off x="192088" y="6392596"/>
-            <a:ext cx="1763922" cy="370422"/>
-          </a:xfrm>
-        </p:spPr>
-        <p:txBody>
-          <a:bodyPr/>
-          <a:lstStyle/>
-          <a:p>
-            <a:r>
-              <a:rPr lang="en-US" dirty="0"/>
-              <a:t>Generated with Sigrid</a:t>
-            </a:r>
-          </a:p>
-          <a:p>
-            <a:r>
-              <a:rPr lang="en-US" dirty="0"/>
-              <a:t>for CUSTOMER_NAME</a:t>
-            </a:r>
-          </a:p>
-        </p:txBody>
-      </p:sp>
-      <p:sp>
-        <p:nvSpPr>
           <p:cNvPr id="1071" name="TextBox 1071"/>
           <p:cNvSpPr txBox="1"/>
           <p:nvPr/>
@@ -20646,8 +20040,8 @@
         </p:nvSpPr>
         <p:spPr>
           <a:xfrm>
-            <a:off x="381600" y="129568"/>
-            <a:ext cx="1410176" cy="228209"/>
+            <a:off x="381600" y="129599"/>
+            <a:ext cx="1410176" cy="228145"/>
           </a:xfrm>
         </p:spPr>
         <p:txBody>
@@ -20660,25 +20054,6 @@
               <a:rPr lang="en-US" dirty="0"/>
               <a:t>Maintainability</a:t>
             </a:r>
-          </a:p>
-        </p:txBody>
-      </p:sp>
-      <p:sp>
-        <p:nvSpPr>
-          <p:cNvPr id="3" name="Content Placeholder 2"/>
-          <p:cNvSpPr>
-            <a:spLocks noGrp="1"/>
-          </p:cNvSpPr>
-          <p:nvPr>
-            <p:ph sz="quarter" idx="13"/>
-          </p:nvPr>
-        </p:nvSpPr>
-        <p:spPr/>
-        <p:txBody>
-          <a:bodyPr/>
-          <a:lstStyle/>
-          <a:p>
-            <a:endParaRPr/>
           </a:p>
         </p:txBody>
       </p:sp>
@@ -20708,63 +20083,29 @@
       </p:sp>
       <p:sp>
         <p:nvSpPr>
-          <p:cNvPr id="7" name="Rectangle 6">
-            <a:extLst>
-              <a:ext uri="{FF2B5EF4-FFF2-40B4-BE49-F238E27FC236}">
-                <a16:creationId xmlns:a16="http://schemas.microsoft.com/office/drawing/2014/main" id="{4D956AE0-666A-B966-0B15-61A5E6C88F75}"/>
-              </a:ext>
-            </a:extLst>
-          </p:cNvPr>
-          <p:cNvSpPr/>
-          <p:nvPr/>
+          <p:cNvPr id="2004" name="Footer Placeholder 2004"/>
+          <p:cNvSpPr>
+            <a:spLocks noGrp="1"/>
+          </p:cNvSpPr>
+          <p:nvPr>
+            <p:ph type="ftr" sz="quarter" idx="3"/>
+          </p:nvPr>
         </p:nvSpPr>
-        <p:spPr>
-          <a:xfrm>
-            <a:off x="0" y="1390132"/>
-            <a:ext cx="12192000" cy="4927867"/>
-          </a:xfrm>
-          <a:prstGeom prst="rect">
-            <a:avLst/>
-          </a:prstGeom>
-          <a:solidFill>
-            <a:schemeClr val="bg1"/>
-          </a:solidFill>
-          <a:ln>
-            <a:noFill/>
-          </a:ln>
-          <a:effectLst>
-            <a:outerShdw blurRad="190500" dist="38100" dir="2700000" algn="tl" rotWithShape="0">
-              <a:prstClr val="black">
-                <a:alpha val="15000"/>
-              </a:prstClr>
-            </a:outerShdw>
-          </a:effectLst>
-        </p:spPr>
-        <p:style>
-          <a:lnRef idx="2">
-            <a:schemeClr val="accent1">
-              <a:shade val="50000"/>
-            </a:schemeClr>
-          </a:lnRef>
-          <a:fillRef idx="1">
-            <a:schemeClr val="accent1"/>
-          </a:fillRef>
-          <a:effectRef idx="0">
-            <a:schemeClr val="accent1"/>
-          </a:effectRef>
-          <a:fontRef idx="minor">
-            <a:schemeClr val="lt1"/>
-          </a:fontRef>
-        </p:style>
+        <p:spPr/>
         <p:txBody>
-          <a:bodyPr lIns="731520" tIns="72000" rIns="108000" bIns="72000" rtlCol="0" anchor="ctr"/>
+          <a:bodyPr/>
           <a:lstStyle/>
           <a:p>
-            <a:endParaRPr lang="nl-NL" sz="1200" b="1" noProof="0" dirty="0">
-              <a:solidFill>
-                <a:schemeClr val="accent1"/>
-              </a:solidFill>
-            </a:endParaRPr>
+            <a:r>
+              <a:rPr lang="en-US" dirty="0"/>
+              <a:t>Generated with Sigrid</a:t>
+            </a:r>
+          </a:p>
+          <a:p>
+            <a:r>
+              <a:rPr lang="en-US" dirty="0"/>
+              <a:t>for CUSTOMER_NAME</a:t>
+            </a:r>
           </a:p>
         </p:txBody>
       </p:sp>
@@ -21169,39 +20510,6 @@
       </p:sp>
       <p:sp>
         <p:nvSpPr>
-          <p:cNvPr id="2004" name="Footer Placeholder 2004"/>
-          <p:cNvSpPr>
-            <a:spLocks noGrp="1"/>
-          </p:cNvSpPr>
-          <p:nvPr>
-            <p:ph type="ftr" sz="quarter" idx="3"/>
-          </p:nvPr>
-        </p:nvSpPr>
-        <p:spPr>
-          <a:xfrm>
-            <a:off x="192088" y="6392596"/>
-            <a:ext cx="1763922" cy="370422"/>
-          </a:xfrm>
-        </p:spPr>
-        <p:txBody>
-          <a:bodyPr/>
-          <a:lstStyle/>
-          <a:p>
-            <a:r>
-              <a:rPr lang="en-US" dirty="0"/>
-              <a:t>Generated with Sigrid</a:t>
-            </a:r>
-          </a:p>
-          <a:p>
-            <a:r>
-              <a:rPr lang="en-US" dirty="0"/>
-              <a:t>for CUSTOMER_NAME</a:t>
-            </a:r>
-          </a:p>
-        </p:txBody>
-      </p:sp>
-      <p:sp>
-        <p:nvSpPr>
           <p:cNvPr id="2071" name="TextBox 2071"/>
           <p:cNvSpPr txBox="1"/>
           <p:nvPr/>
@@ -21292,11 +20600,46 @@
           <a:p>
             <a:pPr indent="-283845"/>
             <a:r>
+              <a:rPr lang="en-GB" sz="1550" dirty="0" err="1">
+                <a:ea typeface="Calibri"/>
+                <a:cs typeface="Calibri"/>
+              </a:rPr>
+              <a:t>PORTFOLIO_MAINT_CHANGE_SUMMARY_COMPONENT_INDEPENDENCE</a:t>
+            </a:r>
+            <a:endParaRPr lang="en-GB" sz="1550" dirty="0">
+              <a:ea typeface="Calibri"/>
+              <a:cs typeface="Calibri"/>
+            </a:endParaRPr>
+          </a:p>
+          <a:p>
+            <a:pPr indent="-283845"/>
+            <a:r>
+              <a:rPr lang="en-GB" sz="1550" dirty="0" err="1">
+                <a:ea typeface="Calibri"/>
+                <a:cs typeface="Calibri"/>
+              </a:rPr>
+              <a:t>PORTFOLIO_MAINT_INCREASED_COMPONENT_INDEPENDENCE</a:t>
+            </a:r>
+            <a:r>
               <a:rPr lang="en-GB" sz="1550" dirty="0">
                 <a:ea typeface="Calibri"/>
                 <a:cs typeface="Calibri"/>
               </a:rPr>
-              <a:t>PORTFOLIO_MAINT_INCREASED_COMPONENT_INDEPENDENCE% of systems has seen an increase in their Component Independence rating. PORTFOLIO_MAINT_STABLE_COMPONENT_INDEPENDENCE% of systems has remained stable. PORTFOLIO_MAINT_DECREASED_COMPONENT_INDEPENDENCE% of systems has seen a decrease in maintainability.</a:t>
+              <a:t>% of systems has seen an increase in their Component Independence rating. </a:t>
+            </a:r>
+            <a:r>
+              <a:rPr lang="en-GB" sz="1550" dirty="0" err="1">
+                <a:ea typeface="Calibri"/>
+                <a:cs typeface="Calibri"/>
+              </a:rPr>
+              <a:t>PORTFOLIO_MAINT_STABLE_COMPONENT_INDEPENDENCE</a:t>
+            </a:r>
+            <a:r>
+              <a:rPr lang="en-GB" sz="1550" dirty="0">
+                <a:ea typeface="Calibri"/>
+                <a:cs typeface="Calibri"/>
+              </a:rPr>
+              <a:t>% of systems has remained stable. PORTFOLIO_MAINT_DECREASED_COMPONENT_INDEPENDENCE% of systems has seen a decrease in maintainability.</a:t>
             </a:r>
           </a:p>
           <a:p>
@@ -21353,8 +20696,8 @@
         </p:nvSpPr>
         <p:spPr>
           <a:xfrm>
-            <a:off x="381600" y="129568"/>
-            <a:ext cx="1410176" cy="228209"/>
+            <a:off x="381600" y="129599"/>
+            <a:ext cx="1410176" cy="228145"/>
           </a:xfrm>
         </p:spPr>
         <p:txBody>
@@ -21367,25 +20710,6 @@
               <a:rPr lang="en-US" dirty="0"/>
               <a:t>Maintainability</a:t>
             </a:r>
-          </a:p>
-        </p:txBody>
-      </p:sp>
-      <p:sp>
-        <p:nvSpPr>
-          <p:cNvPr id="3" name="Content Placeholder 2"/>
-          <p:cNvSpPr>
-            <a:spLocks noGrp="1"/>
-          </p:cNvSpPr>
-          <p:nvPr>
-            <p:ph sz="quarter" idx="13"/>
-          </p:nvPr>
-        </p:nvSpPr>
-        <p:spPr/>
-        <p:txBody>
-          <a:bodyPr/>
-          <a:lstStyle/>
-          <a:p>
-            <a:endParaRPr/>
           </a:p>
         </p:txBody>
       </p:sp>
@@ -21415,63 +20739,29 @@
       </p:sp>
       <p:sp>
         <p:nvSpPr>
-          <p:cNvPr id="7" name="Rectangle 6">
-            <a:extLst>
-              <a:ext uri="{FF2B5EF4-FFF2-40B4-BE49-F238E27FC236}">
-                <a16:creationId xmlns:a16="http://schemas.microsoft.com/office/drawing/2014/main" id="{4D956AE0-666A-B966-0B15-61A5E6C88F75}"/>
-              </a:ext>
-            </a:extLst>
-          </p:cNvPr>
-          <p:cNvSpPr/>
-          <p:nvPr/>
+          <p:cNvPr id="1004" name="Footer Placeholder 1004"/>
+          <p:cNvSpPr>
+            <a:spLocks noGrp="1"/>
+          </p:cNvSpPr>
+          <p:nvPr>
+            <p:ph type="ftr" sz="quarter" idx="3"/>
+          </p:nvPr>
         </p:nvSpPr>
-        <p:spPr>
-          <a:xfrm>
-            <a:off x="0" y="1390132"/>
-            <a:ext cx="12192000" cy="4927867"/>
-          </a:xfrm>
-          <a:prstGeom prst="rect">
-            <a:avLst/>
-          </a:prstGeom>
-          <a:solidFill>
-            <a:schemeClr val="bg1"/>
-          </a:solidFill>
-          <a:ln>
-            <a:noFill/>
-          </a:ln>
-          <a:effectLst>
-            <a:outerShdw blurRad="190500" dist="38100" dir="2700000" algn="tl" rotWithShape="0">
-              <a:prstClr val="black">
-                <a:alpha val="15000"/>
-              </a:prstClr>
-            </a:outerShdw>
-          </a:effectLst>
-        </p:spPr>
-        <p:style>
-          <a:lnRef idx="2">
-            <a:schemeClr val="accent1">
-              <a:shade val="50000"/>
-            </a:schemeClr>
-          </a:lnRef>
-          <a:fillRef idx="1">
-            <a:schemeClr val="accent1"/>
-          </a:fillRef>
-          <a:effectRef idx="0">
-            <a:schemeClr val="accent1"/>
-          </a:effectRef>
-          <a:fontRef idx="minor">
-            <a:schemeClr val="lt1"/>
-          </a:fontRef>
-        </p:style>
+        <p:spPr/>
         <p:txBody>
-          <a:bodyPr lIns="731520" tIns="72000" rIns="108000" bIns="72000" rtlCol="0" anchor="ctr"/>
+          <a:bodyPr/>
           <a:lstStyle/>
           <a:p>
-            <a:endParaRPr lang="nl-NL" sz="1200" b="1" noProof="0" dirty="0">
-              <a:solidFill>
-                <a:schemeClr val="accent1"/>
-              </a:solidFill>
-            </a:endParaRPr>
+            <a:r>
+              <a:rPr lang="en-US" dirty="0"/>
+              <a:t>Generated with Sigrid</a:t>
+            </a:r>
+          </a:p>
+          <a:p>
+            <a:r>
+              <a:rPr lang="en-US" dirty="0"/>
+              <a:t>for CUSTOMER_NAME</a:t>
+            </a:r>
           </a:p>
         </p:txBody>
       </p:sp>
@@ -22061,39 +21351,6 @@
       </p:grpSp>
       <p:sp>
         <p:nvSpPr>
-          <p:cNvPr id="1004" name="Footer Placeholder 1004"/>
-          <p:cNvSpPr>
-            <a:spLocks noGrp="1"/>
-          </p:cNvSpPr>
-          <p:nvPr>
-            <p:ph type="ftr" sz="quarter" idx="3"/>
-          </p:nvPr>
-        </p:nvSpPr>
-        <p:spPr>
-          <a:xfrm>
-            <a:off x="192088" y="6392596"/>
-            <a:ext cx="1763922" cy="370422"/>
-          </a:xfrm>
-        </p:spPr>
-        <p:txBody>
-          <a:bodyPr/>
-          <a:lstStyle/>
-          <a:p>
-            <a:r>
-              <a:rPr lang="en-US" dirty="0"/>
-              <a:t>Generated with Sigrid</a:t>
-            </a:r>
-          </a:p>
-          <a:p>
-            <a:r>
-              <a:rPr lang="en-US" dirty="0"/>
-              <a:t>for CUSTOMER_NAME</a:t>
-            </a:r>
-          </a:p>
-        </p:txBody>
-      </p:sp>
-      <p:sp>
-        <p:nvSpPr>
           <p:cNvPr id="1071" name="TextBox 1071"/>
           <p:cNvSpPr txBox="1"/>
           <p:nvPr/>
@@ -22309,8 +21566,8 @@
         </p:nvSpPr>
         <p:spPr>
           <a:xfrm>
-            <a:off x="381600" y="129568"/>
-            <a:ext cx="1410176" cy="228209"/>
+            <a:off x="381600" y="129599"/>
+            <a:ext cx="1410176" cy="228145"/>
           </a:xfrm>
         </p:spPr>
         <p:txBody>
@@ -22323,25 +21580,6 @@
               <a:rPr lang="en-US" dirty="0"/>
               <a:t>Maintainability</a:t>
             </a:r>
-          </a:p>
-        </p:txBody>
-      </p:sp>
-      <p:sp>
-        <p:nvSpPr>
-          <p:cNvPr id="3" name="Content Placeholder 2"/>
-          <p:cNvSpPr>
-            <a:spLocks noGrp="1"/>
-          </p:cNvSpPr>
-          <p:nvPr>
-            <p:ph sz="quarter" idx="13"/>
-          </p:nvPr>
-        </p:nvSpPr>
-        <p:spPr/>
-        <p:txBody>
-          <a:bodyPr/>
-          <a:lstStyle/>
-          <a:p>
-            <a:endParaRPr/>
           </a:p>
         </p:txBody>
       </p:sp>
@@ -22371,63 +21609,29 @@
       </p:sp>
       <p:sp>
         <p:nvSpPr>
-          <p:cNvPr id="7" name="Rectangle 6">
-            <a:extLst>
-              <a:ext uri="{FF2B5EF4-FFF2-40B4-BE49-F238E27FC236}">
-                <a16:creationId xmlns:a16="http://schemas.microsoft.com/office/drawing/2014/main" id="{4D956AE0-666A-B966-0B15-61A5E6C88F75}"/>
-              </a:ext>
-            </a:extLst>
-          </p:cNvPr>
-          <p:cNvSpPr/>
-          <p:nvPr/>
+          <p:cNvPr id="2004" name="Footer Placeholder 2004"/>
+          <p:cNvSpPr>
+            <a:spLocks noGrp="1"/>
+          </p:cNvSpPr>
+          <p:nvPr>
+            <p:ph type="ftr" sz="quarter" idx="3"/>
+          </p:nvPr>
         </p:nvSpPr>
-        <p:spPr>
-          <a:xfrm>
-            <a:off x="0" y="1390132"/>
-            <a:ext cx="12192000" cy="4927867"/>
-          </a:xfrm>
-          <a:prstGeom prst="rect">
-            <a:avLst/>
-          </a:prstGeom>
-          <a:solidFill>
-            <a:schemeClr val="bg1"/>
-          </a:solidFill>
-          <a:ln>
-            <a:noFill/>
-          </a:ln>
-          <a:effectLst>
-            <a:outerShdw blurRad="190500" dist="38100" dir="2700000" algn="tl" rotWithShape="0">
-              <a:prstClr val="black">
-                <a:alpha val="15000"/>
-              </a:prstClr>
-            </a:outerShdw>
-          </a:effectLst>
-        </p:spPr>
-        <p:style>
-          <a:lnRef idx="2">
-            <a:schemeClr val="accent1">
-              <a:shade val="50000"/>
-            </a:schemeClr>
-          </a:lnRef>
-          <a:fillRef idx="1">
-            <a:schemeClr val="accent1"/>
-          </a:fillRef>
-          <a:effectRef idx="0">
-            <a:schemeClr val="accent1"/>
-          </a:effectRef>
-          <a:fontRef idx="minor">
-            <a:schemeClr val="lt1"/>
-          </a:fontRef>
-        </p:style>
+        <p:spPr/>
         <p:txBody>
-          <a:bodyPr lIns="731520" tIns="72000" rIns="108000" bIns="72000" rtlCol="0" anchor="ctr"/>
+          <a:bodyPr/>
           <a:lstStyle/>
           <a:p>
-            <a:endParaRPr lang="nl-NL" sz="1200" b="1" noProof="0" dirty="0">
-              <a:solidFill>
-                <a:schemeClr val="accent1"/>
-              </a:solidFill>
-            </a:endParaRPr>
+            <a:r>
+              <a:rPr lang="en-US" dirty="0"/>
+              <a:t>Generated with Sigrid</a:t>
+            </a:r>
+          </a:p>
+          <a:p>
+            <a:r>
+              <a:rPr lang="en-US" dirty="0"/>
+              <a:t>for CUSTOMER_NAME</a:t>
+            </a:r>
           </a:p>
         </p:txBody>
       </p:sp>
@@ -22832,39 +22036,6 @@
       </p:sp>
       <p:sp>
         <p:nvSpPr>
-          <p:cNvPr id="2004" name="Footer Placeholder 2004"/>
-          <p:cNvSpPr>
-            <a:spLocks noGrp="1"/>
-          </p:cNvSpPr>
-          <p:nvPr>
-            <p:ph type="ftr" sz="quarter" idx="3"/>
-          </p:nvPr>
-        </p:nvSpPr>
-        <p:spPr>
-          <a:xfrm>
-            <a:off x="192088" y="6392596"/>
-            <a:ext cx="1763922" cy="370422"/>
-          </a:xfrm>
-        </p:spPr>
-        <p:txBody>
-          <a:bodyPr/>
-          <a:lstStyle/>
-          <a:p>
-            <a:r>
-              <a:rPr lang="en-US" dirty="0"/>
-              <a:t>Generated with Sigrid</a:t>
-            </a:r>
-          </a:p>
-          <a:p>
-            <a:r>
-              <a:rPr lang="en-US" dirty="0"/>
-              <a:t>for CUSTOMER_NAME</a:t>
-            </a:r>
-          </a:p>
-        </p:txBody>
-      </p:sp>
-      <p:sp>
-        <p:nvSpPr>
           <p:cNvPr id="2071" name="TextBox 2071"/>
           <p:cNvSpPr txBox="1"/>
           <p:nvPr/>
@@ -22955,11 +22126,53 @@
           <a:p>
             <a:pPr indent="-283845"/>
             <a:r>
+              <a:rPr lang="en-GB" sz="1550" dirty="0" err="1">
+                <a:ea typeface="Calibri"/>
+                <a:cs typeface="Calibri"/>
+              </a:rPr>
+              <a:t>PORTFOLIO_MAINT_CHANGE_SUMMARY_COMPONENT_ENTANGLEMENT</a:t>
+            </a:r>
+            <a:endParaRPr lang="en-GB" sz="1550" dirty="0">
+              <a:ea typeface="Calibri"/>
+              <a:cs typeface="Calibri"/>
+            </a:endParaRPr>
+          </a:p>
+          <a:p>
+            <a:pPr indent="-283845"/>
+            <a:r>
+              <a:rPr lang="en-GB" sz="1550" dirty="0" err="1">
+                <a:ea typeface="Calibri"/>
+                <a:cs typeface="Calibri"/>
+              </a:rPr>
+              <a:t>PORTFOLIO_MAINT_INCREASED_COMPONENT_ENTANGLEMENT</a:t>
+            </a:r>
+            <a:r>
               <a:rPr lang="en-GB" sz="1550" dirty="0">
                 <a:ea typeface="Calibri"/>
                 <a:cs typeface="Calibri"/>
               </a:rPr>
-              <a:t>PORTFOLIO_MAINT_INCREASED_COMPONENT_ENTANGLEMENT% of systems has seen an increase in their Component Entanglement rating. PORTFOLIO_MAINT_STABLE_COMPONENT_ENTANGLEMENT% of systems has remained stable. PORTFOLIO_MAINT_DECREASED_COMPONENT_ENTANGLEMENT% of systems has seen a decrease in maintainability.</a:t>
+              <a:t>% of systems has seen an increase in their Component Entanglement </a:t>
+            </a:r>
+            <a:r>
+              <a:rPr lang="en-GB" sz="1550">
+                <a:ea typeface="Calibri"/>
+                <a:cs typeface="Calibri"/>
+              </a:rPr>
+              <a:t>rating. PORTFOLIO</a:t>
+            </a:r>
+            <a:r>
+              <a:rPr lang="en-GB" sz="1550" dirty="0" err="1">
+                <a:ea typeface="Calibri"/>
+                <a:cs typeface="Calibri"/>
+              </a:rPr>
+              <a:t>_MAINT_STABLE_COMPONENT_ENTANGLEMENT</a:t>
+            </a:r>
+            <a:r>
+              <a:rPr lang="en-GB" sz="1550" dirty="0">
+                <a:ea typeface="Calibri"/>
+                <a:cs typeface="Calibri"/>
+              </a:rPr>
+              <a:t>% of systems has remained stable. PORTFOLIO_MAINT_DECREASED_COMPONENT_ENTANGLEMENT% of systems has seen a decrease in maintainability.</a:t>
             </a:r>
           </a:p>
           <a:p>
@@ -23284,8 +22497,8 @@
         </p:nvSpPr>
         <p:spPr>
           <a:xfrm>
-            <a:off x="381600" y="129568"/>
-            <a:ext cx="1157222" cy="228209"/>
+            <a:off x="381600" y="129599"/>
+            <a:ext cx="1156940" cy="228145"/>
           </a:xfrm>
         </p:spPr>
         <p:txBody>
@@ -23298,25 +22511,6 @@
               <a:rPr lang="en-US" dirty="0"/>
               <a:t>Architecture</a:t>
             </a:r>
-          </a:p>
-        </p:txBody>
-      </p:sp>
-      <p:sp>
-        <p:nvSpPr>
-          <p:cNvPr id="3" name="Content Placeholder 2"/>
-          <p:cNvSpPr>
-            <a:spLocks noGrp="1"/>
-          </p:cNvSpPr>
-          <p:nvPr>
-            <p:ph sz="quarter" idx="13"/>
-          </p:nvPr>
-        </p:nvSpPr>
-        <p:spPr/>
-        <p:txBody>
-          <a:bodyPr/>
-          <a:lstStyle/>
-          <a:p>
-            <a:endParaRPr/>
           </a:p>
         </p:txBody>
       </p:sp>
@@ -23346,63 +22540,29 @@
       </p:sp>
       <p:sp>
         <p:nvSpPr>
-          <p:cNvPr id="7" name="Rectangle 6">
-            <a:extLst>
-              <a:ext uri="{FF2B5EF4-FFF2-40B4-BE49-F238E27FC236}">
-                <a16:creationId xmlns:a16="http://schemas.microsoft.com/office/drawing/2014/main" id="{4D956AE0-666A-B966-0B15-61A5E6C88F75}"/>
-              </a:ext>
-            </a:extLst>
-          </p:cNvPr>
-          <p:cNvSpPr/>
-          <p:nvPr/>
+          <p:cNvPr id="1004" name="Footer Placeholder 1004"/>
+          <p:cNvSpPr>
+            <a:spLocks noGrp="1"/>
+          </p:cNvSpPr>
+          <p:nvPr>
+            <p:ph type="ftr" sz="quarter" idx="3"/>
+          </p:nvPr>
         </p:nvSpPr>
-        <p:spPr>
-          <a:xfrm>
-            <a:off x="0" y="1390132"/>
-            <a:ext cx="12192000" cy="4927867"/>
-          </a:xfrm>
-          <a:prstGeom prst="rect">
-            <a:avLst/>
-          </a:prstGeom>
-          <a:solidFill>
-            <a:schemeClr val="bg1"/>
-          </a:solidFill>
-          <a:ln>
-            <a:noFill/>
-          </a:ln>
-          <a:effectLst>
-            <a:outerShdw blurRad="190500" dist="38100" dir="2700000" algn="tl" rotWithShape="0">
-              <a:prstClr val="black">
-                <a:alpha val="15000"/>
-              </a:prstClr>
-            </a:outerShdw>
-          </a:effectLst>
-        </p:spPr>
-        <p:style>
-          <a:lnRef idx="2">
-            <a:schemeClr val="accent1">
-              <a:shade val="50000"/>
-            </a:schemeClr>
-          </a:lnRef>
-          <a:fillRef idx="1">
-            <a:schemeClr val="accent1"/>
-          </a:fillRef>
-          <a:effectRef idx="0">
-            <a:schemeClr val="accent1"/>
-          </a:effectRef>
-          <a:fontRef idx="minor">
-            <a:schemeClr val="lt1"/>
-          </a:fontRef>
-        </p:style>
+        <p:spPr/>
         <p:txBody>
-          <a:bodyPr lIns="731520" tIns="72000" rIns="108000" bIns="72000" rtlCol="0" anchor="ctr"/>
+          <a:bodyPr/>
           <a:lstStyle/>
           <a:p>
-            <a:endParaRPr lang="nl-NL" sz="1200" b="1" noProof="0" dirty="0">
-              <a:solidFill>
-                <a:schemeClr val="accent1"/>
-              </a:solidFill>
-            </a:endParaRPr>
+            <a:r>
+              <a:rPr lang="en-US" dirty="0"/>
+              <a:t>Generated with Sigrid</a:t>
+            </a:r>
+          </a:p>
+          <a:p>
+            <a:r>
+              <a:rPr lang="en-US" dirty="0"/>
+              <a:t>for CUSTOMER_NAME</a:t>
+            </a:r>
           </a:p>
         </p:txBody>
       </p:sp>
@@ -23992,39 +23152,6 @@
       </p:grpSp>
       <p:sp>
         <p:nvSpPr>
-          <p:cNvPr id="1004" name="Footer Placeholder 1004"/>
-          <p:cNvSpPr>
-            <a:spLocks noGrp="1"/>
-          </p:cNvSpPr>
-          <p:nvPr>
-            <p:ph type="ftr" sz="quarter" idx="3"/>
-          </p:nvPr>
-        </p:nvSpPr>
-        <p:spPr>
-          <a:xfrm>
-            <a:off x="192088" y="6392596"/>
-            <a:ext cx="1763922" cy="370422"/>
-          </a:xfrm>
-        </p:spPr>
-        <p:txBody>
-          <a:bodyPr/>
-          <a:lstStyle/>
-          <a:p>
-            <a:r>
-              <a:rPr lang="en-US" dirty="0"/>
-              <a:t>Generated with Sigrid</a:t>
-            </a:r>
-          </a:p>
-          <a:p>
-            <a:r>
-              <a:rPr lang="en-US" dirty="0"/>
-              <a:t>for CUSTOMER_NAME</a:t>
-            </a:r>
-          </a:p>
-        </p:txBody>
-      </p:sp>
-      <p:sp>
-        <p:nvSpPr>
           <p:cNvPr id="1071" name="TextBox 1071"/>
           <p:cNvSpPr txBox="1"/>
           <p:nvPr/>
@@ -24240,8 +23367,8 @@
         </p:nvSpPr>
         <p:spPr>
           <a:xfrm>
-            <a:off x="381600" y="129568"/>
-            <a:ext cx="1157222" cy="228209"/>
+            <a:off x="381600" y="129599"/>
+            <a:ext cx="1156940" cy="228145"/>
           </a:xfrm>
         </p:spPr>
         <p:txBody>
@@ -24254,25 +23381,6 @@
               <a:rPr lang="en-US" dirty="0"/>
               <a:t>Architecture</a:t>
             </a:r>
-          </a:p>
-        </p:txBody>
-      </p:sp>
-      <p:sp>
-        <p:nvSpPr>
-          <p:cNvPr id="3" name="Content Placeholder 2"/>
-          <p:cNvSpPr>
-            <a:spLocks noGrp="1"/>
-          </p:cNvSpPr>
-          <p:nvPr>
-            <p:ph sz="quarter" idx="13"/>
-          </p:nvPr>
-        </p:nvSpPr>
-        <p:spPr/>
-        <p:txBody>
-          <a:bodyPr/>
-          <a:lstStyle/>
-          <a:p>
-            <a:endParaRPr/>
           </a:p>
         </p:txBody>
       </p:sp>
@@ -24302,63 +23410,29 @@
       </p:sp>
       <p:sp>
         <p:nvSpPr>
-          <p:cNvPr id="7" name="Rectangle 6">
-            <a:extLst>
-              <a:ext uri="{FF2B5EF4-FFF2-40B4-BE49-F238E27FC236}">
-                <a16:creationId xmlns:a16="http://schemas.microsoft.com/office/drawing/2014/main" id="{4D956AE0-666A-B966-0B15-61A5E6C88F75}"/>
-              </a:ext>
-            </a:extLst>
-          </p:cNvPr>
-          <p:cNvSpPr/>
-          <p:nvPr/>
+          <p:cNvPr id="2004" name="Footer Placeholder 2004"/>
+          <p:cNvSpPr>
+            <a:spLocks noGrp="1"/>
+          </p:cNvSpPr>
+          <p:nvPr>
+            <p:ph type="ftr" sz="quarter" idx="3"/>
+          </p:nvPr>
         </p:nvSpPr>
-        <p:spPr>
-          <a:xfrm>
-            <a:off x="0" y="1390132"/>
-            <a:ext cx="12192000" cy="4927867"/>
-          </a:xfrm>
-          <a:prstGeom prst="rect">
-            <a:avLst/>
-          </a:prstGeom>
-          <a:solidFill>
-            <a:schemeClr val="bg1"/>
-          </a:solidFill>
-          <a:ln>
-            <a:noFill/>
-          </a:ln>
-          <a:effectLst>
-            <a:outerShdw blurRad="190500" dist="38100" dir="2700000" algn="tl" rotWithShape="0">
-              <a:prstClr val="black">
-                <a:alpha val="15000"/>
-              </a:prstClr>
-            </a:outerShdw>
-          </a:effectLst>
-        </p:spPr>
-        <p:style>
-          <a:lnRef idx="2">
-            <a:schemeClr val="accent1">
-              <a:shade val="50000"/>
-            </a:schemeClr>
-          </a:lnRef>
-          <a:fillRef idx="1">
-            <a:schemeClr val="accent1"/>
-          </a:fillRef>
-          <a:effectRef idx="0">
-            <a:schemeClr val="accent1"/>
-          </a:effectRef>
-          <a:fontRef idx="minor">
-            <a:schemeClr val="lt1"/>
-          </a:fontRef>
-        </p:style>
+        <p:spPr/>
         <p:txBody>
-          <a:bodyPr lIns="731520" tIns="72000" rIns="108000" bIns="72000" rtlCol="0" anchor="ctr"/>
+          <a:bodyPr/>
           <a:lstStyle/>
           <a:p>
-            <a:endParaRPr lang="nl-NL" sz="1200" b="1" noProof="0" dirty="0">
-              <a:solidFill>
-                <a:schemeClr val="accent1"/>
-              </a:solidFill>
-            </a:endParaRPr>
+            <a:r>
+              <a:rPr lang="en-US" dirty="0"/>
+              <a:t>Generated with Sigrid</a:t>
+            </a:r>
+          </a:p>
+          <a:p>
+            <a:r>
+              <a:rPr lang="en-US" dirty="0"/>
+              <a:t>for CUSTOMER_NAME</a:t>
+            </a:r>
           </a:p>
         </p:txBody>
       </p:sp>
@@ -24757,39 +23831,6 @@
             <a:r>
               <a:rPr lang="en-US" sz="800" dirty="0"/>
               <a:t>★</a:t>
-            </a:r>
-          </a:p>
-        </p:txBody>
-      </p:sp>
-      <p:sp>
-        <p:nvSpPr>
-          <p:cNvPr id="2004" name="Footer Placeholder 2004"/>
-          <p:cNvSpPr>
-            <a:spLocks noGrp="1"/>
-          </p:cNvSpPr>
-          <p:nvPr>
-            <p:ph type="ftr" sz="quarter" idx="3"/>
-          </p:nvPr>
-        </p:nvSpPr>
-        <p:spPr>
-          <a:xfrm>
-            <a:off x="192088" y="6392596"/>
-            <a:ext cx="1763922" cy="370422"/>
-          </a:xfrm>
-        </p:spPr>
-        <p:txBody>
-          <a:bodyPr/>
-          <a:lstStyle/>
-          <a:p>
-            <a:r>
-              <a:rPr lang="en-US" dirty="0"/>
-              <a:t>Generated with Sigrid</a:t>
-            </a:r>
-          </a:p>
-          <a:p>
-            <a:r>
-              <a:rPr lang="en-US" dirty="0"/>
-              <a:t>for CUSTOMER_NAME</a:t>
             </a:r>
           </a:p>
         </p:txBody>
@@ -25209,8 +24250,8 @@
         </p:nvSpPr>
         <p:spPr>
           <a:xfrm>
-            <a:off x="381600" y="129568"/>
-            <a:ext cx="1157222" cy="228209"/>
+            <a:off x="381600" y="129599"/>
+            <a:ext cx="1156940" cy="228145"/>
           </a:xfrm>
         </p:spPr>
         <p:txBody>
@@ -25223,25 +24264,6 @@
               <a:rPr lang="en-US" dirty="0"/>
               <a:t>Architecture</a:t>
             </a:r>
-          </a:p>
-        </p:txBody>
-      </p:sp>
-      <p:sp>
-        <p:nvSpPr>
-          <p:cNvPr id="3" name="Content Placeholder 2"/>
-          <p:cNvSpPr>
-            <a:spLocks noGrp="1"/>
-          </p:cNvSpPr>
-          <p:nvPr>
-            <p:ph sz="quarter" idx="13"/>
-          </p:nvPr>
-        </p:nvSpPr>
-        <p:spPr/>
-        <p:txBody>
-          <a:bodyPr/>
-          <a:lstStyle/>
-          <a:p>
-            <a:endParaRPr/>
           </a:p>
         </p:txBody>
       </p:sp>
@@ -25271,63 +24293,29 @@
       </p:sp>
       <p:sp>
         <p:nvSpPr>
-          <p:cNvPr id="7" name="Rectangle 6">
-            <a:extLst>
-              <a:ext uri="{FF2B5EF4-FFF2-40B4-BE49-F238E27FC236}">
-                <a16:creationId xmlns:a16="http://schemas.microsoft.com/office/drawing/2014/main" id="{4D956AE0-666A-B966-0B15-61A5E6C88F75}"/>
-              </a:ext>
-            </a:extLst>
-          </p:cNvPr>
-          <p:cNvSpPr/>
-          <p:nvPr/>
+          <p:cNvPr id="1004" name="Footer Placeholder 1004"/>
+          <p:cNvSpPr>
+            <a:spLocks noGrp="1"/>
+          </p:cNvSpPr>
+          <p:nvPr>
+            <p:ph type="ftr" sz="quarter" idx="3"/>
+          </p:nvPr>
         </p:nvSpPr>
-        <p:spPr>
-          <a:xfrm>
-            <a:off x="0" y="1390132"/>
-            <a:ext cx="12192000" cy="4927867"/>
-          </a:xfrm>
-          <a:prstGeom prst="rect">
-            <a:avLst/>
-          </a:prstGeom>
-          <a:solidFill>
-            <a:schemeClr val="bg1"/>
-          </a:solidFill>
-          <a:ln>
-            <a:noFill/>
-          </a:ln>
-          <a:effectLst>
-            <a:outerShdw blurRad="190500" dist="38100" dir="2700000" algn="tl" rotWithShape="0">
-              <a:prstClr val="black">
-                <a:alpha val="15000"/>
-              </a:prstClr>
-            </a:outerShdw>
-          </a:effectLst>
-        </p:spPr>
-        <p:style>
-          <a:lnRef idx="2">
-            <a:schemeClr val="accent1">
-              <a:shade val="50000"/>
-            </a:schemeClr>
-          </a:lnRef>
-          <a:fillRef idx="1">
-            <a:schemeClr val="accent1"/>
-          </a:fillRef>
-          <a:effectRef idx="0">
-            <a:schemeClr val="accent1"/>
-          </a:effectRef>
-          <a:fontRef idx="minor">
-            <a:schemeClr val="lt1"/>
-          </a:fontRef>
-        </p:style>
+        <p:spPr/>
         <p:txBody>
-          <a:bodyPr lIns="731520" tIns="72000" rIns="108000" bIns="72000" rtlCol="0" anchor="ctr"/>
+          <a:bodyPr/>
           <a:lstStyle/>
           <a:p>
-            <a:endParaRPr lang="nl-NL" sz="1200" b="1" noProof="0" dirty="0">
-              <a:solidFill>
-                <a:schemeClr val="accent1"/>
-              </a:solidFill>
-            </a:endParaRPr>
+            <a:r>
+              <a:rPr lang="en-US" dirty="0"/>
+              <a:t>Generated with Sigrid</a:t>
+            </a:r>
+          </a:p>
+          <a:p>
+            <a:r>
+              <a:rPr lang="en-US" dirty="0"/>
+              <a:t>for CUSTOMER_NAME</a:t>
+            </a:r>
           </a:p>
         </p:txBody>
       </p:sp>
@@ -25917,39 +24905,6 @@
       </p:grpSp>
       <p:sp>
         <p:nvSpPr>
-          <p:cNvPr id="1004" name="Footer Placeholder 1004"/>
-          <p:cNvSpPr>
-            <a:spLocks noGrp="1"/>
-          </p:cNvSpPr>
-          <p:nvPr>
-            <p:ph type="ftr" sz="quarter" idx="3"/>
-          </p:nvPr>
-        </p:nvSpPr>
-        <p:spPr>
-          <a:xfrm>
-            <a:off x="192088" y="6392596"/>
-            <a:ext cx="1763922" cy="370422"/>
-          </a:xfrm>
-        </p:spPr>
-        <p:txBody>
-          <a:bodyPr/>
-          <a:lstStyle/>
-          <a:p>
-            <a:r>
-              <a:rPr lang="en-US" dirty="0"/>
-              <a:t>Generated with Sigrid</a:t>
-            </a:r>
-          </a:p>
-          <a:p>
-            <a:r>
-              <a:rPr lang="en-US" dirty="0"/>
-              <a:t>for CUSTOMER_NAME</a:t>
-            </a:r>
-          </a:p>
-        </p:txBody>
-      </p:sp>
-      <p:sp>
-        <p:nvSpPr>
           <p:cNvPr id="1071" name="TextBox 1071"/>
           <p:cNvSpPr txBox="1"/>
           <p:nvPr/>
@@ -26165,8 +25120,8 @@
         </p:nvSpPr>
         <p:spPr>
           <a:xfrm>
-            <a:off x="381600" y="129568"/>
-            <a:ext cx="1157222" cy="228209"/>
+            <a:off x="381600" y="129599"/>
+            <a:ext cx="1156940" cy="228145"/>
           </a:xfrm>
         </p:spPr>
         <p:txBody>
@@ -26179,25 +25134,6 @@
               <a:rPr lang="en-US" dirty="0"/>
               <a:t>Architecture</a:t>
             </a:r>
-          </a:p>
-        </p:txBody>
-      </p:sp>
-      <p:sp>
-        <p:nvSpPr>
-          <p:cNvPr id="3" name="Content Placeholder 2"/>
-          <p:cNvSpPr>
-            <a:spLocks noGrp="1"/>
-          </p:cNvSpPr>
-          <p:nvPr>
-            <p:ph sz="quarter" idx="13"/>
-          </p:nvPr>
-        </p:nvSpPr>
-        <p:spPr/>
-        <p:txBody>
-          <a:bodyPr/>
-          <a:lstStyle/>
-          <a:p>
-            <a:endParaRPr/>
           </a:p>
         </p:txBody>
       </p:sp>
@@ -26227,63 +25163,29 @@
       </p:sp>
       <p:sp>
         <p:nvSpPr>
-          <p:cNvPr id="7" name="Rectangle 6">
-            <a:extLst>
-              <a:ext uri="{FF2B5EF4-FFF2-40B4-BE49-F238E27FC236}">
-                <a16:creationId xmlns:a16="http://schemas.microsoft.com/office/drawing/2014/main" id="{4D956AE0-666A-B966-0B15-61A5E6C88F75}"/>
-              </a:ext>
-            </a:extLst>
-          </p:cNvPr>
-          <p:cNvSpPr/>
-          <p:nvPr/>
+          <p:cNvPr id="2004" name="Footer Placeholder 2004"/>
+          <p:cNvSpPr>
+            <a:spLocks noGrp="1"/>
+          </p:cNvSpPr>
+          <p:nvPr>
+            <p:ph type="ftr" sz="quarter" idx="3"/>
+          </p:nvPr>
         </p:nvSpPr>
-        <p:spPr>
-          <a:xfrm>
-            <a:off x="0" y="1390132"/>
-            <a:ext cx="12192000" cy="4927867"/>
-          </a:xfrm>
-          <a:prstGeom prst="rect">
-            <a:avLst/>
-          </a:prstGeom>
-          <a:solidFill>
-            <a:schemeClr val="bg1"/>
-          </a:solidFill>
-          <a:ln>
-            <a:noFill/>
-          </a:ln>
-          <a:effectLst>
-            <a:outerShdw blurRad="190500" dist="38100" dir="2700000" algn="tl" rotWithShape="0">
-              <a:prstClr val="black">
-                <a:alpha val="15000"/>
-              </a:prstClr>
-            </a:outerShdw>
-          </a:effectLst>
-        </p:spPr>
-        <p:style>
-          <a:lnRef idx="2">
-            <a:schemeClr val="accent1">
-              <a:shade val="50000"/>
-            </a:schemeClr>
-          </a:lnRef>
-          <a:fillRef idx="1">
-            <a:schemeClr val="accent1"/>
-          </a:fillRef>
-          <a:effectRef idx="0">
-            <a:schemeClr val="accent1"/>
-          </a:effectRef>
-          <a:fontRef idx="minor">
-            <a:schemeClr val="lt1"/>
-          </a:fontRef>
-        </p:style>
+        <p:spPr/>
         <p:txBody>
-          <a:bodyPr lIns="731520" tIns="72000" rIns="108000" bIns="72000" rtlCol="0" anchor="ctr"/>
+          <a:bodyPr/>
           <a:lstStyle/>
           <a:p>
-            <a:endParaRPr lang="nl-NL" sz="1200" b="1" noProof="0" dirty="0">
-              <a:solidFill>
-                <a:schemeClr val="accent1"/>
-              </a:solidFill>
-            </a:endParaRPr>
+            <a:r>
+              <a:rPr lang="en-US" dirty="0"/>
+              <a:t>Generated with Sigrid</a:t>
+            </a:r>
+          </a:p>
+          <a:p>
+            <a:r>
+              <a:rPr lang="en-US" dirty="0"/>
+              <a:t>for CUSTOMER_NAME</a:t>
+            </a:r>
           </a:p>
         </p:txBody>
       </p:sp>
@@ -26688,39 +25590,6 @@
       </p:sp>
       <p:sp>
         <p:nvSpPr>
-          <p:cNvPr id="2004" name="Footer Placeholder 2004"/>
-          <p:cNvSpPr>
-            <a:spLocks noGrp="1"/>
-          </p:cNvSpPr>
-          <p:nvPr>
-            <p:ph type="ftr" sz="quarter" idx="3"/>
-          </p:nvPr>
-        </p:nvSpPr>
-        <p:spPr>
-          <a:xfrm>
-            <a:off x="192088" y="6392596"/>
-            <a:ext cx="1763922" cy="370422"/>
-          </a:xfrm>
-        </p:spPr>
-        <p:txBody>
-          <a:bodyPr/>
-          <a:lstStyle/>
-          <a:p>
-            <a:r>
-              <a:rPr lang="en-US" dirty="0"/>
-              <a:t>Generated with Sigrid</a:t>
-            </a:r>
-          </a:p>
-          <a:p>
-            <a:r>
-              <a:rPr lang="en-US" dirty="0"/>
-              <a:t>for CUSTOMER_NAME</a:t>
-            </a:r>
-          </a:p>
-        </p:txBody>
-      </p:sp>
-      <p:sp>
-        <p:nvSpPr>
           <p:cNvPr id="2071" name="TextBox 2071"/>
           <p:cNvSpPr txBox="1"/>
           <p:nvPr/>
@@ -26872,8 +25741,8 @@
         </p:nvSpPr>
         <p:spPr>
           <a:xfrm>
-            <a:off x="381600" y="129568"/>
-            <a:ext cx="1157222" cy="228209"/>
+            <a:off x="381600" y="129599"/>
+            <a:ext cx="1156940" cy="228145"/>
           </a:xfrm>
         </p:spPr>
         <p:txBody>
@@ -26886,25 +25755,6 @@
               <a:rPr lang="en-US" dirty="0"/>
               <a:t>Architecture</a:t>
             </a:r>
-          </a:p>
-        </p:txBody>
-      </p:sp>
-      <p:sp>
-        <p:nvSpPr>
-          <p:cNvPr id="3" name="Content Placeholder 2"/>
-          <p:cNvSpPr>
-            <a:spLocks noGrp="1"/>
-          </p:cNvSpPr>
-          <p:nvPr>
-            <p:ph sz="quarter" idx="13"/>
-          </p:nvPr>
-        </p:nvSpPr>
-        <p:spPr/>
-        <p:txBody>
-          <a:bodyPr/>
-          <a:lstStyle/>
-          <a:p>
-            <a:endParaRPr/>
           </a:p>
         </p:txBody>
       </p:sp>
@@ -26934,63 +25784,29 @@
       </p:sp>
       <p:sp>
         <p:nvSpPr>
-          <p:cNvPr id="7" name="Rectangle 6">
-            <a:extLst>
-              <a:ext uri="{FF2B5EF4-FFF2-40B4-BE49-F238E27FC236}">
-                <a16:creationId xmlns:a16="http://schemas.microsoft.com/office/drawing/2014/main" id="{4D956AE0-666A-B966-0B15-61A5E6C88F75}"/>
-              </a:ext>
-            </a:extLst>
-          </p:cNvPr>
-          <p:cNvSpPr/>
-          <p:nvPr/>
+          <p:cNvPr id="1004" name="Footer Placeholder 1004"/>
+          <p:cNvSpPr>
+            <a:spLocks noGrp="1"/>
+          </p:cNvSpPr>
+          <p:nvPr>
+            <p:ph type="ftr" sz="quarter" idx="3"/>
+          </p:nvPr>
         </p:nvSpPr>
-        <p:spPr>
-          <a:xfrm>
-            <a:off x="0" y="1390132"/>
-            <a:ext cx="12192000" cy="4927867"/>
-          </a:xfrm>
-          <a:prstGeom prst="rect">
-            <a:avLst/>
-          </a:prstGeom>
-          <a:solidFill>
-            <a:schemeClr val="bg1"/>
-          </a:solidFill>
-          <a:ln>
-            <a:noFill/>
-          </a:ln>
-          <a:effectLst>
-            <a:outerShdw blurRad="190500" dist="38100" dir="2700000" algn="tl" rotWithShape="0">
-              <a:prstClr val="black">
-                <a:alpha val="15000"/>
-              </a:prstClr>
-            </a:outerShdw>
-          </a:effectLst>
-        </p:spPr>
-        <p:style>
-          <a:lnRef idx="2">
-            <a:schemeClr val="accent1">
-              <a:shade val="50000"/>
-            </a:schemeClr>
-          </a:lnRef>
-          <a:fillRef idx="1">
-            <a:schemeClr val="accent1"/>
-          </a:fillRef>
-          <a:effectRef idx="0">
-            <a:schemeClr val="accent1"/>
-          </a:effectRef>
-          <a:fontRef idx="minor">
-            <a:schemeClr val="lt1"/>
-          </a:fontRef>
-        </p:style>
+        <p:spPr/>
         <p:txBody>
-          <a:bodyPr lIns="731520" tIns="72000" rIns="108000" bIns="72000" rtlCol="0" anchor="ctr"/>
+          <a:bodyPr/>
           <a:lstStyle/>
           <a:p>
-            <a:endParaRPr lang="nl-NL" sz="1200" b="1" noProof="0" dirty="0">
-              <a:solidFill>
-                <a:schemeClr val="accent1"/>
-              </a:solidFill>
-            </a:endParaRPr>
+            <a:r>
+              <a:rPr lang="en-US" dirty="0"/>
+              <a:t>Generated with Sigrid</a:t>
+            </a:r>
+          </a:p>
+          <a:p>
+            <a:r>
+              <a:rPr lang="en-US" dirty="0"/>
+              <a:t>for CUSTOMER_NAME</a:t>
+            </a:r>
           </a:p>
         </p:txBody>
       </p:sp>
@@ -27580,39 +26396,6 @@
       </p:grpSp>
       <p:sp>
         <p:nvSpPr>
-          <p:cNvPr id="1004" name="Footer Placeholder 1004"/>
-          <p:cNvSpPr>
-            <a:spLocks noGrp="1"/>
-          </p:cNvSpPr>
-          <p:nvPr>
-            <p:ph type="ftr" sz="quarter" idx="3"/>
-          </p:nvPr>
-        </p:nvSpPr>
-        <p:spPr>
-          <a:xfrm>
-            <a:off x="192088" y="6392596"/>
-            <a:ext cx="1763922" cy="370422"/>
-          </a:xfrm>
-        </p:spPr>
-        <p:txBody>
-          <a:bodyPr/>
-          <a:lstStyle/>
-          <a:p>
-            <a:r>
-              <a:rPr lang="en-US" dirty="0"/>
-              <a:t>Generated with Sigrid</a:t>
-            </a:r>
-          </a:p>
-          <a:p>
-            <a:r>
-              <a:rPr lang="en-US" dirty="0"/>
-              <a:t>for CUSTOMER_NAME</a:t>
-            </a:r>
-          </a:p>
-        </p:txBody>
-      </p:sp>
-      <p:sp>
-        <p:nvSpPr>
           <p:cNvPr id="1071" name="TextBox 1071"/>
           <p:cNvSpPr txBox="1"/>
           <p:nvPr/>
@@ -27828,8 +26611,8 @@
         </p:nvSpPr>
         <p:spPr>
           <a:xfrm>
-            <a:off x="381600" y="129568"/>
-            <a:ext cx="1157222" cy="228209"/>
+            <a:off x="381600" y="129599"/>
+            <a:ext cx="1156940" cy="228145"/>
           </a:xfrm>
         </p:spPr>
         <p:txBody>
@@ -27842,25 +26625,6 @@
               <a:rPr lang="en-US" dirty="0"/>
               <a:t>Architecture</a:t>
             </a:r>
-          </a:p>
-        </p:txBody>
-      </p:sp>
-      <p:sp>
-        <p:nvSpPr>
-          <p:cNvPr id="3" name="Content Placeholder 2"/>
-          <p:cNvSpPr>
-            <a:spLocks noGrp="1"/>
-          </p:cNvSpPr>
-          <p:nvPr>
-            <p:ph sz="quarter" idx="13"/>
-          </p:nvPr>
-        </p:nvSpPr>
-        <p:spPr/>
-        <p:txBody>
-          <a:bodyPr/>
-          <a:lstStyle/>
-          <a:p>
-            <a:endParaRPr/>
           </a:p>
         </p:txBody>
       </p:sp>
@@ -27890,63 +26654,29 @@
       </p:sp>
       <p:sp>
         <p:nvSpPr>
-          <p:cNvPr id="7" name="Rectangle 6">
-            <a:extLst>
-              <a:ext uri="{FF2B5EF4-FFF2-40B4-BE49-F238E27FC236}">
-                <a16:creationId xmlns:a16="http://schemas.microsoft.com/office/drawing/2014/main" id="{4D956AE0-666A-B966-0B15-61A5E6C88F75}"/>
-              </a:ext>
-            </a:extLst>
-          </p:cNvPr>
-          <p:cNvSpPr/>
-          <p:nvPr/>
+          <p:cNvPr id="2004" name="Footer Placeholder 2004"/>
+          <p:cNvSpPr>
+            <a:spLocks noGrp="1"/>
+          </p:cNvSpPr>
+          <p:nvPr>
+            <p:ph type="ftr" sz="quarter" idx="3"/>
+          </p:nvPr>
         </p:nvSpPr>
-        <p:spPr>
-          <a:xfrm>
-            <a:off x="0" y="1390132"/>
-            <a:ext cx="12192000" cy="4927867"/>
-          </a:xfrm>
-          <a:prstGeom prst="rect">
-            <a:avLst/>
-          </a:prstGeom>
-          <a:solidFill>
-            <a:schemeClr val="bg1"/>
-          </a:solidFill>
-          <a:ln>
-            <a:noFill/>
-          </a:ln>
-          <a:effectLst>
-            <a:outerShdw blurRad="190500" dist="38100" dir="2700000" algn="tl" rotWithShape="0">
-              <a:prstClr val="black">
-                <a:alpha val="15000"/>
-              </a:prstClr>
-            </a:outerShdw>
-          </a:effectLst>
-        </p:spPr>
-        <p:style>
-          <a:lnRef idx="2">
-            <a:schemeClr val="accent1">
-              <a:shade val="50000"/>
-            </a:schemeClr>
-          </a:lnRef>
-          <a:fillRef idx="1">
-            <a:schemeClr val="accent1"/>
-          </a:fillRef>
-          <a:effectRef idx="0">
-            <a:schemeClr val="accent1"/>
-          </a:effectRef>
-          <a:fontRef idx="minor">
-            <a:schemeClr val="lt1"/>
-          </a:fontRef>
-        </p:style>
+        <p:spPr/>
         <p:txBody>
-          <a:bodyPr lIns="731520" tIns="72000" rIns="108000" bIns="72000" rtlCol="0" anchor="ctr"/>
+          <a:bodyPr/>
           <a:lstStyle/>
           <a:p>
-            <a:endParaRPr lang="nl-NL" sz="1200" b="1" noProof="0" dirty="0">
-              <a:solidFill>
-                <a:schemeClr val="accent1"/>
-              </a:solidFill>
-            </a:endParaRPr>
+            <a:r>
+              <a:rPr lang="en-US" dirty="0"/>
+              <a:t>Generated with Sigrid</a:t>
+            </a:r>
+          </a:p>
+          <a:p>
+            <a:r>
+              <a:rPr lang="en-US" dirty="0"/>
+              <a:t>for CUSTOMER_NAME</a:t>
+            </a:r>
           </a:p>
         </p:txBody>
       </p:sp>
@@ -28351,39 +27081,6 @@
       </p:sp>
       <p:sp>
         <p:nvSpPr>
-          <p:cNvPr id="2004" name="Footer Placeholder 2004"/>
-          <p:cNvSpPr>
-            <a:spLocks noGrp="1"/>
-          </p:cNvSpPr>
-          <p:nvPr>
-            <p:ph type="ftr" sz="quarter" idx="3"/>
-          </p:nvPr>
-        </p:nvSpPr>
-        <p:spPr>
-          <a:xfrm>
-            <a:off x="192088" y="6392596"/>
-            <a:ext cx="1763922" cy="370422"/>
-          </a:xfrm>
-        </p:spPr>
-        <p:txBody>
-          <a:bodyPr/>
-          <a:lstStyle/>
-          <a:p>
-            <a:r>
-              <a:rPr lang="en-US" dirty="0"/>
-              <a:t>Generated with Sigrid</a:t>
-            </a:r>
-          </a:p>
-          <a:p>
-            <a:r>
-              <a:rPr lang="en-US" dirty="0"/>
-              <a:t>for CUSTOMER_NAME</a:t>
-            </a:r>
-          </a:p>
-        </p:txBody>
-      </p:sp>
-      <p:sp>
-        <p:nvSpPr>
           <p:cNvPr id="2071" name="TextBox 2071"/>
           <p:cNvSpPr txBox="1"/>
           <p:nvPr/>
@@ -28535,8 +27232,8 @@
         </p:nvSpPr>
         <p:spPr>
           <a:xfrm>
-            <a:off x="381600" y="129568"/>
-            <a:ext cx="1157222" cy="228209"/>
+            <a:off x="381600" y="129599"/>
+            <a:ext cx="1156940" cy="228145"/>
           </a:xfrm>
         </p:spPr>
         <p:txBody>
@@ -28549,25 +27246,7 @@
               <a:rPr dirty="0"/>
               <a:t>Architecture</a:t>
             </a:r>
-          </a:p>
-        </p:txBody>
-      </p:sp>
-      <p:sp>
-        <p:nvSpPr>
-          <p:cNvPr id="3" name="Content Placeholder 2"/>
-          <p:cNvSpPr>
-            <a:spLocks noGrp="1"/>
-          </p:cNvSpPr>
-          <p:nvPr>
-            <p:ph sz="quarter" idx="13"/>
-          </p:nvPr>
-        </p:nvSpPr>
-        <p:spPr/>
-        <p:txBody>
-          <a:bodyPr/>
-          <a:lstStyle/>
-          <a:p>
-            <a:endParaRPr/>
+            <a:endParaRPr lang="en-US" dirty="0"/>
           </a:p>
         </p:txBody>
       </p:sp>
@@ -28597,63 +27276,29 @@
       </p:sp>
       <p:sp>
         <p:nvSpPr>
-          <p:cNvPr id="7" name="Rectangle 6">
-            <a:extLst>
-              <a:ext uri="{FF2B5EF4-FFF2-40B4-BE49-F238E27FC236}">
-                <a16:creationId xmlns:a16="http://schemas.microsoft.com/office/drawing/2014/main" id="{4D956AE0-666A-B966-0B15-61A5E6C88F75}"/>
-              </a:ext>
-            </a:extLst>
-          </p:cNvPr>
-          <p:cNvSpPr/>
-          <p:nvPr/>
+          <p:cNvPr id="1004" name="Footer Placeholder 1004"/>
+          <p:cNvSpPr>
+            <a:spLocks noGrp="1"/>
+          </p:cNvSpPr>
+          <p:nvPr>
+            <p:ph type="ftr" sz="quarter" idx="3"/>
+          </p:nvPr>
         </p:nvSpPr>
-        <p:spPr>
-          <a:xfrm>
-            <a:off x="0" y="1390132"/>
-            <a:ext cx="12192000" cy="4927867"/>
-          </a:xfrm>
-          <a:prstGeom prst="rect">
-            <a:avLst/>
-          </a:prstGeom>
-          <a:solidFill>
-            <a:schemeClr val="bg1"/>
-          </a:solidFill>
-          <a:ln>
-            <a:noFill/>
-          </a:ln>
-          <a:effectLst>
-            <a:outerShdw blurRad="190500" dist="38100" dir="2700000" algn="tl" rotWithShape="0">
-              <a:prstClr val="black">
-                <a:alpha val="15000"/>
-              </a:prstClr>
-            </a:outerShdw>
-          </a:effectLst>
-        </p:spPr>
-        <p:style>
-          <a:lnRef idx="2">
-            <a:schemeClr val="accent1">
-              <a:shade val="50000"/>
-            </a:schemeClr>
-          </a:lnRef>
-          <a:fillRef idx="1">
-            <a:schemeClr val="accent1"/>
-          </a:fillRef>
-          <a:effectRef idx="0">
-            <a:schemeClr val="accent1"/>
-          </a:effectRef>
-          <a:fontRef idx="minor">
-            <a:schemeClr val="lt1"/>
-          </a:fontRef>
-        </p:style>
+        <p:spPr/>
         <p:txBody>
-          <a:bodyPr lIns="731520" tIns="72000" rIns="108000" bIns="72000" rtlCol="0" anchor="ctr"/>
+          <a:bodyPr/>
           <a:lstStyle/>
           <a:p>
-            <a:endParaRPr lang="nl-NL" sz="1200" b="1" noProof="0" dirty="0">
-              <a:solidFill>
-                <a:schemeClr val="accent1"/>
-              </a:solidFill>
-            </a:endParaRPr>
+            <a:r>
+              <a:rPr lang="en-US" dirty="0"/>
+              <a:t>Generated with Sigrid</a:t>
+            </a:r>
+          </a:p>
+          <a:p>
+            <a:r>
+              <a:rPr lang="en-US" dirty="0"/>
+              <a:t>for CUSTOMER_NAME</a:t>
+            </a:r>
           </a:p>
         </p:txBody>
       </p:sp>
@@ -29243,39 +27888,6 @@
       </p:grpSp>
       <p:sp>
         <p:nvSpPr>
-          <p:cNvPr id="1004" name="Footer Placeholder 1004"/>
-          <p:cNvSpPr>
-            <a:spLocks noGrp="1"/>
-          </p:cNvSpPr>
-          <p:nvPr>
-            <p:ph type="ftr" sz="quarter" idx="3"/>
-          </p:nvPr>
-        </p:nvSpPr>
-        <p:spPr>
-          <a:xfrm>
-            <a:off x="192088" y="6392596"/>
-            <a:ext cx="1763922" cy="370422"/>
-          </a:xfrm>
-        </p:spPr>
-        <p:txBody>
-          <a:bodyPr/>
-          <a:lstStyle/>
-          <a:p>
-            <a:r>
-              <a:rPr lang="en-US" dirty="0"/>
-              <a:t>Generated with Sigrid</a:t>
-            </a:r>
-          </a:p>
-          <a:p>
-            <a:r>
-              <a:rPr lang="en-US" dirty="0"/>
-              <a:t>for CUSTOMER_NAME</a:t>
-            </a:r>
-          </a:p>
-        </p:txBody>
-      </p:sp>
-      <p:sp>
-        <p:nvSpPr>
           <p:cNvPr id="1071" name="TextBox 1071"/>
           <p:cNvSpPr txBox="1"/>
           <p:nvPr/>
@@ -29491,8 +28103,8 @@
         </p:nvSpPr>
         <p:spPr>
           <a:xfrm>
-            <a:off x="381600" y="129568"/>
-            <a:ext cx="1157222" cy="228209"/>
+            <a:off x="381600" y="129599"/>
+            <a:ext cx="1156940" cy="228145"/>
           </a:xfrm>
         </p:spPr>
         <p:txBody>
@@ -29505,25 +28117,6 @@
               <a:rPr lang="en-US" dirty="0"/>
               <a:t>Architecture</a:t>
             </a:r>
-          </a:p>
-        </p:txBody>
-      </p:sp>
-      <p:sp>
-        <p:nvSpPr>
-          <p:cNvPr id="3" name="Content Placeholder 2"/>
-          <p:cNvSpPr>
-            <a:spLocks noGrp="1"/>
-          </p:cNvSpPr>
-          <p:nvPr>
-            <p:ph sz="quarter" idx="13"/>
-          </p:nvPr>
-        </p:nvSpPr>
-        <p:spPr/>
-        <p:txBody>
-          <a:bodyPr/>
-          <a:lstStyle/>
-          <a:p>
-            <a:endParaRPr/>
           </a:p>
         </p:txBody>
       </p:sp>
@@ -29553,63 +28146,29 @@
       </p:sp>
       <p:sp>
         <p:nvSpPr>
-          <p:cNvPr id="7" name="Rectangle 6">
-            <a:extLst>
-              <a:ext uri="{FF2B5EF4-FFF2-40B4-BE49-F238E27FC236}">
-                <a16:creationId xmlns:a16="http://schemas.microsoft.com/office/drawing/2014/main" id="{4D956AE0-666A-B966-0B15-61A5E6C88F75}"/>
-              </a:ext>
-            </a:extLst>
-          </p:cNvPr>
-          <p:cNvSpPr/>
-          <p:nvPr/>
+          <p:cNvPr id="2004" name="Footer Placeholder 2004"/>
+          <p:cNvSpPr>
+            <a:spLocks noGrp="1"/>
+          </p:cNvSpPr>
+          <p:nvPr>
+            <p:ph type="ftr" sz="quarter" idx="3"/>
+          </p:nvPr>
         </p:nvSpPr>
-        <p:spPr>
-          <a:xfrm>
-            <a:off x="0" y="1390132"/>
-            <a:ext cx="12192000" cy="4927867"/>
-          </a:xfrm>
-          <a:prstGeom prst="rect">
-            <a:avLst/>
-          </a:prstGeom>
-          <a:solidFill>
-            <a:schemeClr val="bg1"/>
-          </a:solidFill>
-          <a:ln>
-            <a:noFill/>
-          </a:ln>
-          <a:effectLst>
-            <a:outerShdw blurRad="190500" dist="38100" dir="2700000" algn="tl" rotWithShape="0">
-              <a:prstClr val="black">
-                <a:alpha val="15000"/>
-              </a:prstClr>
-            </a:outerShdw>
-          </a:effectLst>
-        </p:spPr>
-        <p:style>
-          <a:lnRef idx="2">
-            <a:schemeClr val="accent1">
-              <a:shade val="50000"/>
-            </a:schemeClr>
-          </a:lnRef>
-          <a:fillRef idx="1">
-            <a:schemeClr val="accent1"/>
-          </a:fillRef>
-          <a:effectRef idx="0">
-            <a:schemeClr val="accent1"/>
-          </a:effectRef>
-          <a:fontRef idx="minor">
-            <a:schemeClr val="lt1"/>
-          </a:fontRef>
-        </p:style>
+        <p:spPr/>
         <p:txBody>
-          <a:bodyPr lIns="731520" tIns="72000" rIns="108000" bIns="72000" rtlCol="0" anchor="ctr"/>
+          <a:bodyPr/>
           <a:lstStyle/>
           <a:p>
-            <a:endParaRPr lang="nl-NL" sz="1200" b="1" noProof="0" dirty="0">
-              <a:solidFill>
-                <a:schemeClr val="accent1"/>
-              </a:solidFill>
-            </a:endParaRPr>
+            <a:r>
+              <a:rPr lang="en-US" dirty="0"/>
+              <a:t>Generated with Sigrid</a:t>
+            </a:r>
+          </a:p>
+          <a:p>
+            <a:r>
+              <a:rPr lang="en-US" dirty="0"/>
+              <a:t>for CUSTOMER_NAME</a:t>
+            </a:r>
           </a:p>
         </p:txBody>
       </p:sp>
@@ -30014,39 +28573,6 @@
       </p:sp>
       <p:sp>
         <p:nvSpPr>
-          <p:cNvPr id="2004" name="Footer Placeholder 2004"/>
-          <p:cNvSpPr>
-            <a:spLocks noGrp="1"/>
-          </p:cNvSpPr>
-          <p:nvPr>
-            <p:ph type="ftr" sz="quarter" idx="3"/>
-          </p:nvPr>
-        </p:nvSpPr>
-        <p:spPr>
-          <a:xfrm>
-            <a:off x="192088" y="6392596"/>
-            <a:ext cx="1763922" cy="370422"/>
-          </a:xfrm>
-        </p:spPr>
-        <p:txBody>
-          <a:bodyPr/>
-          <a:lstStyle/>
-          <a:p>
-            <a:r>
-              <a:rPr lang="en-US" dirty="0"/>
-              <a:t>Generated with Sigrid</a:t>
-            </a:r>
-          </a:p>
-          <a:p>
-            <a:r>
-              <a:rPr lang="en-US" dirty="0"/>
-              <a:t>for CUSTOMER_NAME</a:t>
-            </a:r>
-          </a:p>
-        </p:txBody>
-      </p:sp>
-      <p:sp>
-        <p:nvSpPr>
           <p:cNvPr id="2071" name="TextBox 2071"/>
           <p:cNvSpPr txBox="1"/>
           <p:nvPr/>
@@ -30198,8 +28724,8 @@
         </p:nvSpPr>
         <p:spPr>
           <a:xfrm>
-            <a:off x="381600" y="129568"/>
-            <a:ext cx="1157222" cy="228209"/>
+            <a:off x="381600" y="129599"/>
+            <a:ext cx="1156940" cy="228145"/>
           </a:xfrm>
         </p:spPr>
         <p:txBody>
@@ -30212,25 +28738,6 @@
               <a:rPr lang="en-US" dirty="0"/>
               <a:t>Architecture</a:t>
             </a:r>
-          </a:p>
-        </p:txBody>
-      </p:sp>
-      <p:sp>
-        <p:nvSpPr>
-          <p:cNvPr id="3" name="Content Placeholder 2"/>
-          <p:cNvSpPr>
-            <a:spLocks noGrp="1"/>
-          </p:cNvSpPr>
-          <p:nvPr>
-            <p:ph sz="quarter" idx="13"/>
-          </p:nvPr>
-        </p:nvSpPr>
-        <p:spPr/>
-        <p:txBody>
-          <a:bodyPr/>
-          <a:lstStyle/>
-          <a:p>
-            <a:endParaRPr/>
           </a:p>
         </p:txBody>
       </p:sp>
@@ -30271,63 +28778,29 @@
       </p:sp>
       <p:sp>
         <p:nvSpPr>
-          <p:cNvPr id="7" name="Rectangle 6">
-            <a:extLst>
-              <a:ext uri="{FF2B5EF4-FFF2-40B4-BE49-F238E27FC236}">
-                <a16:creationId xmlns:a16="http://schemas.microsoft.com/office/drawing/2014/main" id="{4D956AE0-666A-B966-0B15-61A5E6C88F75}"/>
-              </a:ext>
-            </a:extLst>
-          </p:cNvPr>
-          <p:cNvSpPr/>
-          <p:nvPr/>
+          <p:cNvPr id="1004" name="Footer Placeholder 1004"/>
+          <p:cNvSpPr>
+            <a:spLocks noGrp="1"/>
+          </p:cNvSpPr>
+          <p:nvPr>
+            <p:ph type="ftr" sz="quarter" idx="3"/>
+          </p:nvPr>
         </p:nvSpPr>
-        <p:spPr>
-          <a:xfrm>
-            <a:off x="0" y="1390132"/>
-            <a:ext cx="12192000" cy="4927867"/>
-          </a:xfrm>
-          <a:prstGeom prst="rect">
-            <a:avLst/>
-          </a:prstGeom>
-          <a:solidFill>
-            <a:schemeClr val="bg1"/>
-          </a:solidFill>
-          <a:ln>
-            <a:noFill/>
-          </a:ln>
-          <a:effectLst>
-            <a:outerShdw blurRad="190500" dist="38100" dir="2700000" algn="tl" rotWithShape="0">
-              <a:prstClr val="black">
-                <a:alpha val="15000"/>
-              </a:prstClr>
-            </a:outerShdw>
-          </a:effectLst>
-        </p:spPr>
-        <p:style>
-          <a:lnRef idx="2">
-            <a:schemeClr val="accent1">
-              <a:shade val="50000"/>
-            </a:schemeClr>
-          </a:lnRef>
-          <a:fillRef idx="1">
-            <a:schemeClr val="accent1"/>
-          </a:fillRef>
-          <a:effectRef idx="0">
-            <a:schemeClr val="accent1"/>
-          </a:effectRef>
-          <a:fontRef idx="minor">
-            <a:schemeClr val="lt1"/>
-          </a:fontRef>
-        </p:style>
+        <p:spPr/>
         <p:txBody>
-          <a:bodyPr lIns="731520" tIns="72000" rIns="108000" bIns="72000" rtlCol="0" anchor="ctr"/>
+          <a:bodyPr/>
           <a:lstStyle/>
           <a:p>
-            <a:endParaRPr lang="nl-NL" sz="1200" b="1" noProof="0" dirty="0">
-              <a:solidFill>
-                <a:schemeClr val="accent1"/>
-              </a:solidFill>
-            </a:endParaRPr>
+            <a:r>
+              <a:rPr lang="en-US" dirty="0"/>
+              <a:t>Generated with Sigrid</a:t>
+            </a:r>
+          </a:p>
+          <a:p>
+            <a:r>
+              <a:rPr lang="en-US" dirty="0"/>
+              <a:t>for CUSTOMER_NAME</a:t>
+            </a:r>
           </a:p>
         </p:txBody>
       </p:sp>
@@ -30393,14 +28866,6 @@
                 <a:cs typeface="Calibri"/>
               </a:rPr>
               <a:t>_COMMUNICATION_CENTRALIZATION</a:t>
-            </a:r>
-            <a:r>
-              <a:rPr lang="en-US" sz="1600" dirty="0">
-                <a:solidFill>
-                  <a:schemeClr val="bg1"/>
-                </a:solidFill>
-              </a:rPr>
-              <a:t/>
             </a:r>
           </a:p>
         </p:txBody>
@@ -30932,39 +29397,6 @@
       </p:grpSp>
       <p:sp>
         <p:nvSpPr>
-          <p:cNvPr id="1004" name="Footer Placeholder 1004"/>
-          <p:cNvSpPr>
-            <a:spLocks noGrp="1"/>
-          </p:cNvSpPr>
-          <p:nvPr>
-            <p:ph type="ftr" sz="quarter" idx="3"/>
-          </p:nvPr>
-        </p:nvSpPr>
-        <p:spPr>
-          <a:xfrm>
-            <a:off x="192088" y="6392596"/>
-            <a:ext cx="1763922" cy="370422"/>
-          </a:xfrm>
-        </p:spPr>
-        <p:txBody>
-          <a:bodyPr/>
-          <a:lstStyle/>
-          <a:p>
-            <a:r>
-              <a:rPr lang="en-US" dirty="0"/>
-              <a:t>Generated with Sigrid</a:t>
-            </a:r>
-          </a:p>
-          <a:p>
-            <a:r>
-              <a:rPr lang="en-US" dirty="0"/>
-              <a:t>for CUSTOMER_NAME</a:t>
-            </a:r>
-          </a:p>
-        </p:txBody>
-      </p:sp>
-      <p:sp>
-        <p:nvSpPr>
           <p:cNvPr id="1071" name="TextBox 1071"/>
           <p:cNvSpPr txBox="1"/>
           <p:nvPr/>
@@ -31215,8 +29647,8 @@
         </p:nvSpPr>
         <p:spPr>
           <a:xfrm>
-            <a:off x="381600" y="129568"/>
-            <a:ext cx="1157222" cy="228209"/>
+            <a:off x="381600" y="129599"/>
+            <a:ext cx="1156940" cy="228145"/>
           </a:xfrm>
         </p:spPr>
         <p:txBody>
@@ -31229,25 +29661,6 @@
               <a:rPr lang="en-US" dirty="0"/>
               <a:t>Architecture</a:t>
             </a:r>
-          </a:p>
-        </p:txBody>
-      </p:sp>
-      <p:sp>
-        <p:nvSpPr>
-          <p:cNvPr id="3" name="Content Placeholder 2"/>
-          <p:cNvSpPr>
-            <a:spLocks noGrp="1"/>
-          </p:cNvSpPr>
-          <p:nvPr>
-            <p:ph sz="quarter" idx="13"/>
-          </p:nvPr>
-        </p:nvSpPr>
-        <p:spPr/>
-        <p:txBody>
-          <a:bodyPr/>
-          <a:lstStyle/>
-          <a:p>
-            <a:endParaRPr/>
           </a:p>
         </p:txBody>
       </p:sp>
@@ -31277,63 +29690,29 @@
       </p:sp>
       <p:sp>
         <p:nvSpPr>
-          <p:cNvPr id="7" name="Rectangle 6">
-            <a:extLst>
-              <a:ext uri="{FF2B5EF4-FFF2-40B4-BE49-F238E27FC236}">
-                <a16:creationId xmlns:a16="http://schemas.microsoft.com/office/drawing/2014/main" id="{4D956AE0-666A-B966-0B15-61A5E6C88F75}"/>
-              </a:ext>
-            </a:extLst>
-          </p:cNvPr>
-          <p:cNvSpPr/>
-          <p:nvPr/>
+          <p:cNvPr id="2004" name="Footer Placeholder 2004"/>
+          <p:cNvSpPr>
+            <a:spLocks noGrp="1"/>
+          </p:cNvSpPr>
+          <p:nvPr>
+            <p:ph type="ftr" sz="quarter" idx="3"/>
+          </p:nvPr>
         </p:nvSpPr>
-        <p:spPr>
-          <a:xfrm>
-            <a:off x="0" y="1390132"/>
-            <a:ext cx="12192000" cy="4927867"/>
-          </a:xfrm>
-          <a:prstGeom prst="rect">
-            <a:avLst/>
-          </a:prstGeom>
-          <a:solidFill>
-            <a:schemeClr val="bg1"/>
-          </a:solidFill>
-          <a:ln>
-            <a:noFill/>
-          </a:ln>
-          <a:effectLst>
-            <a:outerShdw blurRad="190500" dist="38100" dir="2700000" algn="tl" rotWithShape="0">
-              <a:prstClr val="black">
-                <a:alpha val="15000"/>
-              </a:prstClr>
-            </a:outerShdw>
-          </a:effectLst>
-        </p:spPr>
-        <p:style>
-          <a:lnRef idx="2">
-            <a:schemeClr val="accent1">
-              <a:shade val="50000"/>
-            </a:schemeClr>
-          </a:lnRef>
-          <a:fillRef idx="1">
-            <a:schemeClr val="accent1"/>
-          </a:fillRef>
-          <a:effectRef idx="0">
-            <a:schemeClr val="accent1"/>
-          </a:effectRef>
-          <a:fontRef idx="minor">
-            <a:schemeClr val="lt1"/>
-          </a:fontRef>
-        </p:style>
+        <p:spPr/>
         <p:txBody>
-          <a:bodyPr lIns="731520" tIns="72000" rIns="108000" bIns="72000" rtlCol="0" anchor="ctr"/>
+          <a:bodyPr/>
           <a:lstStyle/>
           <a:p>
-            <a:endParaRPr lang="nl-NL" sz="1200" b="1" noProof="0" dirty="0">
-              <a:solidFill>
-                <a:schemeClr val="accent1"/>
-              </a:solidFill>
-            </a:endParaRPr>
+            <a:r>
+              <a:rPr lang="en-US" dirty="0"/>
+              <a:t>Generated with Sigrid</a:t>
+            </a:r>
+          </a:p>
+          <a:p>
+            <a:r>
+              <a:rPr lang="en-US" dirty="0"/>
+              <a:t>for CUSTOMER_NAME</a:t>
+            </a:r>
           </a:p>
         </p:txBody>
       </p:sp>
@@ -31738,39 +30117,6 @@
       </p:sp>
       <p:sp>
         <p:nvSpPr>
-          <p:cNvPr id="2004" name="Footer Placeholder 2004"/>
-          <p:cNvSpPr>
-            <a:spLocks noGrp="1"/>
-          </p:cNvSpPr>
-          <p:nvPr>
-            <p:ph type="ftr" sz="quarter" idx="3"/>
-          </p:nvPr>
-        </p:nvSpPr>
-        <p:spPr>
-          <a:xfrm>
-            <a:off x="192088" y="6392596"/>
-            <a:ext cx="1763922" cy="370422"/>
-          </a:xfrm>
-        </p:spPr>
-        <p:txBody>
-          <a:bodyPr/>
-          <a:lstStyle/>
-          <a:p>
-            <a:r>
-              <a:rPr lang="en-US" dirty="0"/>
-              <a:t>Generated with Sigrid</a:t>
-            </a:r>
-          </a:p>
-          <a:p>
-            <a:r>
-              <a:rPr lang="en-US" dirty="0"/>
-              <a:t>for CUSTOMER_NAME</a:t>
-            </a:r>
-          </a:p>
-        </p:txBody>
-      </p:sp>
-      <p:sp>
-        <p:nvSpPr>
           <p:cNvPr id="2071" name="TextBox 2071"/>
           <p:cNvSpPr txBox="1"/>
           <p:nvPr/>
@@ -31922,8 +30268,8 @@
         </p:nvSpPr>
         <p:spPr>
           <a:xfrm>
-            <a:off x="381600" y="129568"/>
-            <a:ext cx="1157222" cy="228209"/>
+            <a:off x="381600" y="129599"/>
+            <a:ext cx="1156940" cy="228145"/>
           </a:xfrm>
         </p:spPr>
         <p:txBody>
@@ -31936,25 +30282,6 @@
               <a:rPr lang="en-US" dirty="0"/>
               <a:t>Architecture</a:t>
             </a:r>
-          </a:p>
-        </p:txBody>
-      </p:sp>
-      <p:sp>
-        <p:nvSpPr>
-          <p:cNvPr id="3" name="Content Placeholder 2"/>
-          <p:cNvSpPr>
-            <a:spLocks noGrp="1"/>
-          </p:cNvSpPr>
-          <p:nvPr>
-            <p:ph sz="quarter" idx="13"/>
-          </p:nvPr>
-        </p:nvSpPr>
-        <p:spPr/>
-        <p:txBody>
-          <a:bodyPr/>
-          <a:lstStyle/>
-          <a:p>
-            <a:endParaRPr/>
           </a:p>
         </p:txBody>
       </p:sp>
@@ -31984,63 +30311,29 @@
       </p:sp>
       <p:sp>
         <p:nvSpPr>
-          <p:cNvPr id="7" name="Rectangle 6">
-            <a:extLst>
-              <a:ext uri="{FF2B5EF4-FFF2-40B4-BE49-F238E27FC236}">
-                <a16:creationId xmlns:a16="http://schemas.microsoft.com/office/drawing/2014/main" id="{4D956AE0-666A-B966-0B15-61A5E6C88F75}"/>
-              </a:ext>
-            </a:extLst>
-          </p:cNvPr>
-          <p:cNvSpPr/>
-          <p:nvPr/>
+          <p:cNvPr id="1004" name="Footer Placeholder 1004"/>
+          <p:cNvSpPr>
+            <a:spLocks noGrp="1"/>
+          </p:cNvSpPr>
+          <p:nvPr>
+            <p:ph type="ftr" sz="quarter" idx="3"/>
+          </p:nvPr>
         </p:nvSpPr>
-        <p:spPr>
-          <a:xfrm>
-            <a:off x="0" y="1390132"/>
-            <a:ext cx="12192000" cy="4927867"/>
-          </a:xfrm>
-          <a:prstGeom prst="rect">
-            <a:avLst/>
-          </a:prstGeom>
-          <a:solidFill>
-            <a:schemeClr val="bg1"/>
-          </a:solidFill>
-          <a:ln>
-            <a:noFill/>
-          </a:ln>
-          <a:effectLst>
-            <a:outerShdw blurRad="190500" dist="38100" dir="2700000" algn="tl" rotWithShape="0">
-              <a:prstClr val="black">
-                <a:alpha val="15000"/>
-              </a:prstClr>
-            </a:outerShdw>
-          </a:effectLst>
-        </p:spPr>
-        <p:style>
-          <a:lnRef idx="2">
-            <a:schemeClr val="accent1">
-              <a:shade val="50000"/>
-            </a:schemeClr>
-          </a:lnRef>
-          <a:fillRef idx="1">
-            <a:schemeClr val="accent1"/>
-          </a:fillRef>
-          <a:effectRef idx="0">
-            <a:schemeClr val="accent1"/>
-          </a:effectRef>
-          <a:fontRef idx="minor">
-            <a:schemeClr val="lt1"/>
-          </a:fontRef>
-        </p:style>
+        <p:spPr/>
         <p:txBody>
-          <a:bodyPr lIns="731520" tIns="72000" rIns="108000" bIns="72000" rtlCol="0" anchor="ctr"/>
+          <a:bodyPr/>
           <a:lstStyle/>
           <a:p>
-            <a:endParaRPr lang="nl-NL" sz="1200" b="1" noProof="0" dirty="0">
-              <a:solidFill>
-                <a:schemeClr val="accent1"/>
-              </a:solidFill>
-            </a:endParaRPr>
+            <a:r>
+              <a:rPr lang="en-US" dirty="0"/>
+              <a:t>Generated with Sigrid</a:t>
+            </a:r>
+          </a:p>
+          <a:p>
+            <a:r>
+              <a:rPr lang="en-US" dirty="0"/>
+              <a:t>for CUSTOMER_NAME</a:t>
+            </a:r>
           </a:p>
         </p:txBody>
       </p:sp>
@@ -32630,39 +30923,6 @@
       </p:grpSp>
       <p:sp>
         <p:nvSpPr>
-          <p:cNvPr id="1004" name="Footer Placeholder 1004"/>
-          <p:cNvSpPr>
-            <a:spLocks noGrp="1"/>
-          </p:cNvSpPr>
-          <p:nvPr>
-            <p:ph type="ftr" sz="quarter" idx="3"/>
-          </p:nvPr>
-        </p:nvSpPr>
-        <p:spPr>
-          <a:xfrm>
-            <a:off x="192088" y="6392596"/>
-            <a:ext cx="1763922" cy="370422"/>
-          </a:xfrm>
-        </p:spPr>
-        <p:txBody>
-          <a:bodyPr/>
-          <a:lstStyle/>
-          <a:p>
-            <a:r>
-              <a:rPr lang="en-US" dirty="0"/>
-              <a:t>Generated with Sigrid</a:t>
-            </a:r>
-          </a:p>
-          <a:p>
-            <a:r>
-              <a:rPr lang="en-US" dirty="0"/>
-              <a:t>for CUSTOMER_NAME</a:t>
-            </a:r>
-          </a:p>
-        </p:txBody>
-      </p:sp>
-      <p:sp>
-        <p:nvSpPr>
           <p:cNvPr id="1071" name="TextBox 1071"/>
           <p:cNvSpPr txBox="1"/>
           <p:nvPr/>
@@ -32878,8 +31138,8 @@
         </p:nvSpPr>
         <p:spPr>
           <a:xfrm>
-            <a:off x="381600" y="129568"/>
-            <a:ext cx="1157222" cy="228209"/>
+            <a:off x="381600" y="129599"/>
+            <a:ext cx="1156940" cy="228145"/>
           </a:xfrm>
         </p:spPr>
         <p:txBody>
@@ -32892,25 +31152,6 @@
               <a:rPr lang="en-US" dirty="0"/>
               <a:t>Architecture</a:t>
             </a:r>
-          </a:p>
-        </p:txBody>
-      </p:sp>
-      <p:sp>
-        <p:nvSpPr>
-          <p:cNvPr id="3" name="Content Placeholder 2"/>
-          <p:cNvSpPr>
-            <a:spLocks noGrp="1"/>
-          </p:cNvSpPr>
-          <p:nvPr>
-            <p:ph sz="quarter" idx="13"/>
-          </p:nvPr>
-        </p:nvSpPr>
-        <p:spPr/>
-        <p:txBody>
-          <a:bodyPr/>
-          <a:lstStyle/>
-          <a:p>
-            <a:endParaRPr/>
           </a:p>
         </p:txBody>
       </p:sp>
@@ -32940,63 +31181,29 @@
       </p:sp>
       <p:sp>
         <p:nvSpPr>
-          <p:cNvPr id="7" name="Rectangle 6">
-            <a:extLst>
-              <a:ext uri="{FF2B5EF4-FFF2-40B4-BE49-F238E27FC236}">
-                <a16:creationId xmlns:a16="http://schemas.microsoft.com/office/drawing/2014/main" id="{4D956AE0-666A-B966-0B15-61A5E6C88F75}"/>
-              </a:ext>
-            </a:extLst>
-          </p:cNvPr>
-          <p:cNvSpPr/>
-          <p:nvPr/>
+          <p:cNvPr id="2004" name="Footer Placeholder 2004"/>
+          <p:cNvSpPr>
+            <a:spLocks noGrp="1"/>
+          </p:cNvSpPr>
+          <p:nvPr>
+            <p:ph type="ftr" sz="quarter" idx="3"/>
+          </p:nvPr>
         </p:nvSpPr>
-        <p:spPr>
-          <a:xfrm>
-            <a:off x="0" y="1390132"/>
-            <a:ext cx="12192000" cy="4927867"/>
-          </a:xfrm>
-          <a:prstGeom prst="rect">
-            <a:avLst/>
-          </a:prstGeom>
-          <a:solidFill>
-            <a:schemeClr val="bg1"/>
-          </a:solidFill>
-          <a:ln>
-            <a:noFill/>
-          </a:ln>
-          <a:effectLst>
-            <a:outerShdw blurRad="190500" dist="38100" dir="2700000" algn="tl" rotWithShape="0">
-              <a:prstClr val="black">
-                <a:alpha val="15000"/>
-              </a:prstClr>
-            </a:outerShdw>
-          </a:effectLst>
-        </p:spPr>
-        <p:style>
-          <a:lnRef idx="2">
-            <a:schemeClr val="accent1">
-              <a:shade val="50000"/>
-            </a:schemeClr>
-          </a:lnRef>
-          <a:fillRef idx="1">
-            <a:schemeClr val="accent1"/>
-          </a:fillRef>
-          <a:effectRef idx="0">
-            <a:schemeClr val="accent1"/>
-          </a:effectRef>
-          <a:fontRef idx="minor">
-            <a:schemeClr val="lt1"/>
-          </a:fontRef>
-        </p:style>
+        <p:spPr/>
         <p:txBody>
-          <a:bodyPr lIns="731520" tIns="72000" rIns="108000" bIns="72000" rtlCol="0" anchor="ctr"/>
+          <a:bodyPr/>
           <a:lstStyle/>
           <a:p>
-            <a:endParaRPr lang="nl-NL" sz="1200" b="1" noProof="0" dirty="0">
-              <a:solidFill>
-                <a:schemeClr val="accent1"/>
-              </a:solidFill>
-            </a:endParaRPr>
+            <a:r>
+              <a:rPr lang="en-US" dirty="0"/>
+              <a:t>Generated with Sigrid</a:t>
+            </a:r>
+          </a:p>
+          <a:p>
+            <a:r>
+              <a:rPr lang="en-US" dirty="0"/>
+              <a:t>for CUSTOMER_NAME</a:t>
+            </a:r>
           </a:p>
         </p:txBody>
       </p:sp>
@@ -33401,39 +31608,6 @@
       </p:sp>
       <p:sp>
         <p:nvSpPr>
-          <p:cNvPr id="2004" name="Footer Placeholder 2004"/>
-          <p:cNvSpPr>
-            <a:spLocks noGrp="1"/>
-          </p:cNvSpPr>
-          <p:nvPr>
-            <p:ph type="ftr" sz="quarter" idx="3"/>
-          </p:nvPr>
-        </p:nvSpPr>
-        <p:spPr>
-          <a:xfrm>
-            <a:off x="192088" y="6392596"/>
-            <a:ext cx="1763922" cy="370422"/>
-          </a:xfrm>
-        </p:spPr>
-        <p:txBody>
-          <a:bodyPr/>
-          <a:lstStyle/>
-          <a:p>
-            <a:r>
-              <a:rPr lang="en-US" dirty="0"/>
-              <a:t>Generated with Sigrid</a:t>
-            </a:r>
-          </a:p>
-          <a:p>
-            <a:r>
-              <a:rPr lang="en-US" dirty="0"/>
-              <a:t>for CUSTOMER_NAME</a:t>
-            </a:r>
-          </a:p>
-        </p:txBody>
-      </p:sp>
-      <p:sp>
-        <p:nvSpPr>
           <p:cNvPr id="2071" name="TextBox 2071"/>
           <p:cNvSpPr txBox="1"/>
           <p:nvPr/>
@@ -33585,8 +31759,8 @@
         </p:nvSpPr>
         <p:spPr>
           <a:xfrm>
-            <a:off x="381600" y="129568"/>
-            <a:ext cx="1410176" cy="228209"/>
+            <a:off x="381600" y="129600"/>
+            <a:ext cx="1410176" cy="228145"/>
           </a:xfrm>
         </p:spPr>
         <p:txBody>
@@ -33596,9 +31770,10 @@
           <a:lstStyle/>
           <a:p>
             <a:r>
-              <a:rPr lang="en-US" dirty="0"/>
+              <a:rPr lang="en-US"/>
               <a:t>Maintainability</a:t>
             </a:r>
+            <a:endParaRPr lang="en-US" dirty="0"/>
           </a:p>
         </p:txBody>
       </p:sp>
@@ -33622,6 +31797,34 @@
             <a:r>
               <a:rPr lang="en-US" dirty="0"/>
               <a:t>Overview of Duplication metric for portfolio CUSTOMER_NAME</a:t>
+            </a:r>
+          </a:p>
+        </p:txBody>
+      </p:sp>
+      <p:sp>
+        <p:nvSpPr>
+          <p:cNvPr id="1004" name="Footer Placeholder 1004"/>
+          <p:cNvSpPr>
+            <a:spLocks noGrp="1"/>
+          </p:cNvSpPr>
+          <p:nvPr>
+            <p:ph type="ftr" sz="quarter" idx="3"/>
+          </p:nvPr>
+        </p:nvSpPr>
+        <p:spPr/>
+        <p:txBody>
+          <a:bodyPr/>
+          <a:lstStyle/>
+          <a:p>
+            <a:r>
+              <a:rPr lang="en-US" dirty="0"/>
+              <a:t>Generated with Sigrid</a:t>
+            </a:r>
+          </a:p>
+          <a:p>
+            <a:r>
+              <a:rPr lang="en-US" dirty="0"/>
+              <a:t>for CUSTOMER_NAME</a:t>
             </a:r>
           </a:p>
         </p:txBody>
@@ -34212,39 +32415,6 @@
       </p:grpSp>
       <p:sp>
         <p:nvSpPr>
-          <p:cNvPr id="1004" name="Footer Placeholder 1004"/>
-          <p:cNvSpPr>
-            <a:spLocks noGrp="1"/>
-          </p:cNvSpPr>
-          <p:nvPr>
-            <p:ph type="ftr" sz="quarter" idx="3"/>
-          </p:nvPr>
-        </p:nvSpPr>
-        <p:spPr>
-          <a:xfrm>
-            <a:off x="192088" y="6392596"/>
-            <a:ext cx="1763922" cy="370422"/>
-          </a:xfrm>
-        </p:spPr>
-        <p:txBody>
-          <a:bodyPr/>
-          <a:lstStyle/>
-          <a:p>
-            <a:r>
-              <a:rPr lang="en-US" dirty="0"/>
-              <a:t>Generated with Sigrid</a:t>
-            </a:r>
-          </a:p>
-          <a:p>
-            <a:r>
-              <a:rPr lang="en-US" dirty="0"/>
-              <a:t>for CUSTOMER_NAME</a:t>
-            </a:r>
-          </a:p>
-        </p:txBody>
-      </p:sp>
-      <p:sp>
-        <p:nvSpPr>
           <p:cNvPr id="1071" name="TextBox 1071"/>
           <p:cNvSpPr txBox="1"/>
           <p:nvPr/>
@@ -34460,8 +32630,8 @@
         </p:nvSpPr>
         <p:spPr>
           <a:xfrm>
-            <a:off x="381600" y="129568"/>
-            <a:ext cx="1157222" cy="228209"/>
+            <a:off x="381600" y="129599"/>
+            <a:ext cx="1156940" cy="228145"/>
           </a:xfrm>
         </p:spPr>
         <p:txBody>
@@ -34474,25 +32644,6 @@
               <a:rPr lang="en-US" dirty="0"/>
               <a:t>Architecture</a:t>
             </a:r>
-          </a:p>
-        </p:txBody>
-      </p:sp>
-      <p:sp>
-        <p:nvSpPr>
-          <p:cNvPr id="3" name="Content Placeholder 2"/>
-          <p:cNvSpPr>
-            <a:spLocks noGrp="1"/>
-          </p:cNvSpPr>
-          <p:nvPr>
-            <p:ph sz="quarter" idx="13"/>
-          </p:nvPr>
-        </p:nvSpPr>
-        <p:spPr/>
-        <p:txBody>
-          <a:bodyPr/>
-          <a:lstStyle/>
-          <a:p>
-            <a:endParaRPr/>
           </a:p>
         </p:txBody>
       </p:sp>
@@ -34522,63 +32673,29 @@
       </p:sp>
       <p:sp>
         <p:nvSpPr>
-          <p:cNvPr id="7" name="Rectangle 6">
-            <a:extLst>
-              <a:ext uri="{FF2B5EF4-FFF2-40B4-BE49-F238E27FC236}">
-                <a16:creationId xmlns:a16="http://schemas.microsoft.com/office/drawing/2014/main" id="{4D956AE0-666A-B966-0B15-61A5E6C88F75}"/>
-              </a:ext>
-            </a:extLst>
-          </p:cNvPr>
-          <p:cNvSpPr/>
-          <p:nvPr/>
+          <p:cNvPr id="1004" name="Footer Placeholder 1004"/>
+          <p:cNvSpPr>
+            <a:spLocks noGrp="1"/>
+          </p:cNvSpPr>
+          <p:nvPr>
+            <p:ph type="ftr" sz="quarter" idx="3"/>
+          </p:nvPr>
         </p:nvSpPr>
-        <p:spPr>
-          <a:xfrm>
-            <a:off x="0" y="1390132"/>
-            <a:ext cx="12192000" cy="4927867"/>
-          </a:xfrm>
-          <a:prstGeom prst="rect">
-            <a:avLst/>
-          </a:prstGeom>
-          <a:solidFill>
-            <a:schemeClr val="bg1"/>
-          </a:solidFill>
-          <a:ln>
-            <a:noFill/>
-          </a:ln>
-          <a:effectLst>
-            <a:outerShdw blurRad="190500" dist="38100" dir="2700000" algn="tl" rotWithShape="0">
-              <a:prstClr val="black">
-                <a:alpha val="15000"/>
-              </a:prstClr>
-            </a:outerShdw>
-          </a:effectLst>
-        </p:spPr>
-        <p:style>
-          <a:lnRef idx="2">
-            <a:schemeClr val="accent1">
-              <a:shade val="50000"/>
-            </a:schemeClr>
-          </a:lnRef>
-          <a:fillRef idx="1">
-            <a:schemeClr val="accent1"/>
-          </a:fillRef>
-          <a:effectRef idx="0">
-            <a:schemeClr val="accent1"/>
-          </a:effectRef>
-          <a:fontRef idx="minor">
-            <a:schemeClr val="lt1"/>
-          </a:fontRef>
-        </p:style>
+        <p:spPr/>
         <p:txBody>
-          <a:bodyPr lIns="731520" tIns="72000" rIns="108000" bIns="72000" rtlCol="0" anchor="ctr"/>
+          <a:bodyPr/>
           <a:lstStyle/>
           <a:p>
-            <a:endParaRPr lang="nl-NL" sz="1200" b="1" noProof="0" dirty="0">
-              <a:solidFill>
-                <a:schemeClr val="accent1"/>
-              </a:solidFill>
-            </a:endParaRPr>
+            <a:r>
+              <a:rPr lang="en-US" dirty="0"/>
+              <a:t>Generated with Sigrid</a:t>
+            </a:r>
+          </a:p>
+          <a:p>
+            <a:r>
+              <a:rPr lang="en-US" dirty="0"/>
+              <a:t>for CUSTOMER_NAME</a:t>
+            </a:r>
           </a:p>
         </p:txBody>
       </p:sp>
@@ -35168,39 +33285,6 @@
       </p:grpSp>
       <p:sp>
         <p:nvSpPr>
-          <p:cNvPr id="1004" name="Footer Placeholder 1004"/>
-          <p:cNvSpPr>
-            <a:spLocks noGrp="1"/>
-          </p:cNvSpPr>
-          <p:nvPr>
-            <p:ph type="ftr" sz="quarter" idx="3"/>
-          </p:nvPr>
-        </p:nvSpPr>
-        <p:spPr>
-          <a:xfrm>
-            <a:off x="192088" y="6392596"/>
-            <a:ext cx="1763922" cy="370422"/>
-          </a:xfrm>
-        </p:spPr>
-        <p:txBody>
-          <a:bodyPr/>
-          <a:lstStyle/>
-          <a:p>
-            <a:r>
-              <a:rPr lang="en-US" dirty="0"/>
-              <a:t>Generated with Sigrid</a:t>
-            </a:r>
-          </a:p>
-          <a:p>
-            <a:r>
-              <a:rPr lang="en-US" dirty="0"/>
-              <a:t>for CUSTOMER_NAME</a:t>
-            </a:r>
-          </a:p>
-        </p:txBody>
-      </p:sp>
-      <p:sp>
-        <p:nvSpPr>
           <p:cNvPr id="1071" name="TextBox 1071"/>
           <p:cNvSpPr txBox="1"/>
           <p:nvPr/>
@@ -35416,8 +33500,8 @@
         </p:nvSpPr>
         <p:spPr>
           <a:xfrm>
-            <a:off x="381600" y="129568"/>
-            <a:ext cx="1157222" cy="228209"/>
+            <a:off x="381600" y="129599"/>
+            <a:ext cx="1156940" cy="228145"/>
           </a:xfrm>
         </p:spPr>
         <p:txBody>
@@ -35430,25 +33514,6 @@
               <a:rPr lang="en-US" dirty="0"/>
               <a:t>Architecture</a:t>
             </a:r>
-          </a:p>
-        </p:txBody>
-      </p:sp>
-      <p:sp>
-        <p:nvSpPr>
-          <p:cNvPr id="3" name="Content Placeholder 2"/>
-          <p:cNvSpPr>
-            <a:spLocks noGrp="1"/>
-          </p:cNvSpPr>
-          <p:nvPr>
-            <p:ph sz="quarter" idx="13"/>
-          </p:nvPr>
-        </p:nvSpPr>
-        <p:spPr/>
-        <p:txBody>
-          <a:bodyPr/>
-          <a:lstStyle/>
-          <a:p>
-            <a:endParaRPr/>
           </a:p>
         </p:txBody>
       </p:sp>
@@ -35478,63 +33543,29 @@
       </p:sp>
       <p:sp>
         <p:nvSpPr>
-          <p:cNvPr id="7" name="Rectangle 6">
-            <a:extLst>
-              <a:ext uri="{FF2B5EF4-FFF2-40B4-BE49-F238E27FC236}">
-                <a16:creationId xmlns:a16="http://schemas.microsoft.com/office/drawing/2014/main" id="{4D956AE0-666A-B966-0B15-61A5E6C88F75}"/>
-              </a:ext>
-            </a:extLst>
-          </p:cNvPr>
-          <p:cNvSpPr/>
-          <p:nvPr/>
+          <p:cNvPr id="2004" name="Footer Placeholder 2004"/>
+          <p:cNvSpPr>
+            <a:spLocks noGrp="1"/>
+          </p:cNvSpPr>
+          <p:nvPr>
+            <p:ph type="ftr" sz="quarter" idx="3"/>
+          </p:nvPr>
         </p:nvSpPr>
-        <p:spPr>
-          <a:xfrm>
-            <a:off x="0" y="1390132"/>
-            <a:ext cx="12192000" cy="4927867"/>
-          </a:xfrm>
-          <a:prstGeom prst="rect">
-            <a:avLst/>
-          </a:prstGeom>
-          <a:solidFill>
-            <a:schemeClr val="bg1"/>
-          </a:solidFill>
-          <a:ln>
-            <a:noFill/>
-          </a:ln>
-          <a:effectLst>
-            <a:outerShdw blurRad="190500" dist="38100" dir="2700000" algn="tl" rotWithShape="0">
-              <a:prstClr val="black">
-                <a:alpha val="15000"/>
-              </a:prstClr>
-            </a:outerShdw>
-          </a:effectLst>
-        </p:spPr>
-        <p:style>
-          <a:lnRef idx="2">
-            <a:schemeClr val="accent1">
-              <a:shade val="50000"/>
-            </a:schemeClr>
-          </a:lnRef>
-          <a:fillRef idx="1">
-            <a:schemeClr val="accent1"/>
-          </a:fillRef>
-          <a:effectRef idx="0">
-            <a:schemeClr val="accent1"/>
-          </a:effectRef>
-          <a:fontRef idx="minor">
-            <a:schemeClr val="lt1"/>
-          </a:fontRef>
-        </p:style>
+        <p:spPr/>
         <p:txBody>
-          <a:bodyPr lIns="731520" tIns="72000" rIns="108000" bIns="72000" rtlCol="0" anchor="ctr"/>
+          <a:bodyPr/>
           <a:lstStyle/>
           <a:p>
-            <a:endParaRPr lang="nl-NL" sz="1200" b="1" noProof="0" dirty="0">
-              <a:solidFill>
-                <a:schemeClr val="accent1"/>
-              </a:solidFill>
-            </a:endParaRPr>
+            <a:r>
+              <a:rPr lang="en-US" dirty="0"/>
+              <a:t>Generated with Sigrid</a:t>
+            </a:r>
+          </a:p>
+          <a:p>
+            <a:r>
+              <a:rPr lang="en-US" dirty="0"/>
+              <a:t>for CUSTOMER_NAME</a:t>
+            </a:r>
           </a:p>
         </p:txBody>
       </p:sp>
@@ -35939,39 +33970,6 @@
       </p:sp>
       <p:sp>
         <p:nvSpPr>
-          <p:cNvPr id="2004" name="Footer Placeholder 2004"/>
-          <p:cNvSpPr>
-            <a:spLocks noGrp="1"/>
-          </p:cNvSpPr>
-          <p:nvPr>
-            <p:ph type="ftr" sz="quarter" idx="3"/>
-          </p:nvPr>
-        </p:nvSpPr>
-        <p:spPr>
-          <a:xfrm>
-            <a:off x="192088" y="6392596"/>
-            <a:ext cx="1763922" cy="370422"/>
-          </a:xfrm>
-        </p:spPr>
-        <p:txBody>
-          <a:bodyPr/>
-          <a:lstStyle/>
-          <a:p>
-            <a:r>
-              <a:rPr lang="en-US" dirty="0"/>
-              <a:t>Generated with Sigrid</a:t>
-            </a:r>
-          </a:p>
-          <a:p>
-            <a:r>
-              <a:rPr lang="en-US" dirty="0"/>
-              <a:t>for CUSTOMER_NAME</a:t>
-            </a:r>
-          </a:p>
-        </p:txBody>
-      </p:sp>
-      <p:sp>
-        <p:nvSpPr>
           <p:cNvPr id="2071" name="TextBox 2071"/>
           <p:cNvSpPr txBox="1"/>
           <p:nvPr/>
@@ -36123,8 +34121,8 @@
         </p:nvSpPr>
         <p:spPr>
           <a:xfrm>
-            <a:off x="381600" y="129568"/>
-            <a:ext cx="1157222" cy="228209"/>
+            <a:off x="381600" y="129599"/>
+            <a:ext cx="1156940" cy="228145"/>
           </a:xfrm>
         </p:spPr>
         <p:txBody>
@@ -36137,25 +34135,6 @@
               <a:rPr lang="en-US" dirty="0"/>
               <a:t>Architecture</a:t>
             </a:r>
-          </a:p>
-        </p:txBody>
-      </p:sp>
-      <p:sp>
-        <p:nvSpPr>
-          <p:cNvPr id="3" name="Content Placeholder 2"/>
-          <p:cNvSpPr>
-            <a:spLocks noGrp="1"/>
-          </p:cNvSpPr>
-          <p:nvPr>
-            <p:ph sz="quarter" idx="13"/>
-          </p:nvPr>
-        </p:nvSpPr>
-        <p:spPr/>
-        <p:txBody>
-          <a:bodyPr/>
-          <a:lstStyle/>
-          <a:p>
-            <a:endParaRPr/>
           </a:p>
         </p:txBody>
       </p:sp>
@@ -36185,63 +34164,29 @@
       </p:sp>
       <p:sp>
         <p:nvSpPr>
-          <p:cNvPr id="7" name="Rectangle 6">
-            <a:extLst>
-              <a:ext uri="{FF2B5EF4-FFF2-40B4-BE49-F238E27FC236}">
-                <a16:creationId xmlns:a16="http://schemas.microsoft.com/office/drawing/2014/main" id="{4D956AE0-666A-B966-0B15-61A5E6C88F75}"/>
-              </a:ext>
-            </a:extLst>
-          </p:cNvPr>
-          <p:cNvSpPr/>
-          <p:nvPr/>
+          <p:cNvPr id="1004" name="Footer Placeholder 1004"/>
+          <p:cNvSpPr>
+            <a:spLocks noGrp="1"/>
+          </p:cNvSpPr>
+          <p:nvPr>
+            <p:ph type="ftr" sz="quarter" idx="3"/>
+          </p:nvPr>
         </p:nvSpPr>
-        <p:spPr>
-          <a:xfrm>
-            <a:off x="0" y="1390132"/>
-            <a:ext cx="12192000" cy="4927867"/>
-          </a:xfrm>
-          <a:prstGeom prst="rect">
-            <a:avLst/>
-          </a:prstGeom>
-          <a:solidFill>
-            <a:schemeClr val="bg1"/>
-          </a:solidFill>
-          <a:ln>
-            <a:noFill/>
-          </a:ln>
-          <a:effectLst>
-            <a:outerShdw blurRad="190500" dist="38100" dir="2700000" algn="tl" rotWithShape="0">
-              <a:prstClr val="black">
-                <a:alpha val="15000"/>
-              </a:prstClr>
-            </a:outerShdw>
-          </a:effectLst>
-        </p:spPr>
-        <p:style>
-          <a:lnRef idx="2">
-            <a:schemeClr val="accent1">
-              <a:shade val="50000"/>
-            </a:schemeClr>
-          </a:lnRef>
-          <a:fillRef idx="1">
-            <a:schemeClr val="accent1"/>
-          </a:fillRef>
-          <a:effectRef idx="0">
-            <a:schemeClr val="accent1"/>
-          </a:effectRef>
-          <a:fontRef idx="minor">
-            <a:schemeClr val="lt1"/>
-          </a:fontRef>
-        </p:style>
+        <p:spPr/>
         <p:txBody>
-          <a:bodyPr lIns="731520" tIns="72000" rIns="108000" bIns="72000" rtlCol="0" anchor="ctr"/>
+          <a:bodyPr/>
           <a:lstStyle/>
           <a:p>
-            <a:endParaRPr lang="nl-NL" sz="1200" b="1" noProof="0" dirty="0">
-              <a:solidFill>
-                <a:schemeClr val="accent1"/>
-              </a:solidFill>
-            </a:endParaRPr>
+            <a:r>
+              <a:rPr lang="en-US" dirty="0"/>
+              <a:t>Generated with Sigrid</a:t>
+            </a:r>
+          </a:p>
+          <a:p>
+            <a:r>
+              <a:rPr lang="en-US" dirty="0"/>
+              <a:t>for CUSTOMER_NAME</a:t>
+            </a:r>
           </a:p>
         </p:txBody>
       </p:sp>
@@ -36831,39 +34776,6 @@
       </p:grpSp>
       <p:sp>
         <p:nvSpPr>
-          <p:cNvPr id="1004" name="Footer Placeholder 1004"/>
-          <p:cNvSpPr>
-            <a:spLocks noGrp="1"/>
-          </p:cNvSpPr>
-          <p:nvPr>
-            <p:ph type="ftr" sz="quarter" idx="3"/>
-          </p:nvPr>
-        </p:nvSpPr>
-        <p:spPr>
-          <a:xfrm>
-            <a:off x="192088" y="6392596"/>
-            <a:ext cx="1763922" cy="370422"/>
-          </a:xfrm>
-        </p:spPr>
-        <p:txBody>
-          <a:bodyPr/>
-          <a:lstStyle/>
-          <a:p>
-            <a:r>
-              <a:rPr lang="en-US" dirty="0"/>
-              <a:t>Generated with Sigrid</a:t>
-            </a:r>
-          </a:p>
-          <a:p>
-            <a:r>
-              <a:rPr lang="en-US" dirty="0"/>
-              <a:t>for CUSTOMER_NAME</a:t>
-            </a:r>
-          </a:p>
-        </p:txBody>
-      </p:sp>
-      <p:sp>
-        <p:nvSpPr>
           <p:cNvPr id="1071" name="TextBox 1071"/>
           <p:cNvSpPr txBox="1"/>
           <p:nvPr/>
@@ -37079,8 +34991,8 @@
         </p:nvSpPr>
         <p:spPr>
           <a:xfrm>
-            <a:off x="381600" y="129568"/>
-            <a:ext cx="1157222" cy="228209"/>
+            <a:off x="381600" y="129599"/>
+            <a:ext cx="1156940" cy="228145"/>
           </a:xfrm>
         </p:spPr>
         <p:txBody>
@@ -37093,25 +35005,6 @@
               <a:rPr lang="en-US" dirty="0"/>
               <a:t>Architecture</a:t>
             </a:r>
-          </a:p>
-        </p:txBody>
-      </p:sp>
-      <p:sp>
-        <p:nvSpPr>
-          <p:cNvPr id="3" name="Content Placeholder 2"/>
-          <p:cNvSpPr>
-            <a:spLocks noGrp="1"/>
-          </p:cNvSpPr>
-          <p:nvPr>
-            <p:ph sz="quarter" idx="13"/>
-          </p:nvPr>
-        </p:nvSpPr>
-        <p:spPr/>
-        <p:txBody>
-          <a:bodyPr/>
-          <a:lstStyle/>
-          <a:p>
-            <a:endParaRPr/>
           </a:p>
         </p:txBody>
       </p:sp>
@@ -37141,63 +35034,29 @@
       </p:sp>
       <p:sp>
         <p:nvSpPr>
-          <p:cNvPr id="7" name="Rectangle 6">
-            <a:extLst>
-              <a:ext uri="{FF2B5EF4-FFF2-40B4-BE49-F238E27FC236}">
-                <a16:creationId xmlns:a16="http://schemas.microsoft.com/office/drawing/2014/main" id="{4D956AE0-666A-B966-0B15-61A5E6C88F75}"/>
-              </a:ext>
-            </a:extLst>
-          </p:cNvPr>
-          <p:cNvSpPr/>
-          <p:nvPr/>
+          <p:cNvPr id="2004" name="Footer Placeholder 2004"/>
+          <p:cNvSpPr>
+            <a:spLocks noGrp="1"/>
+          </p:cNvSpPr>
+          <p:nvPr>
+            <p:ph type="ftr" sz="quarter" idx="3"/>
+          </p:nvPr>
         </p:nvSpPr>
-        <p:spPr>
-          <a:xfrm>
-            <a:off x="0" y="1390132"/>
-            <a:ext cx="12192000" cy="4927867"/>
-          </a:xfrm>
-          <a:prstGeom prst="rect">
-            <a:avLst/>
-          </a:prstGeom>
-          <a:solidFill>
-            <a:schemeClr val="bg1"/>
-          </a:solidFill>
-          <a:ln>
-            <a:noFill/>
-          </a:ln>
-          <a:effectLst>
-            <a:outerShdw blurRad="190500" dist="38100" dir="2700000" algn="tl" rotWithShape="0">
-              <a:prstClr val="black">
-                <a:alpha val="15000"/>
-              </a:prstClr>
-            </a:outerShdw>
-          </a:effectLst>
-        </p:spPr>
-        <p:style>
-          <a:lnRef idx="2">
-            <a:schemeClr val="accent1">
-              <a:shade val="50000"/>
-            </a:schemeClr>
-          </a:lnRef>
-          <a:fillRef idx="1">
-            <a:schemeClr val="accent1"/>
-          </a:fillRef>
-          <a:effectRef idx="0">
-            <a:schemeClr val="accent1"/>
-          </a:effectRef>
-          <a:fontRef idx="minor">
-            <a:schemeClr val="lt1"/>
-          </a:fontRef>
-        </p:style>
+        <p:spPr/>
         <p:txBody>
-          <a:bodyPr lIns="731520" tIns="72000" rIns="108000" bIns="72000" rtlCol="0" anchor="ctr"/>
+          <a:bodyPr/>
           <a:lstStyle/>
           <a:p>
-            <a:endParaRPr lang="nl-NL" sz="1200" b="1" noProof="0" dirty="0">
-              <a:solidFill>
-                <a:schemeClr val="accent1"/>
-              </a:solidFill>
-            </a:endParaRPr>
+            <a:r>
+              <a:rPr lang="en-US" dirty="0"/>
+              <a:t>Generated with Sigrid</a:t>
+            </a:r>
+          </a:p>
+          <a:p>
+            <a:r>
+              <a:rPr lang="en-US" dirty="0"/>
+              <a:t>for CUSTOMER_NAME</a:t>
+            </a:r>
           </a:p>
         </p:txBody>
       </p:sp>
@@ -37602,39 +35461,6 @@
       </p:sp>
       <p:sp>
         <p:nvSpPr>
-          <p:cNvPr id="2004" name="Footer Placeholder 2004"/>
-          <p:cNvSpPr>
-            <a:spLocks noGrp="1"/>
-          </p:cNvSpPr>
-          <p:nvPr>
-            <p:ph type="ftr" sz="quarter" idx="3"/>
-          </p:nvPr>
-        </p:nvSpPr>
-        <p:spPr>
-          <a:xfrm>
-            <a:off x="192088" y="6392596"/>
-            <a:ext cx="1763922" cy="370422"/>
-          </a:xfrm>
-        </p:spPr>
-        <p:txBody>
-          <a:bodyPr/>
-          <a:lstStyle/>
-          <a:p>
-            <a:r>
-              <a:rPr lang="en-US" dirty="0"/>
-              <a:t>Generated with Sigrid</a:t>
-            </a:r>
-          </a:p>
-          <a:p>
-            <a:r>
-              <a:rPr lang="en-US" dirty="0"/>
-              <a:t>for CUSTOMER_NAME</a:t>
-            </a:r>
-          </a:p>
-        </p:txBody>
-      </p:sp>
-      <p:sp>
-        <p:nvSpPr>
           <p:cNvPr id="2071" name="TextBox 2071"/>
           <p:cNvSpPr txBox="1"/>
           <p:nvPr/>
@@ -37786,8 +35612,8 @@
         </p:nvSpPr>
         <p:spPr>
           <a:xfrm>
-            <a:off x="381600" y="129568"/>
-            <a:ext cx="1157222" cy="228209"/>
+            <a:off x="381600" y="129599"/>
+            <a:ext cx="1156940" cy="228145"/>
           </a:xfrm>
         </p:spPr>
         <p:txBody>
@@ -37800,25 +35626,6 @@
               <a:rPr lang="en-US" dirty="0"/>
               <a:t>Architecture</a:t>
             </a:r>
-          </a:p>
-        </p:txBody>
-      </p:sp>
-      <p:sp>
-        <p:nvSpPr>
-          <p:cNvPr id="3" name="Content Placeholder 2"/>
-          <p:cNvSpPr>
-            <a:spLocks noGrp="1"/>
-          </p:cNvSpPr>
-          <p:nvPr>
-            <p:ph sz="quarter" idx="13"/>
-          </p:nvPr>
-        </p:nvSpPr>
-        <p:spPr/>
-        <p:txBody>
-          <a:bodyPr/>
-          <a:lstStyle/>
-          <a:p>
-            <a:endParaRPr/>
           </a:p>
         </p:txBody>
       </p:sp>
@@ -37848,63 +35655,29 @@
       </p:sp>
       <p:sp>
         <p:nvSpPr>
-          <p:cNvPr id="7" name="Rectangle 6">
-            <a:extLst>
-              <a:ext uri="{FF2B5EF4-FFF2-40B4-BE49-F238E27FC236}">
-                <a16:creationId xmlns:a16="http://schemas.microsoft.com/office/drawing/2014/main" id="{4D956AE0-666A-B966-0B15-61A5E6C88F75}"/>
-              </a:ext>
-            </a:extLst>
-          </p:cNvPr>
-          <p:cNvSpPr/>
-          <p:nvPr/>
+          <p:cNvPr id="1004" name="Footer Placeholder 1004"/>
+          <p:cNvSpPr>
+            <a:spLocks noGrp="1"/>
+          </p:cNvSpPr>
+          <p:nvPr>
+            <p:ph type="ftr" sz="quarter" idx="3"/>
+          </p:nvPr>
         </p:nvSpPr>
-        <p:spPr>
-          <a:xfrm>
-            <a:off x="0" y="1390132"/>
-            <a:ext cx="12192000" cy="4927867"/>
-          </a:xfrm>
-          <a:prstGeom prst="rect">
-            <a:avLst/>
-          </a:prstGeom>
-          <a:solidFill>
-            <a:schemeClr val="bg1"/>
-          </a:solidFill>
-          <a:ln>
-            <a:noFill/>
-          </a:ln>
-          <a:effectLst>
-            <a:outerShdw blurRad="190500" dist="38100" dir="2700000" algn="tl" rotWithShape="0">
-              <a:prstClr val="black">
-                <a:alpha val="15000"/>
-              </a:prstClr>
-            </a:outerShdw>
-          </a:effectLst>
-        </p:spPr>
-        <p:style>
-          <a:lnRef idx="2">
-            <a:schemeClr val="accent1">
-              <a:shade val="50000"/>
-            </a:schemeClr>
-          </a:lnRef>
-          <a:fillRef idx="1">
-            <a:schemeClr val="accent1"/>
-          </a:fillRef>
-          <a:effectRef idx="0">
-            <a:schemeClr val="accent1"/>
-          </a:effectRef>
-          <a:fontRef idx="minor">
-            <a:schemeClr val="lt1"/>
-          </a:fontRef>
-        </p:style>
+        <p:spPr/>
         <p:txBody>
-          <a:bodyPr lIns="731520" tIns="72000" rIns="108000" bIns="72000" rtlCol="0" anchor="ctr"/>
+          <a:bodyPr/>
           <a:lstStyle/>
           <a:p>
-            <a:endParaRPr lang="nl-NL" sz="1200" b="1" noProof="0" dirty="0">
-              <a:solidFill>
-                <a:schemeClr val="accent1"/>
-              </a:solidFill>
-            </a:endParaRPr>
+            <a:r>
+              <a:rPr lang="en-US" dirty="0"/>
+              <a:t>Generated with Sigrid</a:t>
+            </a:r>
+          </a:p>
+          <a:p>
+            <a:r>
+              <a:rPr lang="en-US" dirty="0"/>
+              <a:t>for CUSTOMER_NAME</a:t>
+            </a:r>
           </a:p>
         </p:txBody>
       </p:sp>
@@ -38494,39 +36267,6 @@
       </p:grpSp>
       <p:sp>
         <p:nvSpPr>
-          <p:cNvPr id="1004" name="Footer Placeholder 1004"/>
-          <p:cNvSpPr>
-            <a:spLocks noGrp="1"/>
-          </p:cNvSpPr>
-          <p:nvPr>
-            <p:ph type="ftr" sz="quarter" idx="3"/>
-          </p:nvPr>
-        </p:nvSpPr>
-        <p:spPr>
-          <a:xfrm>
-            <a:off x="192088" y="6392596"/>
-            <a:ext cx="1763922" cy="370422"/>
-          </a:xfrm>
-        </p:spPr>
-        <p:txBody>
-          <a:bodyPr/>
-          <a:lstStyle/>
-          <a:p>
-            <a:r>
-              <a:rPr lang="en-US" dirty="0"/>
-              <a:t>Generated with Sigrid</a:t>
-            </a:r>
-          </a:p>
-          <a:p>
-            <a:r>
-              <a:rPr lang="en-US" dirty="0"/>
-              <a:t>for CUSTOMER_NAME</a:t>
-            </a:r>
-          </a:p>
-        </p:txBody>
-      </p:sp>
-      <p:sp>
-        <p:nvSpPr>
           <p:cNvPr id="1071" name="TextBox 1071"/>
           <p:cNvSpPr txBox="1"/>
           <p:nvPr/>
@@ -38742,8 +36482,8 @@
         </p:nvSpPr>
         <p:spPr>
           <a:xfrm>
-            <a:off x="381600" y="129568"/>
-            <a:ext cx="1157222" cy="228209"/>
+            <a:off x="381600" y="129599"/>
+            <a:ext cx="1156940" cy="228145"/>
           </a:xfrm>
         </p:spPr>
         <p:txBody>
@@ -38756,25 +36496,6 @@
               <a:rPr lang="en-US" dirty="0"/>
               <a:t>Architecture</a:t>
             </a:r>
-          </a:p>
-        </p:txBody>
-      </p:sp>
-      <p:sp>
-        <p:nvSpPr>
-          <p:cNvPr id="3" name="Content Placeholder 2"/>
-          <p:cNvSpPr>
-            <a:spLocks noGrp="1"/>
-          </p:cNvSpPr>
-          <p:nvPr>
-            <p:ph sz="quarter" idx="13"/>
-          </p:nvPr>
-        </p:nvSpPr>
-        <p:spPr/>
-        <p:txBody>
-          <a:bodyPr/>
-          <a:lstStyle/>
-          <a:p>
-            <a:endParaRPr/>
           </a:p>
         </p:txBody>
       </p:sp>
@@ -38804,63 +36525,29 @@
       </p:sp>
       <p:sp>
         <p:nvSpPr>
-          <p:cNvPr id="7" name="Rectangle 6">
-            <a:extLst>
-              <a:ext uri="{FF2B5EF4-FFF2-40B4-BE49-F238E27FC236}">
-                <a16:creationId xmlns:a16="http://schemas.microsoft.com/office/drawing/2014/main" id="{4D956AE0-666A-B966-0B15-61A5E6C88F75}"/>
-              </a:ext>
-            </a:extLst>
-          </p:cNvPr>
-          <p:cNvSpPr/>
-          <p:nvPr/>
+          <p:cNvPr id="2004" name="Footer Placeholder 2004"/>
+          <p:cNvSpPr>
+            <a:spLocks noGrp="1"/>
+          </p:cNvSpPr>
+          <p:nvPr>
+            <p:ph type="ftr" sz="quarter" idx="3"/>
+          </p:nvPr>
         </p:nvSpPr>
-        <p:spPr>
-          <a:xfrm>
-            <a:off x="0" y="1390132"/>
-            <a:ext cx="12192000" cy="4927867"/>
-          </a:xfrm>
-          <a:prstGeom prst="rect">
-            <a:avLst/>
-          </a:prstGeom>
-          <a:solidFill>
-            <a:schemeClr val="bg1"/>
-          </a:solidFill>
-          <a:ln>
-            <a:noFill/>
-          </a:ln>
-          <a:effectLst>
-            <a:outerShdw blurRad="190500" dist="38100" dir="2700000" algn="tl" rotWithShape="0">
-              <a:prstClr val="black">
-                <a:alpha val="15000"/>
-              </a:prstClr>
-            </a:outerShdw>
-          </a:effectLst>
-        </p:spPr>
-        <p:style>
-          <a:lnRef idx="2">
-            <a:schemeClr val="accent1">
-              <a:shade val="50000"/>
-            </a:schemeClr>
-          </a:lnRef>
-          <a:fillRef idx="1">
-            <a:schemeClr val="accent1"/>
-          </a:fillRef>
-          <a:effectRef idx="0">
-            <a:schemeClr val="accent1"/>
-          </a:effectRef>
-          <a:fontRef idx="minor">
-            <a:schemeClr val="lt1"/>
-          </a:fontRef>
-        </p:style>
+        <p:spPr/>
         <p:txBody>
-          <a:bodyPr lIns="731520" tIns="72000" rIns="108000" bIns="72000" rtlCol="0" anchor="ctr"/>
+          <a:bodyPr/>
           <a:lstStyle/>
           <a:p>
-            <a:endParaRPr lang="nl-NL" sz="1200" b="1" noProof="0" dirty="0">
-              <a:solidFill>
-                <a:schemeClr val="accent1"/>
-              </a:solidFill>
-            </a:endParaRPr>
+            <a:r>
+              <a:rPr lang="en-US" dirty="0"/>
+              <a:t>Generated with Sigrid</a:t>
+            </a:r>
+          </a:p>
+          <a:p>
+            <a:r>
+              <a:rPr lang="en-US" dirty="0"/>
+              <a:t>for CUSTOMER_NAME</a:t>
+            </a:r>
           </a:p>
         </p:txBody>
       </p:sp>
@@ -39265,39 +36952,6 @@
       </p:sp>
       <p:sp>
         <p:nvSpPr>
-          <p:cNvPr id="2004" name="Footer Placeholder 2004"/>
-          <p:cNvSpPr>
-            <a:spLocks noGrp="1"/>
-          </p:cNvSpPr>
-          <p:nvPr>
-            <p:ph type="ftr" sz="quarter" idx="3"/>
-          </p:nvPr>
-        </p:nvSpPr>
-        <p:spPr>
-          <a:xfrm>
-            <a:off x="192088" y="6392596"/>
-            <a:ext cx="1763922" cy="370422"/>
-          </a:xfrm>
-        </p:spPr>
-        <p:txBody>
-          <a:bodyPr/>
-          <a:lstStyle/>
-          <a:p>
-            <a:r>
-              <a:rPr lang="en-US" dirty="0"/>
-              <a:t>Generated with Sigrid</a:t>
-            </a:r>
-          </a:p>
-          <a:p>
-            <a:r>
-              <a:rPr lang="en-US" dirty="0"/>
-              <a:t>for CUSTOMER_NAME</a:t>
-            </a:r>
-          </a:p>
-        </p:txBody>
-      </p:sp>
-      <p:sp>
-        <p:nvSpPr>
           <p:cNvPr id="2071" name="TextBox 2071"/>
           <p:cNvSpPr txBox="1"/>
           <p:nvPr/>
@@ -39449,8 +37103,8 @@
         </p:nvSpPr>
         <p:spPr>
           <a:xfrm>
-            <a:off x="381600" y="129568"/>
-            <a:ext cx="1157222" cy="228209"/>
+            <a:off x="381600" y="129599"/>
+            <a:ext cx="1156940" cy="228145"/>
           </a:xfrm>
         </p:spPr>
         <p:txBody>
@@ -39463,25 +37117,6 @@
               <a:rPr lang="en-US" dirty="0"/>
               <a:t>Architecture</a:t>
             </a:r>
-          </a:p>
-        </p:txBody>
-      </p:sp>
-      <p:sp>
-        <p:nvSpPr>
-          <p:cNvPr id="3" name="Content Placeholder 2"/>
-          <p:cNvSpPr>
-            <a:spLocks noGrp="1"/>
-          </p:cNvSpPr>
-          <p:nvPr>
-            <p:ph sz="quarter" idx="13"/>
-          </p:nvPr>
-        </p:nvSpPr>
-        <p:spPr/>
-        <p:txBody>
-          <a:bodyPr/>
-          <a:lstStyle/>
-          <a:p>
-            <a:endParaRPr/>
           </a:p>
         </p:txBody>
       </p:sp>
@@ -39511,63 +37146,29 @@
       </p:sp>
       <p:sp>
         <p:nvSpPr>
-          <p:cNvPr id="7" name="Rectangle 6">
-            <a:extLst>
-              <a:ext uri="{FF2B5EF4-FFF2-40B4-BE49-F238E27FC236}">
-                <a16:creationId xmlns:a16="http://schemas.microsoft.com/office/drawing/2014/main" id="{4D956AE0-666A-B966-0B15-61A5E6C88F75}"/>
-              </a:ext>
-            </a:extLst>
-          </p:cNvPr>
-          <p:cNvSpPr/>
-          <p:nvPr/>
+          <p:cNvPr id="1004" name="Footer Placeholder 1004"/>
+          <p:cNvSpPr>
+            <a:spLocks noGrp="1"/>
+          </p:cNvSpPr>
+          <p:nvPr>
+            <p:ph type="ftr" sz="quarter" idx="3"/>
+          </p:nvPr>
         </p:nvSpPr>
-        <p:spPr>
-          <a:xfrm>
-            <a:off x="0" y="1390132"/>
-            <a:ext cx="12192000" cy="4927867"/>
-          </a:xfrm>
-          <a:prstGeom prst="rect">
-            <a:avLst/>
-          </a:prstGeom>
-          <a:solidFill>
-            <a:schemeClr val="bg1"/>
-          </a:solidFill>
-          <a:ln>
-            <a:noFill/>
-          </a:ln>
-          <a:effectLst>
-            <a:outerShdw blurRad="190500" dist="38100" dir="2700000" algn="tl" rotWithShape="0">
-              <a:prstClr val="black">
-                <a:alpha val="15000"/>
-              </a:prstClr>
-            </a:outerShdw>
-          </a:effectLst>
-        </p:spPr>
-        <p:style>
-          <a:lnRef idx="2">
-            <a:schemeClr val="accent1">
-              <a:shade val="50000"/>
-            </a:schemeClr>
-          </a:lnRef>
-          <a:fillRef idx="1">
-            <a:schemeClr val="accent1"/>
-          </a:fillRef>
-          <a:effectRef idx="0">
-            <a:schemeClr val="accent1"/>
-          </a:effectRef>
-          <a:fontRef idx="minor">
-            <a:schemeClr val="lt1"/>
-          </a:fontRef>
-        </p:style>
+        <p:spPr/>
         <p:txBody>
-          <a:bodyPr lIns="731520" tIns="72000" rIns="108000" bIns="72000" rtlCol="0" anchor="ctr"/>
+          <a:bodyPr/>
           <a:lstStyle/>
           <a:p>
-            <a:endParaRPr lang="nl-NL" sz="1200" b="1" noProof="0" dirty="0">
-              <a:solidFill>
-                <a:schemeClr val="accent1"/>
-              </a:solidFill>
-            </a:endParaRPr>
+            <a:r>
+              <a:rPr lang="en-US" dirty="0"/>
+              <a:t>Generated with Sigrid</a:t>
+            </a:r>
+          </a:p>
+          <a:p>
+            <a:r>
+              <a:rPr lang="en-US" dirty="0"/>
+              <a:t>for CUSTOMER_NAME</a:t>
+            </a:r>
           </a:p>
         </p:txBody>
       </p:sp>
@@ -40157,39 +37758,6 @@
       </p:grpSp>
       <p:sp>
         <p:nvSpPr>
-          <p:cNvPr id="1004" name="Footer Placeholder 1004"/>
-          <p:cNvSpPr>
-            <a:spLocks noGrp="1"/>
-          </p:cNvSpPr>
-          <p:nvPr>
-            <p:ph type="ftr" sz="quarter" idx="3"/>
-          </p:nvPr>
-        </p:nvSpPr>
-        <p:spPr>
-          <a:xfrm>
-            <a:off x="192088" y="6392596"/>
-            <a:ext cx="1763922" cy="370422"/>
-          </a:xfrm>
-        </p:spPr>
-        <p:txBody>
-          <a:bodyPr/>
-          <a:lstStyle/>
-          <a:p>
-            <a:r>
-              <a:rPr lang="en-US" dirty="0"/>
-              <a:t>Generated with Sigrid</a:t>
-            </a:r>
-          </a:p>
-          <a:p>
-            <a:r>
-              <a:rPr lang="en-US" dirty="0"/>
-              <a:t>for CUSTOMER_NAME</a:t>
-            </a:r>
-          </a:p>
-        </p:txBody>
-      </p:sp>
-      <p:sp>
-        <p:nvSpPr>
           <p:cNvPr id="1071" name="TextBox 1071"/>
           <p:cNvSpPr txBox="1"/>
           <p:nvPr/>
@@ -40405,8 +37973,8 @@
         </p:nvSpPr>
         <p:spPr>
           <a:xfrm>
-            <a:off x="381600" y="129568"/>
-            <a:ext cx="1157222" cy="228209"/>
+            <a:off x="381600" y="129599"/>
+            <a:ext cx="1156940" cy="228145"/>
           </a:xfrm>
         </p:spPr>
         <p:txBody>
@@ -40419,25 +37987,6 @@
               <a:rPr lang="en-US" dirty="0"/>
               <a:t>Architecture</a:t>
             </a:r>
-          </a:p>
-        </p:txBody>
-      </p:sp>
-      <p:sp>
-        <p:nvSpPr>
-          <p:cNvPr id="3" name="Content Placeholder 2"/>
-          <p:cNvSpPr>
-            <a:spLocks noGrp="1"/>
-          </p:cNvSpPr>
-          <p:nvPr>
-            <p:ph sz="quarter" idx="13"/>
-          </p:nvPr>
-        </p:nvSpPr>
-        <p:spPr/>
-        <p:txBody>
-          <a:bodyPr/>
-          <a:lstStyle/>
-          <a:p>
-            <a:endParaRPr/>
           </a:p>
         </p:txBody>
       </p:sp>
@@ -40467,63 +38016,29 @@
       </p:sp>
       <p:sp>
         <p:nvSpPr>
-          <p:cNvPr id="7" name="Rectangle 6">
-            <a:extLst>
-              <a:ext uri="{FF2B5EF4-FFF2-40B4-BE49-F238E27FC236}">
-                <a16:creationId xmlns:a16="http://schemas.microsoft.com/office/drawing/2014/main" id="{4D956AE0-666A-B966-0B15-61A5E6C88F75}"/>
-              </a:ext>
-            </a:extLst>
-          </p:cNvPr>
-          <p:cNvSpPr/>
-          <p:nvPr/>
+          <p:cNvPr id="2004" name="Footer Placeholder 2004"/>
+          <p:cNvSpPr>
+            <a:spLocks noGrp="1"/>
+          </p:cNvSpPr>
+          <p:nvPr>
+            <p:ph type="ftr" sz="quarter" idx="3"/>
+          </p:nvPr>
         </p:nvSpPr>
-        <p:spPr>
-          <a:xfrm>
-            <a:off x="0" y="1390132"/>
-            <a:ext cx="12192000" cy="4927867"/>
-          </a:xfrm>
-          <a:prstGeom prst="rect">
-            <a:avLst/>
-          </a:prstGeom>
-          <a:solidFill>
-            <a:schemeClr val="bg1"/>
-          </a:solidFill>
-          <a:ln>
-            <a:noFill/>
-          </a:ln>
-          <a:effectLst>
-            <a:outerShdw blurRad="190500" dist="38100" dir="2700000" algn="tl" rotWithShape="0">
-              <a:prstClr val="black">
-                <a:alpha val="15000"/>
-              </a:prstClr>
-            </a:outerShdw>
-          </a:effectLst>
-        </p:spPr>
-        <p:style>
-          <a:lnRef idx="2">
-            <a:schemeClr val="accent1">
-              <a:shade val="50000"/>
-            </a:schemeClr>
-          </a:lnRef>
-          <a:fillRef idx="1">
-            <a:schemeClr val="accent1"/>
-          </a:fillRef>
-          <a:effectRef idx="0">
-            <a:schemeClr val="accent1"/>
-          </a:effectRef>
-          <a:fontRef idx="minor">
-            <a:schemeClr val="lt1"/>
-          </a:fontRef>
-        </p:style>
+        <p:spPr/>
         <p:txBody>
-          <a:bodyPr lIns="731520" tIns="72000" rIns="108000" bIns="72000" rtlCol="0" anchor="ctr"/>
+          <a:bodyPr/>
           <a:lstStyle/>
           <a:p>
-            <a:endParaRPr lang="nl-NL" sz="1200" b="1" noProof="0" dirty="0">
-              <a:solidFill>
-                <a:schemeClr val="accent1"/>
-              </a:solidFill>
-            </a:endParaRPr>
+            <a:r>
+              <a:rPr lang="en-US" dirty="0"/>
+              <a:t>Generated with Sigrid</a:t>
+            </a:r>
+          </a:p>
+          <a:p>
+            <a:r>
+              <a:rPr lang="en-US" dirty="0"/>
+              <a:t>for CUSTOMER_NAME</a:t>
+            </a:r>
           </a:p>
         </p:txBody>
       </p:sp>
@@ -40922,39 +38437,6 @@
             <a:r>
               <a:rPr lang="en-US" sz="800" dirty="0"/>
               <a:t>★</a:t>
-            </a:r>
-          </a:p>
-        </p:txBody>
-      </p:sp>
-      <p:sp>
-        <p:nvSpPr>
-          <p:cNvPr id="2004" name="Footer Placeholder 2004"/>
-          <p:cNvSpPr>
-            <a:spLocks noGrp="1"/>
-          </p:cNvSpPr>
-          <p:nvPr>
-            <p:ph type="ftr" sz="quarter" idx="3"/>
-          </p:nvPr>
-        </p:nvSpPr>
-        <p:spPr>
-          <a:xfrm>
-            <a:off x="192088" y="6392596"/>
-            <a:ext cx="1763922" cy="370422"/>
-          </a:xfrm>
-        </p:spPr>
-        <p:txBody>
-          <a:bodyPr/>
-          <a:lstStyle/>
-          <a:p>
-            <a:r>
-              <a:rPr lang="en-US" dirty="0"/>
-              <a:t>Generated with Sigrid</a:t>
-            </a:r>
-          </a:p>
-          <a:p>
-            <a:r>
-              <a:rPr lang="en-US" dirty="0"/>
-              <a:t>for CUSTOMER_NAME</a:t>
             </a:r>
           </a:p>
         </p:txBody>
@@ -41380,8 +38862,8 @@
         </p:nvSpPr>
         <p:spPr>
           <a:xfrm>
-            <a:off x="381600" y="129568"/>
-            <a:ext cx="1663129" cy="228209"/>
+            <a:off x="381600" y="129599"/>
+            <a:ext cx="1663411" cy="228145"/>
           </a:xfrm>
         </p:spPr>
         <p:txBody>
@@ -41394,25 +38876,6 @@
               <a:rPr lang="en-US" dirty="0"/>
               <a:t>Open Source Health</a:t>
             </a:r>
-          </a:p>
-        </p:txBody>
-      </p:sp>
-      <p:sp>
-        <p:nvSpPr>
-          <p:cNvPr id="3" name="Content Placeholder 2"/>
-          <p:cNvSpPr>
-            <a:spLocks noGrp="1"/>
-          </p:cNvSpPr>
-          <p:nvPr>
-            <p:ph sz="quarter" idx="13"/>
-          </p:nvPr>
-        </p:nvSpPr>
-        <p:spPr/>
-        <p:txBody>
-          <a:bodyPr/>
-          <a:lstStyle/>
-          <a:p>
-            <a:endParaRPr/>
           </a:p>
         </p:txBody>
       </p:sp>
@@ -41442,63 +38905,29 @@
       </p:sp>
       <p:sp>
         <p:nvSpPr>
-          <p:cNvPr id="7" name="Rectangle 6">
-            <a:extLst>
-              <a:ext uri="{FF2B5EF4-FFF2-40B4-BE49-F238E27FC236}">
-                <a16:creationId xmlns:a16="http://schemas.microsoft.com/office/drawing/2014/main" id="{4D956AE0-666A-B966-0B15-61A5E6C88F75}"/>
-              </a:ext>
-            </a:extLst>
-          </p:cNvPr>
-          <p:cNvSpPr/>
-          <p:nvPr/>
+          <p:cNvPr id="1004" name="Footer Placeholder 1004"/>
+          <p:cNvSpPr>
+            <a:spLocks noGrp="1"/>
+          </p:cNvSpPr>
+          <p:nvPr>
+            <p:ph type="ftr" sz="quarter" idx="3"/>
+          </p:nvPr>
         </p:nvSpPr>
-        <p:spPr>
-          <a:xfrm>
-            <a:off x="0" y="1390132"/>
-            <a:ext cx="12192000" cy="4927867"/>
-          </a:xfrm>
-          <a:prstGeom prst="rect">
-            <a:avLst/>
-          </a:prstGeom>
-          <a:solidFill>
-            <a:schemeClr val="bg1"/>
-          </a:solidFill>
-          <a:ln>
-            <a:noFill/>
-          </a:ln>
-          <a:effectLst>
-            <a:outerShdw blurRad="190500" dist="38100" dir="2700000" algn="tl" rotWithShape="0">
-              <a:prstClr val="black">
-                <a:alpha val="15000"/>
-              </a:prstClr>
-            </a:outerShdw>
-          </a:effectLst>
-        </p:spPr>
-        <p:style>
-          <a:lnRef idx="2">
-            <a:schemeClr val="accent1">
-              <a:shade val="50000"/>
-            </a:schemeClr>
-          </a:lnRef>
-          <a:fillRef idx="1">
-            <a:schemeClr val="accent1"/>
-          </a:fillRef>
-          <a:effectRef idx="0">
-            <a:schemeClr val="accent1"/>
-          </a:effectRef>
-          <a:fontRef idx="minor">
-            <a:schemeClr val="lt1"/>
-          </a:fontRef>
-        </p:style>
+        <p:spPr/>
         <p:txBody>
-          <a:bodyPr lIns="731520" tIns="72000" rIns="108000" bIns="72000" rtlCol="0" anchor="ctr"/>
+          <a:bodyPr/>
           <a:lstStyle/>
           <a:p>
-            <a:endParaRPr lang="nl-NL" sz="1200" b="1" noProof="0" dirty="0">
-              <a:solidFill>
-                <a:schemeClr val="accent1"/>
-              </a:solidFill>
-            </a:endParaRPr>
+            <a:r>
+              <a:rPr lang="en-US" dirty="0"/>
+              <a:t>Generated with Sigrid</a:t>
+            </a:r>
+          </a:p>
+          <a:p>
+            <a:r>
+              <a:rPr lang="en-US" dirty="0"/>
+              <a:t>for CUSTOMER_NAME</a:t>
+            </a:r>
           </a:p>
         </p:txBody>
       </p:sp>
@@ -42088,39 +39517,6 @@
       </p:grpSp>
       <p:sp>
         <p:nvSpPr>
-          <p:cNvPr id="1004" name="Footer Placeholder 1004"/>
-          <p:cNvSpPr>
-            <a:spLocks noGrp="1"/>
-          </p:cNvSpPr>
-          <p:nvPr>
-            <p:ph type="ftr" sz="quarter" idx="3"/>
-          </p:nvPr>
-        </p:nvSpPr>
-        <p:spPr>
-          <a:xfrm>
-            <a:off x="192088" y="6392596"/>
-            <a:ext cx="1763922" cy="370422"/>
-          </a:xfrm>
-        </p:spPr>
-        <p:txBody>
-          <a:bodyPr/>
-          <a:lstStyle/>
-          <a:p>
-            <a:r>
-              <a:rPr lang="en-US" dirty="0"/>
-              <a:t>Generated with Sigrid</a:t>
-            </a:r>
-          </a:p>
-          <a:p>
-            <a:r>
-              <a:rPr lang="en-US" dirty="0"/>
-              <a:t>for CUSTOMER_NAME</a:t>
-            </a:r>
-          </a:p>
-        </p:txBody>
-      </p:sp>
-      <p:sp>
-        <p:nvSpPr>
           <p:cNvPr id="1071" name="TextBox 1071"/>
           <p:cNvSpPr txBox="1"/>
           <p:nvPr/>
@@ -42336,8 +39732,8 @@
         </p:nvSpPr>
         <p:spPr>
           <a:xfrm>
-            <a:off x="381600" y="129568"/>
-            <a:ext cx="1410176" cy="228209"/>
+            <a:off x="381600" y="129599"/>
+            <a:ext cx="1410176" cy="228145"/>
           </a:xfrm>
         </p:spPr>
         <p:txBody>
@@ -42350,25 +39746,6 @@
               <a:rPr lang="en-US" dirty="0"/>
               <a:t>Maintainability</a:t>
             </a:r>
-          </a:p>
-        </p:txBody>
-      </p:sp>
-      <p:sp>
-        <p:nvSpPr>
-          <p:cNvPr id="3" name="Content Placeholder 2"/>
-          <p:cNvSpPr>
-            <a:spLocks noGrp="1"/>
-          </p:cNvSpPr>
-          <p:nvPr>
-            <p:ph sz="quarter" idx="13"/>
-          </p:nvPr>
-        </p:nvSpPr>
-        <p:spPr/>
-        <p:txBody>
-          <a:bodyPr/>
-          <a:lstStyle/>
-          <a:p>
-            <a:endParaRPr/>
           </a:p>
         </p:txBody>
       </p:sp>
@@ -42398,63 +39775,29 @@
       </p:sp>
       <p:sp>
         <p:nvSpPr>
-          <p:cNvPr id="7" name="Rectangle 6">
-            <a:extLst>
-              <a:ext uri="{FF2B5EF4-FFF2-40B4-BE49-F238E27FC236}">
-                <a16:creationId xmlns:a16="http://schemas.microsoft.com/office/drawing/2014/main" id="{4D956AE0-666A-B966-0B15-61A5E6C88F75}"/>
-              </a:ext>
-            </a:extLst>
-          </p:cNvPr>
-          <p:cNvSpPr/>
-          <p:nvPr/>
+          <p:cNvPr id="2004" name="Footer Placeholder 2004"/>
+          <p:cNvSpPr>
+            <a:spLocks noGrp="1"/>
+          </p:cNvSpPr>
+          <p:nvPr>
+            <p:ph type="ftr" sz="quarter" idx="3"/>
+          </p:nvPr>
         </p:nvSpPr>
-        <p:spPr>
-          <a:xfrm>
-            <a:off x="0" y="1390132"/>
-            <a:ext cx="12192000" cy="4927867"/>
-          </a:xfrm>
-          <a:prstGeom prst="rect">
-            <a:avLst/>
-          </a:prstGeom>
-          <a:solidFill>
-            <a:schemeClr val="bg1"/>
-          </a:solidFill>
-          <a:ln>
-            <a:noFill/>
-          </a:ln>
-          <a:effectLst>
-            <a:outerShdw blurRad="190500" dist="38100" dir="2700000" algn="tl" rotWithShape="0">
-              <a:prstClr val="black">
-                <a:alpha val="15000"/>
-              </a:prstClr>
-            </a:outerShdw>
-          </a:effectLst>
-        </p:spPr>
-        <p:style>
-          <a:lnRef idx="2">
-            <a:schemeClr val="accent1">
-              <a:shade val="50000"/>
-            </a:schemeClr>
-          </a:lnRef>
-          <a:fillRef idx="1">
-            <a:schemeClr val="accent1"/>
-          </a:fillRef>
-          <a:effectRef idx="0">
-            <a:schemeClr val="accent1"/>
-          </a:effectRef>
-          <a:fontRef idx="minor">
-            <a:schemeClr val="lt1"/>
-          </a:fontRef>
-        </p:style>
+        <p:spPr/>
         <p:txBody>
-          <a:bodyPr lIns="731520" tIns="72000" rIns="108000" bIns="72000" rtlCol="0" anchor="ctr"/>
+          <a:bodyPr/>
           <a:lstStyle/>
           <a:p>
-            <a:endParaRPr lang="nl-NL" sz="1200" b="1" noProof="0" dirty="0">
-              <a:solidFill>
-                <a:schemeClr val="accent1"/>
-              </a:solidFill>
-            </a:endParaRPr>
+            <a:r>
+              <a:rPr lang="en-US" dirty="0"/>
+              <a:t>Generated with Sigrid</a:t>
+            </a:r>
+          </a:p>
+          <a:p>
+            <a:r>
+              <a:rPr lang="en-US" dirty="0"/>
+              <a:t>for CUSTOMER_NAME</a:t>
+            </a:r>
           </a:p>
         </p:txBody>
       </p:sp>
@@ -42859,39 +40202,6 @@
       </p:sp>
       <p:sp>
         <p:nvSpPr>
-          <p:cNvPr id="2004" name="Footer Placeholder 2004"/>
-          <p:cNvSpPr>
-            <a:spLocks noGrp="1"/>
-          </p:cNvSpPr>
-          <p:nvPr>
-            <p:ph type="ftr" sz="quarter" idx="3"/>
-          </p:nvPr>
-        </p:nvSpPr>
-        <p:spPr>
-          <a:xfrm>
-            <a:off x="192088" y="6392596"/>
-            <a:ext cx="1763922" cy="370422"/>
-          </a:xfrm>
-        </p:spPr>
-        <p:txBody>
-          <a:bodyPr/>
-          <a:lstStyle/>
-          <a:p>
-            <a:r>
-              <a:rPr lang="en-US" dirty="0"/>
-              <a:t>Generated with Sigrid</a:t>
-            </a:r>
-          </a:p>
-          <a:p>
-            <a:r>
-              <a:rPr lang="en-US" dirty="0"/>
-              <a:t>for CUSTOMER_NAME</a:t>
-            </a:r>
-          </a:p>
-        </p:txBody>
-      </p:sp>
-      <p:sp>
-        <p:nvSpPr>
           <p:cNvPr id="2071" name="TextBox 2071"/>
           <p:cNvSpPr txBox="1"/>
           <p:nvPr/>
@@ -42982,11 +40292,46 @@
           <a:p>
             <a:pPr indent="-283845"/>
             <a:r>
+              <a:rPr lang="en-GB" sz="1550" dirty="0" err="1">
+                <a:ea typeface="Calibri"/>
+                <a:cs typeface="Calibri"/>
+              </a:rPr>
+              <a:t>PORTFOLIO_MAINT_CHANGE_SUMMARY_DUPLICATION</a:t>
+            </a:r>
+            <a:endParaRPr lang="en-GB" sz="1550" dirty="0">
+              <a:ea typeface="Calibri"/>
+              <a:cs typeface="Calibri"/>
+            </a:endParaRPr>
+          </a:p>
+          <a:p>
+            <a:pPr indent="-283845"/>
+            <a:r>
+              <a:rPr lang="en-GB" sz="1550" dirty="0" err="1">
+                <a:ea typeface="Calibri"/>
+                <a:cs typeface="Calibri"/>
+              </a:rPr>
+              <a:t>PORTFOLIO_MAINT_INCREASED_DUPLICATION</a:t>
+            </a:r>
+            <a:r>
               <a:rPr lang="en-GB" sz="1550" dirty="0">
                 <a:ea typeface="Calibri"/>
                 <a:cs typeface="Calibri"/>
               </a:rPr>
-              <a:t>PORTFOLIO_MAINT_INCREASED_DUPLICATION% of systems has seen an increase in their Duplication rating. PORTFOLIO_MAINT_STABLE_DUPLICATION% of systems has remained stable. PORTFOLIO_MAINT_DECREASED_DUPLICATION% of systems has seen a decrease in maintainability.</a:t>
+              <a:t>% of systems has seen an increase in their Duplication rating. </a:t>
+            </a:r>
+            <a:r>
+              <a:rPr lang="en-GB" sz="1550" dirty="0" err="1">
+                <a:ea typeface="Calibri"/>
+                <a:cs typeface="Calibri"/>
+              </a:rPr>
+              <a:t>PORTFOLIO_MAINT_STABLE_DUPLICATION</a:t>
+            </a:r>
+            <a:r>
+              <a:rPr lang="en-GB" sz="1550" dirty="0">
+                <a:ea typeface="Calibri"/>
+                <a:cs typeface="Calibri"/>
+              </a:rPr>
+              <a:t>% of systems has remained stable. PORTFOLIO_MAINT_DECREASED_DUPLICATION% of systems has seen a decrease in maintainability.</a:t>
             </a:r>
           </a:p>
           <a:p>
@@ -43043,8 +40388,8 @@
         </p:nvSpPr>
         <p:spPr>
           <a:xfrm>
-            <a:off x="381600" y="129568"/>
-            <a:ext cx="1663129" cy="228209"/>
+            <a:off x="381600" y="129599"/>
+            <a:ext cx="1663411" cy="228145"/>
           </a:xfrm>
         </p:spPr>
         <p:txBody>
@@ -43057,25 +40402,6 @@
               <a:rPr lang="en-US" dirty="0"/>
               <a:t>Open Source Health</a:t>
             </a:r>
-          </a:p>
-        </p:txBody>
-      </p:sp>
-      <p:sp>
-        <p:nvSpPr>
-          <p:cNvPr id="3" name="Content Placeholder 2"/>
-          <p:cNvSpPr>
-            <a:spLocks noGrp="1"/>
-          </p:cNvSpPr>
-          <p:nvPr>
-            <p:ph sz="quarter" idx="13"/>
-          </p:nvPr>
-        </p:nvSpPr>
-        <p:spPr/>
-        <p:txBody>
-          <a:bodyPr/>
-          <a:lstStyle/>
-          <a:p>
-            <a:endParaRPr/>
           </a:p>
         </p:txBody>
       </p:sp>
@@ -43105,63 +40431,29 @@
       </p:sp>
       <p:sp>
         <p:nvSpPr>
-          <p:cNvPr id="7" name="Rectangle 6">
-            <a:extLst>
-              <a:ext uri="{FF2B5EF4-FFF2-40B4-BE49-F238E27FC236}">
-                <a16:creationId xmlns:a16="http://schemas.microsoft.com/office/drawing/2014/main" id="{4D956AE0-666A-B966-0B15-61A5E6C88F75}"/>
-              </a:ext>
-            </a:extLst>
-          </p:cNvPr>
-          <p:cNvSpPr/>
-          <p:nvPr/>
+          <p:cNvPr id="1004" name="Footer Placeholder 1004"/>
+          <p:cNvSpPr>
+            <a:spLocks noGrp="1"/>
+          </p:cNvSpPr>
+          <p:nvPr>
+            <p:ph type="ftr" sz="quarter" idx="3"/>
+          </p:nvPr>
         </p:nvSpPr>
-        <p:spPr>
-          <a:xfrm>
-            <a:off x="0" y="1390132"/>
-            <a:ext cx="12192000" cy="4927867"/>
-          </a:xfrm>
-          <a:prstGeom prst="rect">
-            <a:avLst/>
-          </a:prstGeom>
-          <a:solidFill>
-            <a:schemeClr val="bg1"/>
-          </a:solidFill>
-          <a:ln>
-            <a:noFill/>
-          </a:ln>
-          <a:effectLst>
-            <a:outerShdw blurRad="190500" dist="38100" dir="2700000" algn="tl" rotWithShape="0">
-              <a:prstClr val="black">
-                <a:alpha val="15000"/>
-              </a:prstClr>
-            </a:outerShdw>
-          </a:effectLst>
-        </p:spPr>
-        <p:style>
-          <a:lnRef idx="2">
-            <a:schemeClr val="accent1">
-              <a:shade val="50000"/>
-            </a:schemeClr>
-          </a:lnRef>
-          <a:fillRef idx="1">
-            <a:schemeClr val="accent1"/>
-          </a:fillRef>
-          <a:effectRef idx="0">
-            <a:schemeClr val="accent1"/>
-          </a:effectRef>
-          <a:fontRef idx="minor">
-            <a:schemeClr val="lt1"/>
-          </a:fontRef>
-        </p:style>
+        <p:spPr/>
         <p:txBody>
-          <a:bodyPr lIns="731520" tIns="72000" rIns="108000" bIns="72000" rtlCol="0" anchor="ctr"/>
+          <a:bodyPr/>
           <a:lstStyle/>
           <a:p>
-            <a:endParaRPr lang="nl-NL" sz="1200" b="1" noProof="0" dirty="0">
-              <a:solidFill>
-                <a:schemeClr val="accent1"/>
-              </a:solidFill>
-            </a:endParaRPr>
+            <a:r>
+              <a:rPr lang="en-US" dirty="0"/>
+              <a:t>Generated with Sigrid</a:t>
+            </a:r>
+          </a:p>
+          <a:p>
+            <a:r>
+              <a:rPr lang="en-US" dirty="0"/>
+              <a:t>for CUSTOMER_NAME</a:t>
+            </a:r>
           </a:p>
         </p:txBody>
       </p:sp>
@@ -43751,39 +41043,6 @@
       </p:grpSp>
       <p:sp>
         <p:nvSpPr>
-          <p:cNvPr id="1004" name="Footer Placeholder 1004"/>
-          <p:cNvSpPr>
-            <a:spLocks noGrp="1"/>
-          </p:cNvSpPr>
-          <p:nvPr>
-            <p:ph type="ftr" sz="quarter" idx="3"/>
-          </p:nvPr>
-        </p:nvSpPr>
-        <p:spPr>
-          <a:xfrm>
-            <a:off x="192088" y="6392596"/>
-            <a:ext cx="1763922" cy="370422"/>
-          </a:xfrm>
-        </p:spPr>
-        <p:txBody>
-          <a:bodyPr/>
-          <a:lstStyle/>
-          <a:p>
-            <a:r>
-              <a:rPr lang="en-US" dirty="0"/>
-              <a:t>Generated with Sigrid</a:t>
-            </a:r>
-          </a:p>
-          <a:p>
-            <a:r>
-              <a:rPr lang="en-US" dirty="0"/>
-              <a:t>for CUSTOMER_NAME</a:t>
-            </a:r>
-          </a:p>
-        </p:txBody>
-      </p:sp>
-      <p:sp>
-        <p:nvSpPr>
           <p:cNvPr id="1071" name="TextBox 1071"/>
           <p:cNvSpPr txBox="1"/>
           <p:nvPr/>
@@ -43999,8 +41258,8 @@
         </p:nvSpPr>
         <p:spPr>
           <a:xfrm>
-            <a:off x="381600" y="129568"/>
-            <a:ext cx="1663129" cy="228209"/>
+            <a:off x="381600" y="129599"/>
+            <a:ext cx="1663411" cy="228145"/>
           </a:xfrm>
         </p:spPr>
         <p:txBody>
@@ -44013,25 +41272,6 @@
               <a:rPr lang="en-US" dirty="0"/>
               <a:t>Open Source Health</a:t>
             </a:r>
-          </a:p>
-        </p:txBody>
-      </p:sp>
-      <p:sp>
-        <p:nvSpPr>
-          <p:cNvPr id="3" name="Content Placeholder 2"/>
-          <p:cNvSpPr>
-            <a:spLocks noGrp="1"/>
-          </p:cNvSpPr>
-          <p:nvPr>
-            <p:ph sz="quarter" idx="13"/>
-          </p:nvPr>
-        </p:nvSpPr>
-        <p:spPr/>
-        <p:txBody>
-          <a:bodyPr/>
-          <a:lstStyle/>
-          <a:p>
-            <a:endParaRPr/>
           </a:p>
         </p:txBody>
       </p:sp>
@@ -44061,63 +41301,29 @@
       </p:sp>
       <p:sp>
         <p:nvSpPr>
-          <p:cNvPr id="7" name="Rectangle 6">
-            <a:extLst>
-              <a:ext uri="{FF2B5EF4-FFF2-40B4-BE49-F238E27FC236}">
-                <a16:creationId xmlns:a16="http://schemas.microsoft.com/office/drawing/2014/main" id="{4D956AE0-666A-B966-0B15-61A5E6C88F75}"/>
-              </a:ext>
-            </a:extLst>
-          </p:cNvPr>
-          <p:cNvSpPr/>
-          <p:nvPr/>
+          <p:cNvPr id="1004" name="Footer Placeholder 1004"/>
+          <p:cNvSpPr>
+            <a:spLocks noGrp="1"/>
+          </p:cNvSpPr>
+          <p:nvPr>
+            <p:ph type="ftr" sz="quarter" idx="3"/>
+          </p:nvPr>
         </p:nvSpPr>
-        <p:spPr>
-          <a:xfrm>
-            <a:off x="0" y="1390132"/>
-            <a:ext cx="12192000" cy="4927867"/>
-          </a:xfrm>
-          <a:prstGeom prst="rect">
-            <a:avLst/>
-          </a:prstGeom>
-          <a:solidFill>
-            <a:schemeClr val="bg1"/>
-          </a:solidFill>
-          <a:ln>
-            <a:noFill/>
-          </a:ln>
-          <a:effectLst>
-            <a:outerShdw blurRad="190500" dist="38100" dir="2700000" algn="tl" rotWithShape="0">
-              <a:prstClr val="black">
-                <a:alpha val="15000"/>
-              </a:prstClr>
-            </a:outerShdw>
-          </a:effectLst>
-        </p:spPr>
-        <p:style>
-          <a:lnRef idx="2">
-            <a:schemeClr val="accent1">
-              <a:shade val="50000"/>
-            </a:schemeClr>
-          </a:lnRef>
-          <a:fillRef idx="1">
-            <a:schemeClr val="accent1"/>
-          </a:fillRef>
-          <a:effectRef idx="0">
-            <a:schemeClr val="accent1"/>
-          </a:effectRef>
-          <a:fontRef idx="minor">
-            <a:schemeClr val="lt1"/>
-          </a:fontRef>
-        </p:style>
+        <p:spPr/>
         <p:txBody>
-          <a:bodyPr lIns="731520" tIns="72000" rIns="108000" bIns="72000" rtlCol="0" anchor="ctr"/>
+          <a:bodyPr/>
           <a:lstStyle/>
           <a:p>
-            <a:endParaRPr lang="nl-NL" sz="1200" b="1" noProof="0" dirty="0">
-              <a:solidFill>
-                <a:schemeClr val="accent1"/>
-              </a:solidFill>
-            </a:endParaRPr>
+            <a:r>
+              <a:rPr lang="en-US" dirty="0"/>
+              <a:t>Generated with Sigrid</a:t>
+            </a:r>
+          </a:p>
+          <a:p>
+            <a:r>
+              <a:rPr lang="en-US" dirty="0"/>
+              <a:t>for CUSTOMER_NAME</a:t>
+            </a:r>
           </a:p>
         </p:txBody>
       </p:sp>
@@ -44707,39 +41913,6 @@
       </p:grpSp>
       <p:sp>
         <p:nvSpPr>
-          <p:cNvPr id="1004" name="Footer Placeholder 1004"/>
-          <p:cNvSpPr>
-            <a:spLocks noGrp="1"/>
-          </p:cNvSpPr>
-          <p:nvPr>
-            <p:ph type="ftr" sz="quarter" idx="3"/>
-          </p:nvPr>
-        </p:nvSpPr>
-        <p:spPr>
-          <a:xfrm>
-            <a:off x="192088" y="6392596"/>
-            <a:ext cx="1763922" cy="370422"/>
-          </a:xfrm>
-        </p:spPr>
-        <p:txBody>
-          <a:bodyPr/>
-          <a:lstStyle/>
-          <a:p>
-            <a:r>
-              <a:rPr lang="en-US" dirty="0"/>
-              <a:t>Generated with Sigrid</a:t>
-            </a:r>
-          </a:p>
-          <a:p>
-            <a:r>
-              <a:rPr lang="en-US" dirty="0"/>
-              <a:t>for CUSTOMER_NAME</a:t>
-            </a:r>
-          </a:p>
-        </p:txBody>
-      </p:sp>
-      <p:sp>
-        <p:nvSpPr>
           <p:cNvPr id="1071" name="TextBox 1071"/>
           <p:cNvSpPr txBox="1"/>
           <p:nvPr/>
@@ -44955,8 +42128,8 @@
         </p:nvSpPr>
         <p:spPr>
           <a:xfrm>
-            <a:off x="381600" y="129568"/>
-            <a:ext cx="1663129" cy="228209"/>
+            <a:off x="381600" y="129599"/>
+            <a:ext cx="1663129" cy="228145"/>
           </a:xfrm>
         </p:spPr>
         <p:txBody>
@@ -44969,25 +42142,6 @@
               <a:rPr lang="en-US" dirty="0"/>
               <a:t>Open Source Health</a:t>
             </a:r>
-          </a:p>
-        </p:txBody>
-      </p:sp>
-      <p:sp>
-        <p:nvSpPr>
-          <p:cNvPr id="3" name="Content Placeholder 2"/>
-          <p:cNvSpPr>
-            <a:spLocks noGrp="1"/>
-          </p:cNvSpPr>
-          <p:nvPr>
-            <p:ph sz="quarter" idx="13"/>
-          </p:nvPr>
-        </p:nvSpPr>
-        <p:spPr/>
-        <p:txBody>
-          <a:bodyPr/>
-          <a:lstStyle/>
-          <a:p>
-            <a:endParaRPr/>
           </a:p>
         </p:txBody>
       </p:sp>
@@ -45017,63 +42171,29 @@
       </p:sp>
       <p:sp>
         <p:nvSpPr>
-          <p:cNvPr id="7" name="Rectangle 6">
-            <a:extLst>
-              <a:ext uri="{FF2B5EF4-FFF2-40B4-BE49-F238E27FC236}">
-                <a16:creationId xmlns:a16="http://schemas.microsoft.com/office/drawing/2014/main" id="{4D956AE0-666A-B966-0B15-61A5E6C88F75}"/>
-              </a:ext>
-            </a:extLst>
-          </p:cNvPr>
-          <p:cNvSpPr/>
-          <p:nvPr/>
+          <p:cNvPr id="1004" name="Footer Placeholder 1004"/>
+          <p:cNvSpPr>
+            <a:spLocks noGrp="1"/>
+          </p:cNvSpPr>
+          <p:nvPr>
+            <p:ph type="ftr" sz="quarter" idx="3"/>
+          </p:nvPr>
         </p:nvSpPr>
-        <p:spPr>
-          <a:xfrm>
-            <a:off x="0" y="1390132"/>
-            <a:ext cx="12192000" cy="4927867"/>
-          </a:xfrm>
-          <a:prstGeom prst="rect">
-            <a:avLst/>
-          </a:prstGeom>
-          <a:solidFill>
-            <a:schemeClr val="bg1"/>
-          </a:solidFill>
-          <a:ln>
-            <a:noFill/>
-          </a:ln>
-          <a:effectLst>
-            <a:outerShdw blurRad="190500" dist="38100" dir="2700000" algn="tl" rotWithShape="0">
-              <a:prstClr val="black">
-                <a:alpha val="15000"/>
-              </a:prstClr>
-            </a:outerShdw>
-          </a:effectLst>
-        </p:spPr>
-        <p:style>
-          <a:lnRef idx="2">
-            <a:schemeClr val="accent1">
-              <a:shade val="50000"/>
-            </a:schemeClr>
-          </a:lnRef>
-          <a:fillRef idx="1">
-            <a:schemeClr val="accent1"/>
-          </a:fillRef>
-          <a:effectRef idx="0">
-            <a:schemeClr val="accent1"/>
-          </a:effectRef>
-          <a:fontRef idx="minor">
-            <a:schemeClr val="lt1"/>
-          </a:fontRef>
-        </p:style>
+        <p:spPr/>
         <p:txBody>
-          <a:bodyPr lIns="731520" tIns="72000" rIns="108000" bIns="72000" rtlCol="0" anchor="ctr"/>
+          <a:bodyPr/>
           <a:lstStyle/>
           <a:p>
-            <a:endParaRPr lang="nl-NL" sz="1200" b="1" noProof="0" dirty="0">
-              <a:solidFill>
-                <a:schemeClr val="accent1"/>
-              </a:solidFill>
-            </a:endParaRPr>
+            <a:r>
+              <a:rPr lang="en-US" dirty="0"/>
+              <a:t>Generated with Sigrid</a:t>
+            </a:r>
+          </a:p>
+          <a:p>
+            <a:r>
+              <a:rPr lang="en-US" dirty="0"/>
+              <a:t>for CUSTOMER_NAME</a:t>
+            </a:r>
           </a:p>
         </p:txBody>
       </p:sp>
@@ -45663,39 +42783,6 @@
       </p:grpSp>
       <p:sp>
         <p:nvSpPr>
-          <p:cNvPr id="1004" name="Footer Placeholder 1004"/>
-          <p:cNvSpPr>
-            <a:spLocks noGrp="1"/>
-          </p:cNvSpPr>
-          <p:nvPr>
-            <p:ph type="ftr" sz="quarter" idx="3"/>
-          </p:nvPr>
-        </p:nvSpPr>
-        <p:spPr>
-          <a:xfrm>
-            <a:off x="192088" y="6392596"/>
-            <a:ext cx="1763922" cy="370422"/>
-          </a:xfrm>
-        </p:spPr>
-        <p:txBody>
-          <a:bodyPr/>
-          <a:lstStyle/>
-          <a:p>
-            <a:r>
-              <a:rPr lang="en-US" dirty="0"/>
-              <a:t>Generated with Sigrid</a:t>
-            </a:r>
-          </a:p>
-          <a:p>
-            <a:r>
-              <a:rPr lang="en-US" dirty="0"/>
-              <a:t>for CUSTOMER_NAME</a:t>
-            </a:r>
-          </a:p>
-        </p:txBody>
-      </p:sp>
-      <p:sp>
-        <p:nvSpPr>
           <p:cNvPr id="1071" name="TextBox 1071"/>
           <p:cNvSpPr txBox="1"/>
           <p:nvPr/>
@@ -45911,8 +42998,8 @@
         </p:nvSpPr>
         <p:spPr>
           <a:xfrm>
-            <a:off x="381600" y="129568"/>
-            <a:ext cx="1663129" cy="228209"/>
+            <a:off x="381600" y="129599"/>
+            <a:ext cx="1663411" cy="228145"/>
           </a:xfrm>
         </p:spPr>
         <p:txBody>
@@ -45925,25 +43012,6 @@
               <a:rPr lang="en-US" dirty="0"/>
               <a:t>Open Source Health</a:t>
             </a:r>
-          </a:p>
-        </p:txBody>
-      </p:sp>
-      <p:sp>
-        <p:nvSpPr>
-          <p:cNvPr id="3" name="Content Placeholder 2"/>
-          <p:cNvSpPr>
-            <a:spLocks noGrp="1"/>
-          </p:cNvSpPr>
-          <p:nvPr>
-            <p:ph sz="quarter" idx="13"/>
-          </p:nvPr>
-        </p:nvSpPr>
-        <p:spPr/>
-        <p:txBody>
-          <a:bodyPr/>
-          <a:lstStyle/>
-          <a:p>
-            <a:endParaRPr/>
           </a:p>
         </p:txBody>
       </p:sp>
@@ -45973,63 +43041,35 @@
       </p:sp>
       <p:sp>
         <p:nvSpPr>
-          <p:cNvPr id="7" name="Rectangle 6">
+          <p:cNvPr id="22" name="Footer Placeholder 1004">
             <a:extLst>
               <a:ext uri="{FF2B5EF4-FFF2-40B4-BE49-F238E27FC236}">
-                <a16:creationId xmlns:a16="http://schemas.microsoft.com/office/drawing/2014/main" id="{4D956AE0-666A-B966-0B15-61A5E6C88F75}"/>
+                <a16:creationId xmlns:a16="http://schemas.microsoft.com/office/drawing/2014/main" id="{3003FB07-67E0-4E3E-208C-0F579A9ED44E}"/>
               </a:ext>
             </a:extLst>
           </p:cNvPr>
-          <p:cNvSpPr/>
-          <p:nvPr/>
+          <p:cNvSpPr>
+            <a:spLocks noGrp="1"/>
+          </p:cNvSpPr>
+          <p:nvPr>
+            <p:ph type="ftr" sz="quarter" idx="3"/>
+          </p:nvPr>
         </p:nvSpPr>
-        <p:spPr>
-          <a:xfrm>
-            <a:off x="0" y="1390132"/>
-            <a:ext cx="12192000" cy="4927867"/>
-          </a:xfrm>
-          <a:prstGeom prst="rect">
-            <a:avLst/>
-          </a:prstGeom>
-          <a:solidFill>
-            <a:schemeClr val="bg1"/>
-          </a:solidFill>
-          <a:ln>
-            <a:noFill/>
-          </a:ln>
-          <a:effectLst>
-            <a:outerShdw blurRad="190500" dist="38100" dir="2700000" algn="tl" rotWithShape="0">
-              <a:prstClr val="black">
-                <a:alpha val="15000"/>
-              </a:prstClr>
-            </a:outerShdw>
-          </a:effectLst>
-        </p:spPr>
-        <p:style>
-          <a:lnRef idx="2">
-            <a:schemeClr val="accent1">
-              <a:shade val="50000"/>
-            </a:schemeClr>
-          </a:lnRef>
-          <a:fillRef idx="1">
-            <a:schemeClr val="accent1"/>
-          </a:fillRef>
-          <a:effectRef idx="0">
-            <a:schemeClr val="accent1"/>
-          </a:effectRef>
-          <a:fontRef idx="minor">
-            <a:schemeClr val="lt1"/>
-          </a:fontRef>
-        </p:style>
+        <p:spPr/>
         <p:txBody>
-          <a:bodyPr lIns="731520" tIns="72000" rIns="108000" bIns="72000" rtlCol="0" anchor="ctr"/>
+          <a:bodyPr/>
           <a:lstStyle/>
           <a:p>
-            <a:endParaRPr lang="nl-NL" sz="1200" b="1" noProof="0" dirty="0">
-              <a:solidFill>
-                <a:schemeClr val="accent1"/>
-              </a:solidFill>
-            </a:endParaRPr>
+            <a:r>
+              <a:rPr lang="en-US" dirty="0"/>
+              <a:t>Generated with Sigrid</a:t>
+            </a:r>
+          </a:p>
+          <a:p>
+            <a:r>
+              <a:rPr lang="en-US" dirty="0"/>
+              <a:t>for CUSTOMER_NAME</a:t>
+            </a:r>
           </a:p>
         </p:txBody>
       </p:sp>
@@ -46882,45 +43922,6 @@
           </p:txBody>
         </p:sp>
       </p:grpSp>
-      <p:sp>
-        <p:nvSpPr>
-          <p:cNvPr id="22" name="Footer Placeholder 1004">
-            <a:extLst>
-              <a:ext uri="{FF2B5EF4-FFF2-40B4-BE49-F238E27FC236}">
-                <a16:creationId xmlns:a16="http://schemas.microsoft.com/office/drawing/2014/main" id="{3003FB07-67E0-4E3E-208C-0F579A9ED44E}"/>
-              </a:ext>
-            </a:extLst>
-          </p:cNvPr>
-          <p:cNvSpPr>
-            <a:spLocks noGrp="1"/>
-          </p:cNvSpPr>
-          <p:nvPr>
-            <p:ph type="ftr" sz="quarter" idx="3"/>
-          </p:nvPr>
-        </p:nvSpPr>
-        <p:spPr>
-          <a:xfrm>
-            <a:off x="192088" y="6392596"/>
-            <a:ext cx="1763922" cy="370422"/>
-          </a:xfrm>
-        </p:spPr>
-        <p:txBody>
-          <a:bodyPr/>
-          <a:lstStyle/>
-          <a:p>
-            <a:r>
-              <a:rPr lang="en-US" dirty="0"/>
-              <a:t>Generated with Sigrid</a:t>
-            </a:r>
-          </a:p>
-          <a:p>
-            <a:r>
-              <a:rPr lang="en-US" dirty="0"/>
-              <a:t>for CUSTOMER_NAME</a:t>
-            </a:r>
-          </a:p>
-        </p:txBody>
-      </p:sp>
     </p:spTree>
     <p:extLst>
       <p:ext uri="{BB962C8B-B14F-4D97-AF65-F5344CB8AC3E}">
@@ -46963,8 +43964,8 @@
         </p:nvSpPr>
         <p:spPr>
           <a:xfrm>
-            <a:off x="381600" y="129568"/>
-            <a:ext cx="1410176" cy="228209"/>
+            <a:off x="381600" y="129599"/>
+            <a:ext cx="1410176" cy="228145"/>
           </a:xfrm>
         </p:spPr>
         <p:txBody>
@@ -46977,25 +43978,6 @@
               <a:rPr lang="en-US" dirty="0"/>
               <a:t>Maintainability</a:t>
             </a:r>
-          </a:p>
-        </p:txBody>
-      </p:sp>
-      <p:sp>
-        <p:nvSpPr>
-          <p:cNvPr id="3" name="Content Placeholder 2"/>
-          <p:cNvSpPr>
-            <a:spLocks noGrp="1"/>
-          </p:cNvSpPr>
-          <p:nvPr>
-            <p:ph sz="quarter" idx="13"/>
-          </p:nvPr>
-        </p:nvSpPr>
-        <p:spPr/>
-        <p:txBody>
-          <a:bodyPr/>
-          <a:lstStyle/>
-          <a:p>
-            <a:endParaRPr/>
           </a:p>
         </p:txBody>
       </p:sp>
@@ -47025,63 +44007,29 @@
       </p:sp>
       <p:sp>
         <p:nvSpPr>
-          <p:cNvPr id="7" name="Rectangle 6">
-            <a:extLst>
-              <a:ext uri="{FF2B5EF4-FFF2-40B4-BE49-F238E27FC236}">
-                <a16:creationId xmlns:a16="http://schemas.microsoft.com/office/drawing/2014/main" id="{4D956AE0-666A-B966-0B15-61A5E6C88F75}"/>
-              </a:ext>
-            </a:extLst>
-          </p:cNvPr>
-          <p:cNvSpPr/>
-          <p:nvPr/>
+          <p:cNvPr id="1004" name="Footer Placeholder 1004"/>
+          <p:cNvSpPr>
+            <a:spLocks noGrp="1"/>
+          </p:cNvSpPr>
+          <p:nvPr>
+            <p:ph type="ftr" sz="quarter" idx="3"/>
+          </p:nvPr>
         </p:nvSpPr>
-        <p:spPr>
-          <a:xfrm>
-            <a:off x="0" y="1390132"/>
-            <a:ext cx="12192000" cy="4927867"/>
-          </a:xfrm>
-          <a:prstGeom prst="rect">
-            <a:avLst/>
-          </a:prstGeom>
-          <a:solidFill>
-            <a:schemeClr val="bg1"/>
-          </a:solidFill>
-          <a:ln>
-            <a:noFill/>
-          </a:ln>
-          <a:effectLst>
-            <a:outerShdw blurRad="190500" dist="38100" dir="2700000" algn="tl" rotWithShape="0">
-              <a:prstClr val="black">
-                <a:alpha val="15000"/>
-              </a:prstClr>
-            </a:outerShdw>
-          </a:effectLst>
-        </p:spPr>
-        <p:style>
-          <a:lnRef idx="2">
-            <a:schemeClr val="accent1">
-              <a:shade val="50000"/>
-            </a:schemeClr>
-          </a:lnRef>
-          <a:fillRef idx="1">
-            <a:schemeClr val="accent1"/>
-          </a:fillRef>
-          <a:effectRef idx="0">
-            <a:schemeClr val="accent1"/>
-          </a:effectRef>
-          <a:fontRef idx="minor">
-            <a:schemeClr val="lt1"/>
-          </a:fontRef>
-        </p:style>
+        <p:spPr/>
         <p:txBody>
-          <a:bodyPr lIns="731520" tIns="72000" rIns="108000" bIns="72000" rtlCol="0" anchor="ctr"/>
+          <a:bodyPr/>
           <a:lstStyle/>
           <a:p>
-            <a:endParaRPr lang="nl-NL" sz="1200" b="1" noProof="0" dirty="0">
-              <a:solidFill>
-                <a:schemeClr val="accent1"/>
-              </a:solidFill>
-            </a:endParaRPr>
+            <a:r>
+              <a:rPr lang="en-US" dirty="0"/>
+              <a:t>Generated with Sigrid</a:t>
+            </a:r>
+          </a:p>
+          <a:p>
+            <a:r>
+              <a:rPr lang="en-US" dirty="0"/>
+              <a:t>for CUSTOMER_NAME</a:t>
+            </a:r>
           </a:p>
         </p:txBody>
       </p:sp>
@@ -47671,39 +44619,6 @@
       </p:grpSp>
       <p:sp>
         <p:nvSpPr>
-          <p:cNvPr id="1004" name="Footer Placeholder 1004"/>
-          <p:cNvSpPr>
-            <a:spLocks noGrp="1"/>
-          </p:cNvSpPr>
-          <p:nvPr>
-            <p:ph type="ftr" sz="quarter" idx="3"/>
-          </p:nvPr>
-        </p:nvSpPr>
-        <p:spPr>
-          <a:xfrm>
-            <a:off x="192088" y="6392596"/>
-            <a:ext cx="1763922" cy="370422"/>
-          </a:xfrm>
-        </p:spPr>
-        <p:txBody>
-          <a:bodyPr/>
-          <a:lstStyle/>
-          <a:p>
-            <a:r>
-              <a:rPr lang="en-US" dirty="0"/>
-              <a:t>Generated with Sigrid</a:t>
-            </a:r>
-          </a:p>
-          <a:p>
-            <a:r>
-              <a:rPr lang="en-US" dirty="0"/>
-              <a:t>for CUSTOMER_NAME</a:t>
-            </a:r>
-          </a:p>
-        </p:txBody>
-      </p:sp>
-      <p:sp>
-        <p:nvSpPr>
           <p:cNvPr id="1071" name="TextBox 1071"/>
           <p:cNvSpPr txBox="1"/>
           <p:nvPr/>
@@ -47919,8 +44834,8 @@
         </p:nvSpPr>
         <p:spPr>
           <a:xfrm>
-            <a:off x="381600" y="129568"/>
-            <a:ext cx="1410176" cy="228209"/>
+            <a:off x="381600" y="129599"/>
+            <a:ext cx="1410176" cy="228145"/>
           </a:xfrm>
         </p:spPr>
         <p:txBody>
@@ -47933,25 +44848,6 @@
               <a:rPr lang="en-US" dirty="0"/>
               <a:t>Maintainability</a:t>
             </a:r>
-          </a:p>
-        </p:txBody>
-      </p:sp>
-      <p:sp>
-        <p:nvSpPr>
-          <p:cNvPr id="3" name="Content Placeholder 2"/>
-          <p:cNvSpPr>
-            <a:spLocks noGrp="1"/>
-          </p:cNvSpPr>
-          <p:nvPr>
-            <p:ph sz="quarter" idx="13"/>
-          </p:nvPr>
-        </p:nvSpPr>
-        <p:spPr/>
-        <p:txBody>
-          <a:bodyPr/>
-          <a:lstStyle/>
-          <a:p>
-            <a:endParaRPr/>
           </a:p>
         </p:txBody>
       </p:sp>
@@ -47981,63 +44877,29 @@
       </p:sp>
       <p:sp>
         <p:nvSpPr>
-          <p:cNvPr id="7" name="Rectangle 6">
-            <a:extLst>
-              <a:ext uri="{FF2B5EF4-FFF2-40B4-BE49-F238E27FC236}">
-                <a16:creationId xmlns:a16="http://schemas.microsoft.com/office/drawing/2014/main" id="{4D956AE0-666A-B966-0B15-61A5E6C88F75}"/>
-              </a:ext>
-            </a:extLst>
-          </p:cNvPr>
-          <p:cNvSpPr/>
-          <p:nvPr/>
+          <p:cNvPr id="2004" name="Footer Placeholder 2004"/>
+          <p:cNvSpPr>
+            <a:spLocks noGrp="1"/>
+          </p:cNvSpPr>
+          <p:nvPr>
+            <p:ph type="ftr" sz="quarter" idx="3"/>
+          </p:nvPr>
         </p:nvSpPr>
-        <p:spPr>
-          <a:xfrm>
-            <a:off x="0" y="1390132"/>
-            <a:ext cx="12192000" cy="4927867"/>
-          </a:xfrm>
-          <a:prstGeom prst="rect">
-            <a:avLst/>
-          </a:prstGeom>
-          <a:solidFill>
-            <a:schemeClr val="bg1"/>
-          </a:solidFill>
-          <a:ln>
-            <a:noFill/>
-          </a:ln>
-          <a:effectLst>
-            <a:outerShdw blurRad="190500" dist="38100" dir="2700000" algn="tl" rotWithShape="0">
-              <a:prstClr val="black">
-                <a:alpha val="15000"/>
-              </a:prstClr>
-            </a:outerShdw>
-          </a:effectLst>
-        </p:spPr>
-        <p:style>
-          <a:lnRef idx="2">
-            <a:schemeClr val="accent1">
-              <a:shade val="50000"/>
-            </a:schemeClr>
-          </a:lnRef>
-          <a:fillRef idx="1">
-            <a:schemeClr val="accent1"/>
-          </a:fillRef>
-          <a:effectRef idx="0">
-            <a:schemeClr val="accent1"/>
-          </a:effectRef>
-          <a:fontRef idx="minor">
-            <a:schemeClr val="lt1"/>
-          </a:fontRef>
-        </p:style>
+        <p:spPr/>
         <p:txBody>
-          <a:bodyPr lIns="731520" tIns="72000" rIns="108000" bIns="72000" rtlCol="0" anchor="ctr"/>
+          <a:bodyPr/>
           <a:lstStyle/>
           <a:p>
-            <a:endParaRPr lang="nl-NL" sz="1200" b="1" noProof="0" dirty="0">
-              <a:solidFill>
-                <a:schemeClr val="accent1"/>
-              </a:solidFill>
-            </a:endParaRPr>
+            <a:r>
+              <a:rPr lang="en-US" dirty="0"/>
+              <a:t>Generated with Sigrid</a:t>
+            </a:r>
+          </a:p>
+          <a:p>
+            <a:r>
+              <a:rPr lang="en-US" dirty="0"/>
+              <a:t>for CUSTOMER_NAME</a:t>
+            </a:r>
           </a:p>
         </p:txBody>
       </p:sp>
@@ -48442,39 +45304,6 @@
       </p:sp>
       <p:sp>
         <p:nvSpPr>
-          <p:cNvPr id="2004" name="Footer Placeholder 2004"/>
-          <p:cNvSpPr>
-            <a:spLocks noGrp="1"/>
-          </p:cNvSpPr>
-          <p:nvPr>
-            <p:ph type="ftr" sz="quarter" idx="3"/>
-          </p:nvPr>
-        </p:nvSpPr>
-        <p:spPr>
-          <a:xfrm>
-            <a:off x="192088" y="6392596"/>
-            <a:ext cx="1763922" cy="370422"/>
-          </a:xfrm>
-        </p:spPr>
-        <p:txBody>
-          <a:bodyPr/>
-          <a:lstStyle/>
-          <a:p>
-            <a:r>
-              <a:rPr lang="en-US" dirty="0"/>
-              <a:t>Generated with Sigrid</a:t>
-            </a:r>
-          </a:p>
-          <a:p>
-            <a:r>
-              <a:rPr lang="en-US" dirty="0"/>
-              <a:t>for CUSTOMER_NAME</a:t>
-            </a:r>
-          </a:p>
-        </p:txBody>
-      </p:sp>
-      <p:sp>
-        <p:nvSpPr>
           <p:cNvPr id="2071" name="TextBox 2071"/>
           <p:cNvSpPr txBox="1"/>
           <p:nvPr/>
@@ -48565,11 +45394,46 @@
           <a:p>
             <a:pPr indent="-283845"/>
             <a:r>
+              <a:rPr lang="en-GB" sz="1550" dirty="0" err="1">
+                <a:ea typeface="Calibri"/>
+                <a:cs typeface="Calibri"/>
+              </a:rPr>
+              <a:t>PORTFOLIO_MAINT_CHANGE_SUMMARY_UNIT_SIZE</a:t>
+            </a:r>
+            <a:endParaRPr lang="en-GB" sz="1550" dirty="0">
+              <a:ea typeface="Calibri"/>
+              <a:cs typeface="Calibri"/>
+            </a:endParaRPr>
+          </a:p>
+          <a:p>
+            <a:pPr indent="-283845"/>
+            <a:r>
+              <a:rPr lang="en-GB" sz="1550" dirty="0" err="1">
+                <a:ea typeface="Calibri"/>
+                <a:cs typeface="Calibri"/>
+              </a:rPr>
+              <a:t>PORTFOLIO_MAINT_INCREASED_UNIT_SIZE</a:t>
+            </a:r>
+            <a:r>
               <a:rPr lang="en-GB" sz="1550" dirty="0">
                 <a:ea typeface="Calibri"/>
                 <a:cs typeface="Calibri"/>
               </a:rPr>
-              <a:t>PORTFOLIO_MAINT_INCREASED_UNIT_SIZE% of systems has seen an increase in their Unit Size rating. PORTFOLIO_MAINT_STABLE_UNIT_SIZE% of systems has remained stable. PORTFOLIO_MAINT_DECREASED_UNIT_SIZE% of systems has seen a decrease in maintainability.</a:t>
+              <a:t>% of systems has seen an increase in their Unit Size rating. </a:t>
+            </a:r>
+            <a:r>
+              <a:rPr lang="en-GB" sz="1550" dirty="0" err="1">
+                <a:ea typeface="Calibri"/>
+                <a:cs typeface="Calibri"/>
+              </a:rPr>
+              <a:t>PORTFOLIO_MAINT_STABLE_UNIT_SIZE</a:t>
+            </a:r>
+            <a:r>
+              <a:rPr lang="en-GB" sz="1550" dirty="0">
+                <a:ea typeface="Calibri"/>
+                <a:cs typeface="Calibri"/>
+              </a:rPr>
+              <a:t>% of systems has remained stable. PORTFOLIO_MAINT_DECREASED_UNIT_SIZE% of systems has seen a decrease in maintainability.</a:t>
             </a:r>
           </a:p>
           <a:p>
@@ -48626,8 +45490,8 @@
         </p:nvSpPr>
         <p:spPr>
           <a:xfrm>
-            <a:off x="381600" y="129568"/>
-            <a:ext cx="1410176" cy="228209"/>
+            <a:off x="381600" y="129599"/>
+            <a:ext cx="1410176" cy="228145"/>
           </a:xfrm>
         </p:spPr>
         <p:txBody>
@@ -48640,25 +45504,6 @@
               <a:rPr lang="en-US" dirty="0"/>
               <a:t>Maintainability</a:t>
             </a:r>
-          </a:p>
-        </p:txBody>
-      </p:sp>
-      <p:sp>
-        <p:nvSpPr>
-          <p:cNvPr id="3" name="Content Placeholder 2"/>
-          <p:cNvSpPr>
-            <a:spLocks noGrp="1"/>
-          </p:cNvSpPr>
-          <p:nvPr>
-            <p:ph sz="quarter" idx="13"/>
-          </p:nvPr>
-        </p:nvSpPr>
-        <p:spPr/>
-        <p:txBody>
-          <a:bodyPr/>
-          <a:lstStyle/>
-          <a:p>
-            <a:endParaRPr/>
           </a:p>
         </p:txBody>
       </p:sp>
@@ -48688,63 +45533,29 @@
       </p:sp>
       <p:sp>
         <p:nvSpPr>
-          <p:cNvPr id="7" name="Rectangle 6">
-            <a:extLst>
-              <a:ext uri="{FF2B5EF4-FFF2-40B4-BE49-F238E27FC236}">
-                <a16:creationId xmlns:a16="http://schemas.microsoft.com/office/drawing/2014/main" id="{4D956AE0-666A-B966-0B15-61A5E6C88F75}"/>
-              </a:ext>
-            </a:extLst>
-          </p:cNvPr>
-          <p:cNvSpPr/>
-          <p:nvPr/>
+          <p:cNvPr id="1004" name="Footer Placeholder 1004"/>
+          <p:cNvSpPr>
+            <a:spLocks noGrp="1"/>
+          </p:cNvSpPr>
+          <p:nvPr>
+            <p:ph type="ftr" sz="quarter" idx="3"/>
+          </p:nvPr>
         </p:nvSpPr>
-        <p:spPr>
-          <a:xfrm>
-            <a:off x="0" y="1390132"/>
-            <a:ext cx="12192000" cy="4927867"/>
-          </a:xfrm>
-          <a:prstGeom prst="rect">
-            <a:avLst/>
-          </a:prstGeom>
-          <a:solidFill>
-            <a:schemeClr val="bg1"/>
-          </a:solidFill>
-          <a:ln>
-            <a:noFill/>
-          </a:ln>
-          <a:effectLst>
-            <a:outerShdw blurRad="190500" dist="38100" dir="2700000" algn="tl" rotWithShape="0">
-              <a:prstClr val="black">
-                <a:alpha val="15000"/>
-              </a:prstClr>
-            </a:outerShdw>
-          </a:effectLst>
-        </p:spPr>
-        <p:style>
-          <a:lnRef idx="2">
-            <a:schemeClr val="accent1">
-              <a:shade val="50000"/>
-            </a:schemeClr>
-          </a:lnRef>
-          <a:fillRef idx="1">
-            <a:schemeClr val="accent1"/>
-          </a:fillRef>
-          <a:effectRef idx="0">
-            <a:schemeClr val="accent1"/>
-          </a:effectRef>
-          <a:fontRef idx="minor">
-            <a:schemeClr val="lt1"/>
-          </a:fontRef>
-        </p:style>
+        <p:spPr/>
         <p:txBody>
-          <a:bodyPr lIns="731520" tIns="72000" rIns="108000" bIns="72000" rtlCol="0" anchor="ctr"/>
+          <a:bodyPr/>
           <a:lstStyle/>
           <a:p>
-            <a:endParaRPr lang="nl-NL" sz="1200" b="1" noProof="0" dirty="0">
-              <a:solidFill>
-                <a:schemeClr val="accent1"/>
-              </a:solidFill>
-            </a:endParaRPr>
+            <a:r>
+              <a:rPr lang="en-US" dirty="0"/>
+              <a:t>Generated with Sigrid</a:t>
+            </a:r>
+          </a:p>
+          <a:p>
+            <a:r>
+              <a:rPr lang="en-US" dirty="0"/>
+              <a:t>for CUSTOMER_NAME</a:t>
+            </a:r>
           </a:p>
         </p:txBody>
       </p:sp>
@@ -49334,39 +46145,6 @@
       </p:grpSp>
       <p:sp>
         <p:nvSpPr>
-          <p:cNvPr id="1004" name="Footer Placeholder 1004"/>
-          <p:cNvSpPr>
-            <a:spLocks noGrp="1"/>
-          </p:cNvSpPr>
-          <p:nvPr>
-            <p:ph type="ftr" sz="quarter" idx="3"/>
-          </p:nvPr>
-        </p:nvSpPr>
-        <p:spPr>
-          <a:xfrm>
-            <a:off x="192088" y="6392596"/>
-            <a:ext cx="1763922" cy="370422"/>
-          </a:xfrm>
-        </p:spPr>
-        <p:txBody>
-          <a:bodyPr/>
-          <a:lstStyle/>
-          <a:p>
-            <a:r>
-              <a:rPr lang="en-US" dirty="0"/>
-              <a:t>Generated with Sigrid</a:t>
-            </a:r>
-          </a:p>
-          <a:p>
-            <a:r>
-              <a:rPr lang="en-US" dirty="0"/>
-              <a:t>for CUSTOMER_NAME</a:t>
-            </a:r>
-          </a:p>
-        </p:txBody>
-      </p:sp>
-      <p:sp>
-        <p:nvSpPr>
           <p:cNvPr id="1071" name="TextBox 1071"/>
           <p:cNvSpPr txBox="1"/>
           <p:nvPr/>
@@ -49582,8 +46360,8 @@
         </p:nvSpPr>
         <p:spPr>
           <a:xfrm>
-            <a:off x="381600" y="129568"/>
-            <a:ext cx="1410176" cy="228209"/>
+            <a:off x="381600" y="129599"/>
+            <a:ext cx="1410176" cy="228145"/>
           </a:xfrm>
         </p:spPr>
         <p:txBody>
@@ -49596,25 +46374,6 @@
               <a:rPr lang="en-US" dirty="0"/>
               <a:t>Maintainability</a:t>
             </a:r>
-          </a:p>
-        </p:txBody>
-      </p:sp>
-      <p:sp>
-        <p:nvSpPr>
-          <p:cNvPr id="3" name="Content Placeholder 2"/>
-          <p:cNvSpPr>
-            <a:spLocks noGrp="1"/>
-          </p:cNvSpPr>
-          <p:nvPr>
-            <p:ph sz="quarter" idx="13"/>
-          </p:nvPr>
-        </p:nvSpPr>
-        <p:spPr/>
-        <p:txBody>
-          <a:bodyPr/>
-          <a:lstStyle/>
-          <a:p>
-            <a:endParaRPr/>
           </a:p>
         </p:txBody>
       </p:sp>
@@ -49644,63 +46403,29 @@
       </p:sp>
       <p:sp>
         <p:nvSpPr>
-          <p:cNvPr id="7" name="Rectangle 6">
-            <a:extLst>
-              <a:ext uri="{FF2B5EF4-FFF2-40B4-BE49-F238E27FC236}">
-                <a16:creationId xmlns:a16="http://schemas.microsoft.com/office/drawing/2014/main" id="{4D956AE0-666A-B966-0B15-61A5E6C88F75}"/>
-              </a:ext>
-            </a:extLst>
-          </p:cNvPr>
-          <p:cNvSpPr/>
-          <p:nvPr/>
+          <p:cNvPr id="2004" name="Footer Placeholder 2004"/>
+          <p:cNvSpPr>
+            <a:spLocks noGrp="1"/>
+          </p:cNvSpPr>
+          <p:nvPr>
+            <p:ph type="ftr" sz="quarter" idx="3"/>
+          </p:nvPr>
         </p:nvSpPr>
-        <p:spPr>
-          <a:xfrm>
-            <a:off x="0" y="1390132"/>
-            <a:ext cx="12192000" cy="4927867"/>
-          </a:xfrm>
-          <a:prstGeom prst="rect">
-            <a:avLst/>
-          </a:prstGeom>
-          <a:solidFill>
-            <a:schemeClr val="bg1"/>
-          </a:solidFill>
-          <a:ln>
-            <a:noFill/>
-          </a:ln>
-          <a:effectLst>
-            <a:outerShdw blurRad="190500" dist="38100" dir="2700000" algn="tl" rotWithShape="0">
-              <a:prstClr val="black">
-                <a:alpha val="15000"/>
-              </a:prstClr>
-            </a:outerShdw>
-          </a:effectLst>
-        </p:spPr>
-        <p:style>
-          <a:lnRef idx="2">
-            <a:schemeClr val="accent1">
-              <a:shade val="50000"/>
-            </a:schemeClr>
-          </a:lnRef>
-          <a:fillRef idx="1">
-            <a:schemeClr val="accent1"/>
-          </a:fillRef>
-          <a:effectRef idx="0">
-            <a:schemeClr val="accent1"/>
-          </a:effectRef>
-          <a:fontRef idx="minor">
-            <a:schemeClr val="lt1"/>
-          </a:fontRef>
-        </p:style>
+        <p:spPr/>
         <p:txBody>
-          <a:bodyPr lIns="731520" tIns="72000" rIns="108000" bIns="72000" rtlCol="0" anchor="ctr"/>
+          <a:bodyPr/>
           <a:lstStyle/>
           <a:p>
-            <a:endParaRPr lang="nl-NL" sz="1200" b="1" noProof="0" dirty="0">
-              <a:solidFill>
-                <a:schemeClr val="accent1"/>
-              </a:solidFill>
-            </a:endParaRPr>
+            <a:r>
+              <a:rPr lang="en-US" dirty="0"/>
+              <a:t>Generated with Sigrid</a:t>
+            </a:r>
+          </a:p>
+          <a:p>
+            <a:r>
+              <a:rPr lang="en-US" dirty="0"/>
+              <a:t>for CUSTOMER_NAME</a:t>
+            </a:r>
           </a:p>
         </p:txBody>
       </p:sp>
@@ -50105,39 +46830,6 @@
       </p:sp>
       <p:sp>
         <p:nvSpPr>
-          <p:cNvPr id="2004" name="Footer Placeholder 2004"/>
-          <p:cNvSpPr>
-            <a:spLocks noGrp="1"/>
-          </p:cNvSpPr>
-          <p:nvPr>
-            <p:ph type="ftr" sz="quarter" idx="3"/>
-          </p:nvPr>
-        </p:nvSpPr>
-        <p:spPr>
-          <a:xfrm>
-            <a:off x="192088" y="6392596"/>
-            <a:ext cx="1763922" cy="370422"/>
-          </a:xfrm>
-        </p:spPr>
-        <p:txBody>
-          <a:bodyPr/>
-          <a:lstStyle/>
-          <a:p>
-            <a:r>
-              <a:rPr lang="en-US" dirty="0"/>
-              <a:t>Generated with Sigrid</a:t>
-            </a:r>
-          </a:p>
-          <a:p>
-            <a:r>
-              <a:rPr lang="en-US" dirty="0"/>
-              <a:t>for CUSTOMER_NAME</a:t>
-            </a:r>
-          </a:p>
-        </p:txBody>
-      </p:sp>
-      <p:sp>
-        <p:nvSpPr>
           <p:cNvPr id="2071" name="TextBox 2071"/>
           <p:cNvSpPr txBox="1"/>
           <p:nvPr/>
@@ -50228,11 +46920,46 @@
           <a:p>
             <a:pPr indent="-283845"/>
             <a:r>
+              <a:rPr lang="en-GB" sz="1550" dirty="0" err="1">
+                <a:ea typeface="Calibri"/>
+                <a:cs typeface="Calibri"/>
+              </a:rPr>
+              <a:t>PORTFOLIO_MAINT_CHANGE_SUMMARY_UNIT_COMPLEXITY</a:t>
+            </a:r>
+            <a:endParaRPr lang="en-GB" sz="1550" dirty="0">
+              <a:ea typeface="Calibri"/>
+              <a:cs typeface="Calibri"/>
+            </a:endParaRPr>
+          </a:p>
+          <a:p>
+            <a:pPr indent="-283845"/>
+            <a:r>
+              <a:rPr lang="en-GB" sz="1550" dirty="0" err="1">
+                <a:ea typeface="Calibri"/>
+                <a:cs typeface="Calibri"/>
+              </a:rPr>
+              <a:t>PORTFOLIO_MAINT_INCREASED_UNIT_COMPLEXITY</a:t>
+            </a:r>
+            <a:r>
               <a:rPr lang="en-GB" sz="1550" dirty="0">
                 <a:ea typeface="Calibri"/>
                 <a:cs typeface="Calibri"/>
               </a:rPr>
-              <a:t>PORTFOLIO_MAINT_INCREASED_UNIT_COMPLEXITY% of systems has seen an increase in their Unit Complexity rating. PORTFOLIO_MAINT_STABLE_UNIT_COMPLEXITY% of systems has remained stable. PORTFOLIO_MAINT_DECREASED_UNIT_COMPLEXITY% of systems has seen a decrease in maintainability.</a:t>
+              <a:t>% of systems has seen an increase in their Unit Complexity rating. </a:t>
+            </a:r>
+            <a:r>
+              <a:rPr lang="en-GB" sz="1550" dirty="0" err="1">
+                <a:ea typeface="Calibri"/>
+                <a:cs typeface="Calibri"/>
+              </a:rPr>
+              <a:t>PORTFOLIO_MAINT_STABLE_UNIT_COMPLEXITY</a:t>
+            </a:r>
+            <a:r>
+              <a:rPr lang="en-GB" sz="1550" dirty="0">
+                <a:ea typeface="Calibri"/>
+                <a:cs typeface="Calibri"/>
+              </a:rPr>
+              <a:t>% of systems has remained stable. PORTFOLIO_MAINT_DECREASED_UNIT_COMPLEXITY% of systems has seen a decrease in maintainability.</a:t>
             </a:r>
           </a:p>
           <a:p>
@@ -50289,8 +47016,8 @@
         </p:nvSpPr>
         <p:spPr>
           <a:xfrm>
-            <a:off x="381600" y="129568"/>
-            <a:ext cx="1410176" cy="228209"/>
+            <a:off x="381600" y="129599"/>
+            <a:ext cx="1410176" cy="228145"/>
           </a:xfrm>
         </p:spPr>
         <p:txBody>
@@ -50303,25 +47030,6 @@
               <a:rPr lang="en-US" dirty="0"/>
               <a:t>Maintainability</a:t>
             </a:r>
-          </a:p>
-        </p:txBody>
-      </p:sp>
-      <p:sp>
-        <p:nvSpPr>
-          <p:cNvPr id="3" name="Content Placeholder 2"/>
-          <p:cNvSpPr>
-            <a:spLocks noGrp="1"/>
-          </p:cNvSpPr>
-          <p:nvPr>
-            <p:ph sz="quarter" idx="13"/>
-          </p:nvPr>
-        </p:nvSpPr>
-        <p:spPr/>
-        <p:txBody>
-          <a:bodyPr/>
-          <a:lstStyle/>
-          <a:p>
-            <a:endParaRPr/>
           </a:p>
         </p:txBody>
       </p:sp>
@@ -50351,63 +47059,29 @@
       </p:sp>
       <p:sp>
         <p:nvSpPr>
-          <p:cNvPr id="7" name="Rectangle 6">
-            <a:extLst>
-              <a:ext uri="{FF2B5EF4-FFF2-40B4-BE49-F238E27FC236}">
-                <a16:creationId xmlns:a16="http://schemas.microsoft.com/office/drawing/2014/main" id="{4D956AE0-666A-B966-0B15-61A5E6C88F75}"/>
-              </a:ext>
-            </a:extLst>
-          </p:cNvPr>
-          <p:cNvSpPr/>
-          <p:nvPr/>
+          <p:cNvPr id="1004" name="Footer Placeholder 1004"/>
+          <p:cNvSpPr>
+            <a:spLocks noGrp="1"/>
+          </p:cNvSpPr>
+          <p:nvPr>
+            <p:ph type="ftr" sz="quarter" idx="3"/>
+          </p:nvPr>
         </p:nvSpPr>
-        <p:spPr>
-          <a:xfrm>
-            <a:off x="0" y="1390132"/>
-            <a:ext cx="12192000" cy="4927867"/>
-          </a:xfrm>
-          <a:prstGeom prst="rect">
-            <a:avLst/>
-          </a:prstGeom>
-          <a:solidFill>
-            <a:schemeClr val="bg1"/>
-          </a:solidFill>
-          <a:ln>
-            <a:noFill/>
-          </a:ln>
-          <a:effectLst>
-            <a:outerShdw blurRad="190500" dist="38100" dir="2700000" algn="tl" rotWithShape="0">
-              <a:prstClr val="black">
-                <a:alpha val="15000"/>
-              </a:prstClr>
-            </a:outerShdw>
-          </a:effectLst>
-        </p:spPr>
-        <p:style>
-          <a:lnRef idx="2">
-            <a:schemeClr val="accent1">
-              <a:shade val="50000"/>
-            </a:schemeClr>
-          </a:lnRef>
-          <a:fillRef idx="1">
-            <a:schemeClr val="accent1"/>
-          </a:fillRef>
-          <a:effectRef idx="0">
-            <a:schemeClr val="accent1"/>
-          </a:effectRef>
-          <a:fontRef idx="minor">
-            <a:schemeClr val="lt1"/>
-          </a:fontRef>
-        </p:style>
+        <p:spPr/>
         <p:txBody>
-          <a:bodyPr lIns="731520" tIns="72000" rIns="108000" bIns="72000" rtlCol="0" anchor="ctr"/>
+          <a:bodyPr/>
           <a:lstStyle/>
           <a:p>
-            <a:endParaRPr lang="nl-NL" sz="1200" b="1" noProof="0" dirty="0">
-              <a:solidFill>
-                <a:schemeClr val="accent1"/>
-              </a:solidFill>
-            </a:endParaRPr>
+            <a:r>
+              <a:rPr lang="en-US" dirty="0"/>
+              <a:t>Generated with Sigrid</a:t>
+            </a:r>
+          </a:p>
+          <a:p>
+            <a:r>
+              <a:rPr lang="en-US" dirty="0"/>
+              <a:t>for CUSTOMER_NAME</a:t>
+            </a:r>
           </a:p>
         </p:txBody>
       </p:sp>
@@ -50995,39 +47669,6 @@
           </p:txBody>
         </p:sp>
       </p:grpSp>
-      <p:sp>
-        <p:nvSpPr>
-          <p:cNvPr id="1004" name="Footer Placeholder 1004"/>
-          <p:cNvSpPr>
-            <a:spLocks noGrp="1"/>
-          </p:cNvSpPr>
-          <p:nvPr>
-            <p:ph type="ftr" sz="quarter" idx="3"/>
-          </p:nvPr>
-        </p:nvSpPr>
-        <p:spPr>
-          <a:xfrm>
-            <a:off x="192088" y="6392596"/>
-            <a:ext cx="1763922" cy="370422"/>
-          </a:xfrm>
-        </p:spPr>
-        <p:txBody>
-          <a:bodyPr/>
-          <a:lstStyle/>
-          <a:p>
-            <a:r>
-              <a:rPr lang="en-US" dirty="0"/>
-              <a:t>Generated with Sigrid</a:t>
-            </a:r>
-          </a:p>
-          <a:p>
-            <a:r>
-              <a:rPr lang="en-US" dirty="0"/>
-              <a:t>for CUSTOMER_NAME</a:t>
-            </a:r>
-          </a:p>
-        </p:txBody>
-      </p:sp>
       <p:sp>
         <p:nvSpPr>
           <p:cNvPr id="1071" name="TextBox 1071"/>
